--- a/docs/demo-prep-presentation.pptx
+++ b/docs/demo-prep-presentation.pptx
@@ -20,9 +20,11 @@
     <p:sldId id="268" r:id="rId14"/>
     <p:sldId id="269" r:id="rId15"/>
     <p:sldId id="270" r:id="rId16"/>
+    <p:sldId id="271" r:id="rId17"/>
+    <p:sldId id="272" r:id="rId18"/>
   </p:sldIdLst>
   <p:notesMasterIdLst>
-    <p:notesMasterId r:id="rId17"/>
+    <p:notesMasterId r:id="rId19"/>
   </p:notesMasterIdLst>
   <p:sldSz cx="12192000" cy="6858000"/>
   <p:notesSz cx="6858000" cy="12192000"/>
@@ -1086,6 +1088,182 @@
 </p:notes>
 </file>
 
+<file path=ppt/notesSlides/notesSlide16.xml><?xml version="1.0" encoding="utf-8"?>
+<p:notes xmlns:a="http://schemas.openxmlformats.org/drawingml/2006/main" xmlns:r="http://schemas.openxmlformats.org/officeDocument/2006/relationships" xmlns:p="http://schemas.openxmlformats.org/presentationml/2006/main">
+  <p:cSld>
+    <p:spTree>
+      <p:nvGrpSpPr>
+        <p:cNvPr id="1" name=""/>
+        <p:cNvGrpSpPr/>
+        <p:nvPr/>
+      </p:nvGrpSpPr>
+      <p:grpSpPr>
+        <a:xfrm>
+          <a:off x="0" y="0"/>
+          <a:ext cx="0" cy="0"/>
+          <a:chOff x="0" y="0"/>
+          <a:chExt cx="0" cy="0"/>
+        </a:xfrm>
+      </p:grpSpPr>
+      <p:sp>
+        <p:nvSpPr>
+          <p:cNvPr id="2" name="Slide Image Placeholder 1"/>
+          <p:cNvSpPr>
+            <a:spLocks noGrp="1" noRot="1" noChangeAspect="1"/>
+          </p:cNvSpPr>
+          <p:nvPr>
+            <p:ph type="sldImg"/>
+          </p:nvPr>
+        </p:nvSpPr>
+        <p:spPr/>
+      </p:sp>
+      <p:sp>
+        <p:nvSpPr>
+          <p:cNvPr id="3" name="Notes Placeholder 2"/>
+          <p:cNvSpPr>
+            <a:spLocks noGrp="1"/>
+          </p:cNvSpPr>
+          <p:nvPr>
+            <p:ph type="body" idx="1"/>
+          </p:nvPr>
+        </p:nvSpPr>
+        <p:spPr/>
+        <p:txBody>
+          <a:bodyPr/>
+          <a:lstStyle/>
+          <a:p>
+            <a:r>
+              <a:rPr lang="en-US" dirty="0"/>
+              <a:t/>
+            </a:r>
+            <a:endParaRPr lang="en-US" dirty="0"/>
+          </a:p>
+        </p:txBody>
+      </p:sp>
+      <p:sp>
+        <p:nvSpPr>
+          <p:cNvPr id="4" name="Slide Number Placeholder 3"/>
+          <p:cNvSpPr>
+            <a:spLocks noGrp="1"/>
+          </p:cNvSpPr>
+          <p:nvPr>
+            <p:ph type="sldNum" sz="quarter" idx="10"/>
+          </p:nvPr>
+        </p:nvSpPr>
+        <p:spPr/>
+        <p:txBody>
+          <a:bodyPr/>
+          <a:lstStyle/>
+          <a:p>
+            <a:fld id="{F7021451-1387-4CA6-816F-3879F97B5CBC}" type="slidenum">
+              <a:rPr lang="en-US"/>
+              <a:t>16</a:t>
+            </a:fld>
+            <a:endParaRPr lang="en-US"/>
+          </a:p>
+        </p:txBody>
+      </p:sp>
+    </p:spTree>
+    <p:extLst>
+      <p:ext uri="{BB962C8B-B14F-4D97-AF65-F5344CB8AC3E}">
+        <p14:creationId xmlns:p14="http://schemas.microsoft.com/office/powerpoint/2010/main" val="1024086991"/>
+      </p:ext>
+    </p:extLst>
+  </p:cSld>
+  <p:clrMapOvr>
+    <a:masterClrMapping/>
+  </p:clrMapOvr>
+</p:notes>
+</file>
+
+<file path=ppt/notesSlides/notesSlide17.xml><?xml version="1.0" encoding="utf-8"?>
+<p:notes xmlns:a="http://schemas.openxmlformats.org/drawingml/2006/main" xmlns:r="http://schemas.openxmlformats.org/officeDocument/2006/relationships" xmlns:p="http://schemas.openxmlformats.org/presentationml/2006/main">
+  <p:cSld>
+    <p:spTree>
+      <p:nvGrpSpPr>
+        <p:cNvPr id="1" name=""/>
+        <p:cNvGrpSpPr/>
+        <p:nvPr/>
+      </p:nvGrpSpPr>
+      <p:grpSpPr>
+        <a:xfrm>
+          <a:off x="0" y="0"/>
+          <a:ext cx="0" cy="0"/>
+          <a:chOff x="0" y="0"/>
+          <a:chExt cx="0" cy="0"/>
+        </a:xfrm>
+      </p:grpSpPr>
+      <p:sp>
+        <p:nvSpPr>
+          <p:cNvPr id="2" name="Slide Image Placeholder 1"/>
+          <p:cNvSpPr>
+            <a:spLocks noGrp="1" noRot="1" noChangeAspect="1"/>
+          </p:cNvSpPr>
+          <p:nvPr>
+            <p:ph type="sldImg"/>
+          </p:nvPr>
+        </p:nvSpPr>
+        <p:spPr/>
+      </p:sp>
+      <p:sp>
+        <p:nvSpPr>
+          <p:cNvPr id="3" name="Notes Placeholder 2"/>
+          <p:cNvSpPr>
+            <a:spLocks noGrp="1"/>
+          </p:cNvSpPr>
+          <p:nvPr>
+            <p:ph type="body" idx="1"/>
+          </p:nvPr>
+        </p:nvSpPr>
+        <p:spPr/>
+        <p:txBody>
+          <a:bodyPr/>
+          <a:lstStyle/>
+          <a:p>
+            <a:r>
+              <a:rPr lang="en-US" dirty="0"/>
+              <a:t/>
+            </a:r>
+            <a:endParaRPr lang="en-US" dirty="0"/>
+          </a:p>
+        </p:txBody>
+      </p:sp>
+      <p:sp>
+        <p:nvSpPr>
+          <p:cNvPr id="4" name="Slide Number Placeholder 3"/>
+          <p:cNvSpPr>
+            <a:spLocks noGrp="1"/>
+          </p:cNvSpPr>
+          <p:nvPr>
+            <p:ph type="sldNum" sz="quarter" idx="10"/>
+          </p:nvPr>
+        </p:nvSpPr>
+        <p:spPr/>
+        <p:txBody>
+          <a:bodyPr/>
+          <a:lstStyle/>
+          <a:p>
+            <a:fld id="{F7021451-1387-4CA6-816F-3879F97B5CBC}" type="slidenum">
+              <a:rPr lang="en-US"/>
+              <a:t>17</a:t>
+            </a:fld>
+            <a:endParaRPr lang="en-US"/>
+          </a:p>
+        </p:txBody>
+      </p:sp>
+    </p:spTree>
+    <p:extLst>
+      <p:ext uri="{BB962C8B-B14F-4D97-AF65-F5344CB8AC3E}">
+        <p14:creationId xmlns:p14="http://schemas.microsoft.com/office/powerpoint/2010/main" val="1024086991"/>
+      </p:ext>
+    </p:extLst>
+  </p:cSld>
+  <p:clrMapOvr>
+    <a:masterClrMapping/>
+  </p:clrMapOvr>
+</p:notes>
+</file>
+
 <file path=ppt/notesSlides/notesSlide2.xml><?xml version="1.0" encoding="utf-8"?>
 <p:notes xmlns:a="http://schemas.openxmlformats.org/drawingml/2006/main" xmlns:r="http://schemas.openxmlformats.org/officeDocument/2006/relationships" xmlns:p="http://schemas.openxmlformats.org/presentationml/2006/main">
   <p:cSld>
@@ -2233,7 +2411,7 @@
     <p:bg>
       <p:bgPr>
         <a:solidFill>
-          <a:srgbClr val="FFFFFF"/>
+          <a:srgbClr val="2E75B6"/>
         </a:solidFill>
       </p:bgPr>
     </p:bg>
@@ -2253,525 +2431,120 @@
       </p:grpSpPr>
       <p:sp>
         <p:nvSpPr>
-          <p:cNvPr id="2" name="Shape 0"/>
-          <p:cNvSpPr/>
-          <p:nvPr/>
-        </p:nvSpPr>
-        <p:spPr>
-          <a:xfrm>
-            <a:off x="0" y="0"/>
-            <a:ext cx="109728" cy="6858000"/>
-          </a:xfrm>
-          <a:prstGeom prst="rect">
-            <a:avLst/>
-          </a:prstGeom>
-          <a:solidFill>
-            <a:srgbClr val="1F3864"/>
-          </a:solidFill>
-          <a:ln/>
-        </p:spPr>
-      </p:sp>
-      <p:sp>
-        <p:nvSpPr>
-          <p:cNvPr id="3" name="Shape 1"/>
-          <p:cNvSpPr/>
-          <p:nvPr/>
-        </p:nvSpPr>
-        <p:spPr>
-          <a:xfrm>
-            <a:off x="109728" y="0"/>
-            <a:ext cx="11826240" cy="1005840"/>
-          </a:xfrm>
-          <a:prstGeom prst="rect">
-            <a:avLst/>
-          </a:prstGeom>
-          <a:solidFill>
-            <a:srgbClr val="1F3864"/>
-          </a:solidFill>
-          <a:ln/>
-        </p:spPr>
-      </p:sp>
-      <p:sp>
-        <p:nvSpPr>
-          <p:cNvPr id="4" name="Text 2"/>
-          <p:cNvSpPr/>
-          <p:nvPr/>
-        </p:nvSpPr>
-        <p:spPr>
-          <a:xfrm>
-            <a:off x="320040" y="91440"/>
-            <a:ext cx="10728960" cy="822960"/>
-          </a:xfrm>
-          <a:prstGeom prst="rect">
-            <a:avLst/>
-          </a:prstGeom>
-          <a:noFill/>
-          <a:ln/>
-        </p:spPr>
-        <p:txBody>
-          <a:bodyPr wrap="square" rtlCol="0" anchor="ctr"/>
-          <a:lstStyle/>
-          <a:p>
-            <a:pPr indent="0" marL="0">
-              <a:buNone/>
-            </a:pPr>
-            <a:r>
-              <a:rPr lang="en-US" sz="2400" b="1" dirty="0">
-                <a:solidFill>
-                  <a:srgbClr val="FFFFFF"/>
+          <p:cNvPr id="2" name="Text 0"/>
+          <p:cNvSpPr/>
+          <p:nvPr/>
+        </p:nvSpPr>
+        <p:spPr>
+          <a:xfrm>
+            <a:off x="457200" y="914400"/>
+            <a:ext cx="1828800" cy="1371600"/>
+          </a:xfrm>
+          <a:prstGeom prst="rect">
+            <a:avLst/>
+          </a:prstGeom>
+          <a:noFill/>
+          <a:ln/>
+        </p:spPr>
+        <p:txBody>
+          <a:bodyPr wrap="square" rtlCol="0" anchor="ctr"/>
+          <a:lstStyle/>
+          <a:p>
+            <a:pPr algn="ctr" indent="0" marL="0">
+              <a:buNone/>
+            </a:pPr>
+            <a:r>
+              <a:rPr lang="en-US" sz="8000" b="1" dirty="0">
+                <a:solidFill>
+                  <a:srgbClr val="FFFFFF">
+                    <a:alpha val="70000"/>
+                  </a:srgbClr>
                 </a:solidFill>
                 <a:latin typeface="Calibri Light" pitchFamily="34" charset="0"/>
                 <a:ea typeface="Calibri Light" pitchFamily="34" charset="-122"/>
                 <a:cs typeface="Calibri Light" pitchFamily="34" charset="-120"/>
               </a:rPr>
-              <a:t>Live Demo  —  Pre-stage 10 Min Before the Call</a:t>
-            </a:r>
-            <a:endParaRPr lang="en-US" sz="2400" dirty="0"/>
-          </a:p>
-        </p:txBody>
-      </p:sp>
-      <p:sp>
-        <p:nvSpPr>
-          <p:cNvPr id="5" name="Shape 3"/>
-          <p:cNvSpPr/>
-          <p:nvPr/>
-        </p:nvSpPr>
-        <p:spPr>
-          <a:xfrm>
-            <a:off x="109728" y="1143000"/>
-            <a:ext cx="11826240" cy="493776"/>
-          </a:xfrm>
-          <a:prstGeom prst="rect">
-            <a:avLst/>
-          </a:prstGeom>
-          <a:solidFill>
-            <a:srgbClr val="F2F2F2"/>
-          </a:solidFill>
-          <a:ln w="12700">
-            <a:solidFill>
-              <a:srgbClr val="F2F2F2"/>
-            </a:solidFill>
-            <a:prstDash val="solid"/>
-          </a:ln>
-        </p:spPr>
-      </p:sp>
-      <p:sp>
-        <p:nvSpPr>
-          <p:cNvPr id="6" name="Shape 4"/>
-          <p:cNvSpPr/>
-          <p:nvPr/>
-        </p:nvSpPr>
-        <p:spPr>
-          <a:xfrm>
-            <a:off x="256032" y="1325880"/>
-            <a:ext cx="128016" cy="128016"/>
-          </a:xfrm>
-          <a:prstGeom prst="ellipse">
-            <a:avLst/>
-          </a:prstGeom>
-          <a:solidFill>
-            <a:srgbClr val="2E75B6"/>
-          </a:solidFill>
-          <a:ln w="12700">
-            <a:solidFill>
-              <a:srgbClr val="2E75B6"/>
-            </a:solidFill>
-            <a:prstDash val="solid"/>
-          </a:ln>
-        </p:spPr>
-      </p:sp>
-      <p:sp>
-        <p:nvSpPr>
-          <p:cNvPr id="7" name="Text 5"/>
-          <p:cNvSpPr/>
-          <p:nvPr/>
-        </p:nvSpPr>
-        <p:spPr>
-          <a:xfrm>
-            <a:off x="475488" y="1143000"/>
-            <a:ext cx="10485120" cy="493776"/>
-          </a:xfrm>
-          <a:prstGeom prst="rect">
-            <a:avLst/>
-          </a:prstGeom>
-          <a:noFill/>
-          <a:ln/>
-        </p:spPr>
-        <p:txBody>
-          <a:bodyPr wrap="square" rtlCol="0" anchor="ctr"/>
-          <a:lstStyle/>
-          <a:p>
-            <a:pPr indent="0" marL="0">
-              <a:buNone/>
-            </a:pPr>
-            <a:r>
-              <a:rPr lang="en-US" sz="1400" dirty="0">
-                <a:solidFill>
-                  <a:srgbClr val="2C2C2C"/>
+              <a:t>03</a:t>
+            </a:r>
+            <a:endParaRPr lang="en-US" sz="8000" dirty="0"/>
+          </a:p>
+        </p:txBody>
+      </p:sp>
+      <p:sp>
+        <p:nvSpPr>
+          <p:cNvPr id="3" name="Text 1"/>
+          <p:cNvSpPr/>
+          <p:nvPr/>
+        </p:nvSpPr>
+        <p:spPr>
+          <a:xfrm>
+            <a:off x="2286000" y="1463040"/>
+            <a:ext cx="6400800" cy="914400"/>
+          </a:xfrm>
+          <a:prstGeom prst="rect">
+            <a:avLst/>
+          </a:prstGeom>
+          <a:noFill/>
+          <a:ln/>
+        </p:spPr>
+        <p:txBody>
+          <a:bodyPr wrap="square" rtlCol="0" anchor="ctr"/>
+          <a:lstStyle/>
+          <a:p>
+            <a:pPr indent="0" marL="0">
+              <a:buNone/>
+            </a:pPr>
+            <a:r>
+              <a:rPr lang="en-US" sz="3200" b="1" dirty="0">
+                <a:solidFill>
+                  <a:srgbClr val="FFFFFF"/>
+                </a:solidFill>
+                <a:latin typeface="Calibri Light" pitchFamily="34" charset="0"/>
+                <a:ea typeface="Calibri Light" pitchFamily="34" charset="-122"/>
+                <a:cs typeface="Calibri Light" pitchFamily="34" charset="-120"/>
+              </a:rPr>
+              <a:t>How</a:t>
+            </a:r>
+            <a:endParaRPr lang="en-US" sz="3200" dirty="0"/>
+          </a:p>
+        </p:txBody>
+      </p:sp>
+      <p:sp>
+        <p:nvSpPr>
+          <p:cNvPr id="4" name="Text 2"/>
+          <p:cNvSpPr/>
+          <p:nvPr/>
+        </p:nvSpPr>
+        <p:spPr>
+          <a:xfrm>
+            <a:off x="2286000" y="2468880"/>
+            <a:ext cx="6400800" cy="457200"/>
+          </a:xfrm>
+          <a:prstGeom prst="rect">
+            <a:avLst/>
+          </a:prstGeom>
+          <a:noFill/>
+          <a:ln/>
+        </p:spPr>
+        <p:txBody>
+          <a:bodyPr wrap="square" rtlCol="0" anchor="ctr"/>
+          <a:lstStyle/>
+          <a:p>
+            <a:pPr indent="0" marL="0">
+              <a:buNone/>
+            </a:pPr>
+            <a:r>
+              <a:rPr lang="en-US" sz="1800" dirty="0">
+                <a:solidFill>
+                  <a:srgbClr val="BDD7EE"/>
                 </a:solidFill>
                 <a:latin typeface="Calibri" pitchFamily="34" charset="0"/>
                 <a:ea typeface="Calibri" pitchFamily="34" charset="-122"/>
                 <a:cs typeface="Calibri" pitchFamily="34" charset="-120"/>
               </a:rPr>
-              <a:t>Browser tab 1: make.preview.microsoft.com  —  blank agent 'Demo FAQ Agent' already created, on Overview page</a:t>
-            </a:r>
-            <a:endParaRPr lang="en-US" sz="1400" dirty="0"/>
-          </a:p>
-        </p:txBody>
-      </p:sp>
-      <p:sp>
-        <p:nvSpPr>
-          <p:cNvPr id="8" name="Shape 6"/>
-          <p:cNvSpPr/>
-          <p:nvPr/>
-        </p:nvSpPr>
-        <p:spPr>
-          <a:xfrm>
-            <a:off x="109728" y="1673352"/>
-            <a:ext cx="11826240" cy="493776"/>
-          </a:xfrm>
-          <a:prstGeom prst="rect">
-            <a:avLst/>
-          </a:prstGeom>
-          <a:solidFill>
-            <a:srgbClr val="FFFFFF"/>
-          </a:solidFill>
-          <a:ln w="12700">
-            <a:solidFill>
-              <a:srgbClr val="FFFFFF"/>
-            </a:solidFill>
-            <a:prstDash val="solid"/>
-          </a:ln>
-        </p:spPr>
-      </p:sp>
-      <p:sp>
-        <p:nvSpPr>
-          <p:cNvPr id="9" name="Shape 7"/>
-          <p:cNvSpPr/>
-          <p:nvPr/>
-        </p:nvSpPr>
-        <p:spPr>
-          <a:xfrm>
-            <a:off x="256032" y="1856232"/>
-            <a:ext cx="128016" cy="128016"/>
-          </a:xfrm>
-          <a:prstGeom prst="ellipse">
-            <a:avLst/>
-          </a:prstGeom>
-          <a:solidFill>
-            <a:srgbClr val="2E75B6"/>
-          </a:solidFill>
-          <a:ln w="12700">
-            <a:solidFill>
-              <a:srgbClr val="2E75B6"/>
-            </a:solidFill>
-            <a:prstDash val="solid"/>
-          </a:ln>
-        </p:spPr>
-      </p:sp>
-      <p:sp>
-        <p:nvSpPr>
-          <p:cNvPr id="10" name="Text 8"/>
-          <p:cNvSpPr/>
-          <p:nvPr/>
-        </p:nvSpPr>
-        <p:spPr>
-          <a:xfrm>
-            <a:off x="475488" y="1673352"/>
-            <a:ext cx="10485120" cy="493776"/>
-          </a:xfrm>
-          <a:prstGeom prst="rect">
-            <a:avLst/>
-          </a:prstGeom>
-          <a:noFill/>
-          <a:ln/>
-        </p:spPr>
-        <p:txBody>
-          <a:bodyPr wrap="square" rtlCol="0" anchor="ctr"/>
-          <a:lstStyle/>
-          <a:p>
-            <a:pPr indent="0" marL="0">
-              <a:buNone/>
-            </a:pPr>
-            <a:r>
-              <a:rPr lang="en-US" sz="1400" dirty="0">
-                <a:solidFill>
-                  <a:srgbClr val="2C2C2C"/>
-                </a:solidFill>
-                <a:latin typeface="Calibri" pitchFamily="34" charset="0"/>
-                <a:ea typeface="Calibri" pitchFamily="34" charset="-122"/>
-                <a:cs typeface="Calibri" pitchFamily="34" charset="-120"/>
-              </a:rPr>
-              <a:t>Browser tab 2: Copilot Studio test pane open and ready</a:t>
-            </a:r>
-            <a:endParaRPr lang="en-US" sz="1400" dirty="0"/>
-          </a:p>
-        </p:txBody>
-      </p:sp>
-      <p:sp>
-        <p:nvSpPr>
-          <p:cNvPr id="11" name="Shape 9"/>
-          <p:cNvSpPr/>
-          <p:nvPr/>
-        </p:nvSpPr>
-        <p:spPr>
-          <a:xfrm>
-            <a:off x="109728" y="2203704"/>
-            <a:ext cx="11826240" cy="493776"/>
-          </a:xfrm>
-          <a:prstGeom prst="rect">
-            <a:avLst/>
-          </a:prstGeom>
-          <a:solidFill>
-            <a:srgbClr val="F2F2F2"/>
-          </a:solidFill>
-          <a:ln w="12700">
-            <a:solidFill>
-              <a:srgbClr val="F2F2F2"/>
-            </a:solidFill>
-            <a:prstDash val="solid"/>
-          </a:ln>
-        </p:spPr>
-      </p:sp>
-      <p:sp>
-        <p:nvSpPr>
-          <p:cNvPr id="12" name="Shape 10"/>
-          <p:cNvSpPr/>
-          <p:nvPr/>
-        </p:nvSpPr>
-        <p:spPr>
-          <a:xfrm>
-            <a:off x="256032" y="2386584"/>
-            <a:ext cx="128016" cy="128016"/>
-          </a:xfrm>
-          <a:prstGeom prst="ellipse">
-            <a:avLst/>
-          </a:prstGeom>
-          <a:solidFill>
-            <a:srgbClr val="2E75B6"/>
-          </a:solidFill>
-          <a:ln w="12700">
-            <a:solidFill>
-              <a:srgbClr val="2E75B6"/>
-            </a:solidFill>
-            <a:prstDash val="solid"/>
-          </a:ln>
-        </p:spPr>
-      </p:sp>
-      <p:sp>
-        <p:nvSpPr>
-          <p:cNvPr id="13" name="Text 11"/>
-          <p:cNvSpPr/>
-          <p:nvPr/>
-        </p:nvSpPr>
-        <p:spPr>
-          <a:xfrm>
-            <a:off x="475488" y="2203704"/>
-            <a:ext cx="10485120" cy="493776"/>
-          </a:xfrm>
-          <a:prstGeom prst="rect">
-            <a:avLst/>
-          </a:prstGeom>
-          <a:noFill/>
-          <a:ln/>
-        </p:spPr>
-        <p:txBody>
-          <a:bodyPr wrap="square" rtlCol="0" anchor="ctr"/>
-          <a:lstStyle/>
-          <a:p>
-            <a:pPr indent="0" marL="0">
-              <a:buNone/>
-            </a:pPr>
-            <a:r>
-              <a:rPr lang="en-US" sz="1400" dirty="0">
-                <a:solidFill>
-                  <a:srgbClr val="2C2C2C"/>
-                </a:solidFill>
-                <a:latin typeface="Calibri" pitchFamily="34" charset="0"/>
-                <a:ea typeface="Calibri" pitchFamily="34" charset="-122"/>
-                <a:cs typeface="Calibri" pitchFamily="34" charset="-120"/>
-              </a:rPr>
-              <a:t>VS Code: this repo open in Explorer, terminal at repo root</a:t>
-            </a:r>
-            <a:endParaRPr lang="en-US" sz="1400" dirty="0"/>
-          </a:p>
-        </p:txBody>
-      </p:sp>
-      <p:sp>
-        <p:nvSpPr>
-          <p:cNvPr id="14" name="Shape 12"/>
-          <p:cNvSpPr/>
-          <p:nvPr/>
-        </p:nvSpPr>
-        <p:spPr>
-          <a:xfrm>
-            <a:off x="109728" y="2734056"/>
-            <a:ext cx="11826240" cy="493776"/>
-          </a:xfrm>
-          <a:prstGeom prst="rect">
-            <a:avLst/>
-          </a:prstGeom>
-          <a:solidFill>
-            <a:srgbClr val="FFFFFF"/>
-          </a:solidFill>
-          <a:ln w="12700">
-            <a:solidFill>
-              <a:srgbClr val="FFFFFF"/>
-            </a:solidFill>
-            <a:prstDash val="solid"/>
-          </a:ln>
-        </p:spPr>
-      </p:sp>
-      <p:sp>
-        <p:nvSpPr>
-          <p:cNvPr id="15" name="Shape 13"/>
-          <p:cNvSpPr/>
-          <p:nvPr/>
-        </p:nvSpPr>
-        <p:spPr>
-          <a:xfrm>
-            <a:off x="256032" y="2916936"/>
-            <a:ext cx="128016" cy="128016"/>
-          </a:xfrm>
-          <a:prstGeom prst="ellipse">
-            <a:avLst/>
-          </a:prstGeom>
-          <a:solidFill>
-            <a:srgbClr val="2E75B6"/>
-          </a:solidFill>
-          <a:ln w="12700">
-            <a:solidFill>
-              <a:srgbClr val="2E75B6"/>
-            </a:solidFill>
-            <a:prstDash val="solid"/>
-          </a:ln>
-        </p:spPr>
-      </p:sp>
-      <p:sp>
-        <p:nvSpPr>
-          <p:cNvPr id="16" name="Text 14"/>
-          <p:cNvSpPr/>
-          <p:nvPr/>
-        </p:nvSpPr>
-        <p:spPr>
-          <a:xfrm>
-            <a:off x="475488" y="2734056"/>
-            <a:ext cx="10485120" cy="493776"/>
-          </a:xfrm>
-          <a:prstGeom prst="rect">
-            <a:avLst/>
-          </a:prstGeom>
-          <a:noFill/>
-          <a:ln/>
-        </p:spPr>
-        <p:txBody>
-          <a:bodyPr wrap="square" rtlCol="0" anchor="ctr"/>
-          <a:lstStyle/>
-          <a:p>
-            <a:pPr indent="0" marL="0">
-              <a:buNone/>
-            </a:pPr>
-            <a:r>
-              <a:rPr lang="en-US" sz="1400" dirty="0">
-                <a:solidFill>
-                  <a:srgbClr val="2C2C2C"/>
-                </a:solidFill>
-                <a:latin typeface="Calibri" pitchFamily="34" charset="0"/>
-                <a:ea typeface="Calibri" pitchFamily="34" charset="-122"/>
-                <a:cs typeface="Calibri" pitchFamily="34" charset="-120"/>
-              </a:rPr>
-              <a:t>Run: pac auth list  —  confirm your Dev environment is selected</a:t>
-            </a:r>
-            <a:endParaRPr lang="en-US" sz="1400" dirty="0"/>
-          </a:p>
-        </p:txBody>
-      </p:sp>
-      <p:sp>
-        <p:nvSpPr>
-          <p:cNvPr id="17" name="Shape 15"/>
-          <p:cNvSpPr/>
-          <p:nvPr/>
-        </p:nvSpPr>
-        <p:spPr>
-          <a:xfrm>
-            <a:off x="109728" y="3264408"/>
-            <a:ext cx="11826240" cy="493776"/>
-          </a:xfrm>
-          <a:prstGeom prst="rect">
-            <a:avLst/>
-          </a:prstGeom>
-          <a:solidFill>
-            <a:srgbClr val="F2F2F2"/>
-          </a:solidFill>
-          <a:ln w="12700">
-            <a:solidFill>
-              <a:srgbClr val="F2F2F2"/>
-            </a:solidFill>
-            <a:prstDash val="solid"/>
-          </a:ln>
-        </p:spPr>
-      </p:sp>
-      <p:sp>
-        <p:nvSpPr>
-          <p:cNvPr id="18" name="Shape 16"/>
-          <p:cNvSpPr/>
-          <p:nvPr/>
-        </p:nvSpPr>
-        <p:spPr>
-          <a:xfrm>
-            <a:off x="256032" y="3447288"/>
-            <a:ext cx="128016" cy="128016"/>
-          </a:xfrm>
-          <a:prstGeom prst="ellipse">
-            <a:avLst/>
-          </a:prstGeom>
-          <a:solidFill>
-            <a:srgbClr val="2E75B6"/>
-          </a:solidFill>
-          <a:ln w="12700">
-            <a:solidFill>
-              <a:srgbClr val="2E75B6"/>
-            </a:solidFill>
-            <a:prstDash val="solid"/>
-          </a:ln>
-        </p:spPr>
-      </p:sp>
-      <p:sp>
-        <p:nvSpPr>
-          <p:cNvPr id="19" name="Text 17"/>
-          <p:cNvSpPr/>
-          <p:nvPr/>
-        </p:nvSpPr>
-        <p:spPr>
-          <a:xfrm>
-            <a:off x="475488" y="3264408"/>
-            <a:ext cx="10485120" cy="493776"/>
-          </a:xfrm>
-          <a:prstGeom prst="rect">
-            <a:avLst/>
-          </a:prstGeom>
-          <a:noFill/>
-          <a:ln/>
-        </p:spPr>
-        <p:txBody>
-          <a:bodyPr wrap="square" rtlCol="0" anchor="ctr"/>
-          <a:lstStyle/>
-          <a:p>
-            <a:pPr indent="0" marL="0">
-              <a:buNone/>
-            </a:pPr>
-            <a:r>
-              <a:rPr lang="en-US" sz="1400" dirty="0">
-                <a:solidFill>
-                  <a:srgbClr val="2C2C2C"/>
-                </a:solidFill>
-                <a:latin typeface="Calibri" pitchFamily="34" charset="0"/>
-                <a:ea typeface="Calibri" pitchFamily="34" charset="-122"/>
-                <a:cs typeface="Calibri" pitchFamily="34" charset="-120"/>
-              </a:rPr>
-              <a:t>Close all other windows before you start</a:t>
-            </a:r>
-            <a:endParaRPr lang="en-US" sz="1400" dirty="0"/>
+              <a:t>Live build: Basic FAQ agent  |  12 min</a:t>
+            </a:r>
+            <a:endParaRPr lang="en-US" sz="1800" dirty="0"/>
           </a:p>
         </p:txBody>
       </p:sp>
@@ -2880,7 +2653,7 @@
                 <a:ea typeface="Calibri Light" pitchFamily="34" charset="-122"/>
                 <a:cs typeface="Calibri Light" pitchFamily="34" charset="-120"/>
               </a:rPr>
-              <a:t>Live Demo  —  Basic FAQ Agent in 5 Steps  (12 min)</a:t>
+              <a:t>Live Demo  —  Pre-stage 10 Min Before the Call</a:t>
             </a:r>
             <a:endParaRPr lang="en-US" sz="2400" dirty="0"/>
           </a:p>
@@ -2961,7 +2734,7 @@
               <a:buNone/>
             </a:pPr>
             <a:r>
-              <a:rPr lang="en-US" sz="1300" dirty="0">
+              <a:rPr lang="en-US" sz="1400" dirty="0">
                 <a:solidFill>
                   <a:srgbClr val="2C2C2C"/>
                 </a:solidFill>
@@ -2969,9 +2742,9 @@
                 <a:ea typeface="Calibri" pitchFamily="34" charset="-122"/>
                 <a:cs typeface="Calibri" pitchFamily="34" charset="-120"/>
               </a:rPr>
-              <a:t>Step 1  Clone agent:     Ctrl+Shift+P  →  Copilot Studio: Clone Agent  →  select Demo FAQ Agent  →  output to agents\</a:t>
-            </a:r>
-            <a:endParaRPr lang="en-US" sz="1300" dirty="0"/>
+              <a:t>Browser tab 1: make.preview.microsoft.com  —  blank agent 'Demo FAQ Agent' already created, on Overview page</a:t>
+            </a:r>
+            <a:endParaRPr lang="en-US" sz="1400" dirty="0"/>
           </a:p>
         </p:txBody>
       </p:sp>
@@ -3050,7 +2823,7 @@
               <a:buNone/>
             </a:pPr>
             <a:r>
-              <a:rPr lang="en-US" sz="1300" dirty="0">
+              <a:rPr lang="en-US" sz="1400" dirty="0">
                 <a:solidFill>
                   <a:srgbClr val="2C2C2C"/>
                 </a:solidFill>
@@ -3058,9 +2831,9 @@
                 <a:ea typeface="Calibri" pitchFamily="34" charset="-122"/>
                 <a:cs typeface="Calibri" pitchFamily="34" charset="-120"/>
               </a:rPr>
-              <a:t>Step 2  Copy base:       Run PowerShell 1-liner to copy 4 topics + agent.mcs.yml + settings.mcs.yml from base/</a:t>
-            </a:r>
-            <a:endParaRPr lang="en-US" sz="1300" dirty="0"/>
+              <a:t>Browser tab 2: Copilot Studio test pane open and ready</a:t>
+            </a:r>
+            <a:endParaRPr lang="en-US" sz="1400" dirty="0"/>
           </a:p>
         </p:txBody>
       </p:sp>
@@ -3139,7 +2912,7 @@
               <a:buNone/>
             </a:pPr>
             <a:r>
-              <a:rPr lang="en-US" sz="1300" dirty="0">
+              <a:rPr lang="en-US" sz="1400" dirty="0">
                 <a:solidFill>
                   <a:srgbClr val="2C2C2C"/>
                 </a:solidFill>
@@ -3147,9 +2920,9 @@
                 <a:ea typeface="Calibri" pitchFamily="34" charset="-122"/>
                 <a:cs typeface="Calibri" pitchFamily="34" charset="-120"/>
               </a:rPr>
-              <a:t>Step 3  Add knowledge: Copy components/knowledge/sharepoint/sharepoint.knowledge.mcs.yml, fill 2 placeholders</a:t>
-            </a:r>
-            <a:endParaRPr lang="en-US" sz="1300" dirty="0"/>
+              <a:t>VS Code: this repo open in Explorer, terminal at repo root</a:t>
+            </a:r>
+            <a:endParaRPr lang="en-US" sz="1400" dirty="0"/>
           </a:p>
         </p:txBody>
       </p:sp>
@@ -3228,7 +3001,7 @@
               <a:buNone/>
             </a:pPr>
             <a:r>
-              <a:rPr lang="en-US" sz="1300" dirty="0">
+              <a:rPr lang="en-US" sz="1400" dirty="0">
                 <a:solidFill>
                   <a:srgbClr val="2C2C2C"/>
                 </a:solidFill>
@@ -3236,9 +3009,9 @@
                 <a:ea typeface="Calibri" pitchFamily="34" charset="-122"/>
                 <a:cs typeface="Calibri" pitchFamily="34" charset="-120"/>
               </a:rPr>
-              <a:t>Step 4  Push:                Ctrl+Shift+P  →  Copilot Studio: Apply Changes   (~30 sec)</a:t>
-            </a:r>
-            <a:endParaRPr lang="en-US" sz="1300" dirty="0"/>
+              <a:t>Run: pac auth list  —  confirm your Dev environment is selected</a:t>
+            </a:r>
+            <a:endParaRPr lang="en-US" sz="1400" dirty="0"/>
           </a:p>
         </p:txBody>
       </p:sp>
@@ -3317,7 +3090,7 @@
               <a:buNone/>
             </a:pPr>
             <a:r>
-              <a:rPr lang="en-US" sz="1300" dirty="0">
+              <a:rPr lang="en-US" sz="1400" dirty="0">
                 <a:solidFill>
                   <a:srgbClr val="2C2C2C"/>
                 </a:solidFill>
@@ -3325,9 +3098,9 @@
                 <a:ea typeface="Calibri" pitchFamily="34" charset="-122"/>
                 <a:cs typeface="Calibri" pitchFamily="34" charset="-120"/>
               </a:rPr>
-              <a:t>Step 5  Test:                 Hello  /  ask a question  /  I want to speak to a human  —  show all 3 paths</a:t>
-            </a:r>
-            <a:endParaRPr lang="en-US" sz="1300" dirty="0"/>
+              <a:t>Close all other windows before you start</a:t>
+            </a:r>
+            <a:endParaRPr lang="en-US" sz="1400" dirty="0"/>
           </a:p>
         </p:txBody>
       </p:sp>
@@ -3345,7 +3118,7 @@
     <p:bg>
       <p:bgPr>
         <a:solidFill>
-          <a:srgbClr val="2E75B6"/>
+          <a:srgbClr val="FFFFFF"/>
         </a:solidFill>
       </p:bgPr>
     </p:bg>
@@ -3365,120 +3138,525 @@
       </p:grpSpPr>
       <p:sp>
         <p:nvSpPr>
-          <p:cNvPr id="2" name="Text 0"/>
-          <p:cNvSpPr/>
-          <p:nvPr/>
-        </p:nvSpPr>
-        <p:spPr>
-          <a:xfrm>
-            <a:off x="457200" y="914400"/>
-            <a:ext cx="1828800" cy="1371600"/>
-          </a:xfrm>
-          <a:prstGeom prst="rect">
-            <a:avLst/>
-          </a:prstGeom>
-          <a:noFill/>
-          <a:ln/>
-        </p:spPr>
-        <p:txBody>
-          <a:bodyPr wrap="square" rtlCol="0" anchor="ctr"/>
-          <a:lstStyle/>
-          <a:p>
-            <a:pPr algn="ctr" indent="0" marL="0">
-              <a:buNone/>
-            </a:pPr>
-            <a:r>
-              <a:rPr lang="en-US" sz="8000" b="1" dirty="0">
-                <a:solidFill>
-                  <a:srgbClr val="FFFFFF">
-                    <a:alpha val="70000"/>
-                  </a:srgbClr>
+          <p:cNvPr id="2" name="Shape 0"/>
+          <p:cNvSpPr/>
+          <p:nvPr/>
+        </p:nvSpPr>
+        <p:spPr>
+          <a:xfrm>
+            <a:off x="0" y="0"/>
+            <a:ext cx="109728" cy="6858000"/>
+          </a:xfrm>
+          <a:prstGeom prst="rect">
+            <a:avLst/>
+          </a:prstGeom>
+          <a:solidFill>
+            <a:srgbClr val="1F3864"/>
+          </a:solidFill>
+          <a:ln/>
+        </p:spPr>
+      </p:sp>
+      <p:sp>
+        <p:nvSpPr>
+          <p:cNvPr id="3" name="Shape 1"/>
+          <p:cNvSpPr/>
+          <p:nvPr/>
+        </p:nvSpPr>
+        <p:spPr>
+          <a:xfrm>
+            <a:off x="109728" y="0"/>
+            <a:ext cx="11826240" cy="1005840"/>
+          </a:xfrm>
+          <a:prstGeom prst="rect">
+            <a:avLst/>
+          </a:prstGeom>
+          <a:solidFill>
+            <a:srgbClr val="1F3864"/>
+          </a:solidFill>
+          <a:ln/>
+        </p:spPr>
+      </p:sp>
+      <p:sp>
+        <p:nvSpPr>
+          <p:cNvPr id="4" name="Text 2"/>
+          <p:cNvSpPr/>
+          <p:nvPr/>
+        </p:nvSpPr>
+        <p:spPr>
+          <a:xfrm>
+            <a:off x="320040" y="91440"/>
+            <a:ext cx="10728960" cy="822960"/>
+          </a:xfrm>
+          <a:prstGeom prst="rect">
+            <a:avLst/>
+          </a:prstGeom>
+          <a:noFill/>
+          <a:ln/>
+        </p:spPr>
+        <p:txBody>
+          <a:bodyPr wrap="square" rtlCol="0" anchor="ctr"/>
+          <a:lstStyle/>
+          <a:p>
+            <a:pPr indent="0" marL="0">
+              <a:buNone/>
+            </a:pPr>
+            <a:r>
+              <a:rPr lang="en-US" sz="2400" b="1" dirty="0">
+                <a:solidFill>
+                  <a:srgbClr val="FFFFFF"/>
                 </a:solidFill>
                 <a:latin typeface="Calibri Light" pitchFamily="34" charset="0"/>
                 <a:ea typeface="Calibri Light" pitchFamily="34" charset="-122"/>
                 <a:cs typeface="Calibri Light" pitchFamily="34" charset="-120"/>
               </a:rPr>
-              <a:t>04</a:t>
-            </a:r>
-            <a:endParaRPr lang="en-US" sz="8000" dirty="0"/>
-          </a:p>
-        </p:txBody>
-      </p:sp>
-      <p:sp>
-        <p:nvSpPr>
-          <p:cNvPr id="3" name="Text 1"/>
-          <p:cNvSpPr/>
-          <p:nvPr/>
-        </p:nvSpPr>
-        <p:spPr>
-          <a:xfrm>
-            <a:off x="2286000" y="1463040"/>
-            <a:ext cx="6400800" cy="914400"/>
-          </a:xfrm>
-          <a:prstGeom prst="rect">
-            <a:avLst/>
-          </a:prstGeom>
-          <a:noFill/>
-          <a:ln/>
-        </p:spPr>
-        <p:txBody>
-          <a:bodyPr wrap="square" rtlCol="0" anchor="ctr"/>
-          <a:lstStyle/>
-          <a:p>
-            <a:pPr indent="0" marL="0">
-              <a:buNone/>
-            </a:pPr>
-            <a:r>
-              <a:rPr lang="en-US" sz="3200" b="1" dirty="0">
-                <a:solidFill>
-                  <a:srgbClr val="FFFFFF"/>
-                </a:solidFill>
-                <a:latin typeface="Calibri Light" pitchFamily="34" charset="0"/>
-                <a:ea typeface="Calibri Light" pitchFamily="34" charset="-122"/>
-                <a:cs typeface="Calibri Light" pitchFamily="34" charset="-120"/>
-              </a:rPr>
-              <a:t>Start and Contribute</a:t>
-            </a:r>
-            <a:endParaRPr lang="en-US" sz="3200" dirty="0"/>
-          </a:p>
-        </p:txBody>
-      </p:sp>
-      <p:sp>
-        <p:nvSpPr>
-          <p:cNvPr id="4" name="Text 2"/>
-          <p:cNvSpPr/>
-          <p:nvPr/>
-        </p:nvSpPr>
-        <p:spPr>
-          <a:xfrm>
-            <a:off x="2286000" y="2468880"/>
-            <a:ext cx="6400800" cy="457200"/>
-          </a:xfrm>
-          <a:prstGeom prst="rect">
-            <a:avLst/>
-          </a:prstGeom>
-          <a:noFill/>
-          <a:ln/>
-        </p:spPr>
-        <p:txBody>
-          <a:bodyPr wrap="square" rtlCol="0" anchor="ctr"/>
-          <a:lstStyle/>
-          <a:p>
-            <a:pPr indent="0" marL="0">
-              <a:buNone/>
-            </a:pPr>
-            <a:r>
-              <a:rPr lang="en-US" sz="1800" dirty="0">
-                <a:solidFill>
-                  <a:srgbClr val="BDD7EE"/>
+              <a:t>Live Demo  —  Basic FAQ Agent in 5 Steps  (12 min)</a:t>
+            </a:r>
+            <a:endParaRPr lang="en-US" sz="2400" dirty="0"/>
+          </a:p>
+        </p:txBody>
+      </p:sp>
+      <p:sp>
+        <p:nvSpPr>
+          <p:cNvPr id="5" name="Shape 3"/>
+          <p:cNvSpPr/>
+          <p:nvPr/>
+        </p:nvSpPr>
+        <p:spPr>
+          <a:xfrm>
+            <a:off x="109728" y="1143000"/>
+            <a:ext cx="11826240" cy="493776"/>
+          </a:xfrm>
+          <a:prstGeom prst="rect">
+            <a:avLst/>
+          </a:prstGeom>
+          <a:solidFill>
+            <a:srgbClr val="F2F2F2"/>
+          </a:solidFill>
+          <a:ln w="12700">
+            <a:solidFill>
+              <a:srgbClr val="F2F2F2"/>
+            </a:solidFill>
+            <a:prstDash val="solid"/>
+          </a:ln>
+        </p:spPr>
+      </p:sp>
+      <p:sp>
+        <p:nvSpPr>
+          <p:cNvPr id="6" name="Shape 4"/>
+          <p:cNvSpPr/>
+          <p:nvPr/>
+        </p:nvSpPr>
+        <p:spPr>
+          <a:xfrm>
+            <a:off x="256032" y="1325880"/>
+            <a:ext cx="128016" cy="128016"/>
+          </a:xfrm>
+          <a:prstGeom prst="ellipse">
+            <a:avLst/>
+          </a:prstGeom>
+          <a:solidFill>
+            <a:srgbClr val="2E75B6"/>
+          </a:solidFill>
+          <a:ln w="12700">
+            <a:solidFill>
+              <a:srgbClr val="2E75B6"/>
+            </a:solidFill>
+            <a:prstDash val="solid"/>
+          </a:ln>
+        </p:spPr>
+      </p:sp>
+      <p:sp>
+        <p:nvSpPr>
+          <p:cNvPr id="7" name="Text 5"/>
+          <p:cNvSpPr/>
+          <p:nvPr/>
+        </p:nvSpPr>
+        <p:spPr>
+          <a:xfrm>
+            <a:off x="475488" y="1143000"/>
+            <a:ext cx="10485120" cy="493776"/>
+          </a:xfrm>
+          <a:prstGeom prst="rect">
+            <a:avLst/>
+          </a:prstGeom>
+          <a:noFill/>
+          <a:ln/>
+        </p:spPr>
+        <p:txBody>
+          <a:bodyPr wrap="square" rtlCol="0" anchor="ctr"/>
+          <a:lstStyle/>
+          <a:p>
+            <a:pPr indent="0" marL="0">
+              <a:buNone/>
+            </a:pPr>
+            <a:r>
+              <a:rPr lang="en-US" sz="1300" dirty="0">
+                <a:solidFill>
+                  <a:srgbClr val="2C2C2C"/>
                 </a:solidFill>
                 <a:latin typeface="Calibri" pitchFamily="34" charset="0"/>
                 <a:ea typeface="Calibri" pitchFamily="34" charset="-122"/>
                 <a:cs typeface="Calibri" pitchFamily="34" charset="-120"/>
               </a:rPr>
-              <a:t>Your next steps  |  5 min</a:t>
-            </a:r>
-            <a:endParaRPr lang="en-US" sz="1800" dirty="0"/>
+              <a:t>Step 1  Clone:            Ctrl+Shift+P  →  Copilot Studio: Clone Agent  →  select Demo FAQ Agent  →  output to agents\</a:t>
+            </a:r>
+            <a:endParaRPr lang="en-US" sz="1300" dirty="0"/>
+          </a:p>
+        </p:txBody>
+      </p:sp>
+      <p:sp>
+        <p:nvSpPr>
+          <p:cNvPr id="8" name="Shape 6"/>
+          <p:cNvSpPr/>
+          <p:nvPr/>
+        </p:nvSpPr>
+        <p:spPr>
+          <a:xfrm>
+            <a:off x="109728" y="1673352"/>
+            <a:ext cx="11826240" cy="493776"/>
+          </a:xfrm>
+          <a:prstGeom prst="rect">
+            <a:avLst/>
+          </a:prstGeom>
+          <a:solidFill>
+            <a:srgbClr val="FFFFFF"/>
+          </a:solidFill>
+          <a:ln w="12700">
+            <a:solidFill>
+              <a:srgbClr val="FFFFFF"/>
+            </a:solidFill>
+            <a:prstDash val="solid"/>
+          </a:ln>
+        </p:spPr>
+      </p:sp>
+      <p:sp>
+        <p:nvSpPr>
+          <p:cNvPr id="9" name="Shape 7"/>
+          <p:cNvSpPr/>
+          <p:nvPr/>
+        </p:nvSpPr>
+        <p:spPr>
+          <a:xfrm>
+            <a:off x="256032" y="1856232"/>
+            <a:ext cx="128016" cy="128016"/>
+          </a:xfrm>
+          <a:prstGeom prst="ellipse">
+            <a:avLst/>
+          </a:prstGeom>
+          <a:solidFill>
+            <a:srgbClr val="2E75B6"/>
+          </a:solidFill>
+          <a:ln w="12700">
+            <a:solidFill>
+              <a:srgbClr val="2E75B6"/>
+            </a:solidFill>
+            <a:prstDash val="solid"/>
+          </a:ln>
+        </p:spPr>
+      </p:sp>
+      <p:sp>
+        <p:nvSpPr>
+          <p:cNvPr id="10" name="Text 8"/>
+          <p:cNvSpPr/>
+          <p:nvPr/>
+        </p:nvSpPr>
+        <p:spPr>
+          <a:xfrm>
+            <a:off x="475488" y="1673352"/>
+            <a:ext cx="10485120" cy="493776"/>
+          </a:xfrm>
+          <a:prstGeom prst="rect">
+            <a:avLst/>
+          </a:prstGeom>
+          <a:noFill/>
+          <a:ln/>
+        </p:spPr>
+        <p:txBody>
+          <a:bodyPr wrap="square" rtlCol="0" anchor="ctr"/>
+          <a:lstStyle/>
+          <a:p>
+            <a:pPr indent="0" marL="0">
+              <a:buNone/>
+            </a:pPr>
+            <a:r>
+              <a:rPr lang="en-US" sz="1300" dirty="0">
+                <a:solidFill>
+                  <a:srgbClr val="2C2C2C"/>
+                </a:solidFill>
+                <a:latin typeface="Calibri" pitchFamily="34" charset="0"/>
+                <a:ea typeface="Calibri" pitchFamily="34" charset="-122"/>
+                <a:cs typeface="Calibri" pitchFamily="34" charset="-120"/>
+              </a:rPr>
+              <a:t>Step 2  Replace base:  Run PowerShell 1-liner to overwrite minimal default topics with base/ production versions</a:t>
+            </a:r>
+            <a:endParaRPr lang="en-US" sz="1300" dirty="0"/>
+          </a:p>
+        </p:txBody>
+      </p:sp>
+      <p:sp>
+        <p:nvSpPr>
+          <p:cNvPr id="11" name="Shape 9"/>
+          <p:cNvSpPr/>
+          <p:nvPr/>
+        </p:nvSpPr>
+        <p:spPr>
+          <a:xfrm>
+            <a:off x="109728" y="2203704"/>
+            <a:ext cx="11826240" cy="493776"/>
+          </a:xfrm>
+          <a:prstGeom prst="rect">
+            <a:avLst/>
+          </a:prstGeom>
+          <a:solidFill>
+            <a:srgbClr val="F2F2F2"/>
+          </a:solidFill>
+          <a:ln w="12700">
+            <a:solidFill>
+              <a:srgbClr val="F2F2F2"/>
+            </a:solidFill>
+            <a:prstDash val="solid"/>
+          </a:ln>
+        </p:spPr>
+      </p:sp>
+      <p:sp>
+        <p:nvSpPr>
+          <p:cNvPr id="12" name="Shape 10"/>
+          <p:cNvSpPr/>
+          <p:nvPr/>
+        </p:nvSpPr>
+        <p:spPr>
+          <a:xfrm>
+            <a:off x="256032" y="2386584"/>
+            <a:ext cx="128016" cy="128016"/>
+          </a:xfrm>
+          <a:prstGeom prst="ellipse">
+            <a:avLst/>
+          </a:prstGeom>
+          <a:solidFill>
+            <a:srgbClr val="2E75B6"/>
+          </a:solidFill>
+          <a:ln w="12700">
+            <a:solidFill>
+              <a:srgbClr val="2E75B6"/>
+            </a:solidFill>
+            <a:prstDash val="solid"/>
+          </a:ln>
+        </p:spPr>
+      </p:sp>
+      <p:sp>
+        <p:nvSpPr>
+          <p:cNvPr id="13" name="Text 11"/>
+          <p:cNvSpPr/>
+          <p:nvPr/>
+        </p:nvSpPr>
+        <p:spPr>
+          <a:xfrm>
+            <a:off x="475488" y="2203704"/>
+            <a:ext cx="10485120" cy="493776"/>
+          </a:xfrm>
+          <a:prstGeom prst="rect">
+            <a:avLst/>
+          </a:prstGeom>
+          <a:noFill/>
+          <a:ln/>
+        </p:spPr>
+        <p:txBody>
+          <a:bodyPr wrap="square" rtlCol="0" anchor="ctr"/>
+          <a:lstStyle/>
+          <a:p>
+            <a:pPr indent="0" marL="0">
+              <a:buNone/>
+            </a:pPr>
+            <a:r>
+              <a:rPr lang="en-US" sz="1300" dirty="0">
+                <a:solidFill>
+                  <a:srgbClr val="2C2C2C"/>
+                </a:solidFill>
+                <a:latin typeface="Calibri" pitchFamily="34" charset="0"/>
+                <a:ea typeface="Calibri" pitchFamily="34" charset="-122"/>
+                <a:cs typeface="Calibri" pitchFamily="34" charset="-120"/>
+              </a:rPr>
+              <a:t>Step 3  Knowledge:      Copy components/knowledge/sharepoint/sharepoint.knowledge.mcs.yml, fill 2 placeholders</a:t>
+            </a:r>
+            <a:endParaRPr lang="en-US" sz="1300" dirty="0"/>
+          </a:p>
+        </p:txBody>
+      </p:sp>
+      <p:sp>
+        <p:nvSpPr>
+          <p:cNvPr id="14" name="Shape 12"/>
+          <p:cNvSpPr/>
+          <p:nvPr/>
+        </p:nvSpPr>
+        <p:spPr>
+          <a:xfrm>
+            <a:off x="109728" y="2734056"/>
+            <a:ext cx="11826240" cy="493776"/>
+          </a:xfrm>
+          <a:prstGeom prst="rect">
+            <a:avLst/>
+          </a:prstGeom>
+          <a:solidFill>
+            <a:srgbClr val="FFFFFF"/>
+          </a:solidFill>
+          <a:ln w="12700">
+            <a:solidFill>
+              <a:srgbClr val="FFFFFF"/>
+            </a:solidFill>
+            <a:prstDash val="solid"/>
+          </a:ln>
+        </p:spPr>
+      </p:sp>
+      <p:sp>
+        <p:nvSpPr>
+          <p:cNvPr id="15" name="Shape 13"/>
+          <p:cNvSpPr/>
+          <p:nvPr/>
+        </p:nvSpPr>
+        <p:spPr>
+          <a:xfrm>
+            <a:off x="256032" y="2916936"/>
+            <a:ext cx="128016" cy="128016"/>
+          </a:xfrm>
+          <a:prstGeom prst="ellipse">
+            <a:avLst/>
+          </a:prstGeom>
+          <a:solidFill>
+            <a:srgbClr val="2E75B6"/>
+          </a:solidFill>
+          <a:ln w="12700">
+            <a:solidFill>
+              <a:srgbClr val="2E75B6"/>
+            </a:solidFill>
+            <a:prstDash val="solid"/>
+          </a:ln>
+        </p:spPr>
+      </p:sp>
+      <p:sp>
+        <p:nvSpPr>
+          <p:cNvPr id="16" name="Text 14"/>
+          <p:cNvSpPr/>
+          <p:nvPr/>
+        </p:nvSpPr>
+        <p:spPr>
+          <a:xfrm>
+            <a:off x="475488" y="2734056"/>
+            <a:ext cx="10485120" cy="493776"/>
+          </a:xfrm>
+          <a:prstGeom prst="rect">
+            <a:avLst/>
+          </a:prstGeom>
+          <a:noFill/>
+          <a:ln/>
+        </p:spPr>
+        <p:txBody>
+          <a:bodyPr wrap="square" rtlCol="0" anchor="ctr"/>
+          <a:lstStyle/>
+          <a:p>
+            <a:pPr indent="0" marL="0">
+              <a:buNone/>
+            </a:pPr>
+            <a:r>
+              <a:rPr lang="en-US" sz="1300" dirty="0">
+                <a:solidFill>
+                  <a:srgbClr val="2C2C2C"/>
+                </a:solidFill>
+                <a:latin typeface="Calibri" pitchFamily="34" charset="0"/>
+                <a:ea typeface="Calibri" pitchFamily="34" charset="-122"/>
+                <a:cs typeface="Calibri" pitchFamily="34" charset="-120"/>
+              </a:rPr>
+              <a:t>Step 4  Push:               Ctrl+Shift+P  →  Copilot Studio: Apply Changes   (~30 sec)</a:t>
+            </a:r>
+            <a:endParaRPr lang="en-US" sz="1300" dirty="0"/>
+          </a:p>
+        </p:txBody>
+      </p:sp>
+      <p:sp>
+        <p:nvSpPr>
+          <p:cNvPr id="17" name="Shape 15"/>
+          <p:cNvSpPr/>
+          <p:nvPr/>
+        </p:nvSpPr>
+        <p:spPr>
+          <a:xfrm>
+            <a:off x="109728" y="3264408"/>
+            <a:ext cx="11826240" cy="493776"/>
+          </a:xfrm>
+          <a:prstGeom prst="rect">
+            <a:avLst/>
+          </a:prstGeom>
+          <a:solidFill>
+            <a:srgbClr val="F2F2F2"/>
+          </a:solidFill>
+          <a:ln w="12700">
+            <a:solidFill>
+              <a:srgbClr val="F2F2F2"/>
+            </a:solidFill>
+            <a:prstDash val="solid"/>
+          </a:ln>
+        </p:spPr>
+      </p:sp>
+      <p:sp>
+        <p:nvSpPr>
+          <p:cNvPr id="18" name="Shape 16"/>
+          <p:cNvSpPr/>
+          <p:nvPr/>
+        </p:nvSpPr>
+        <p:spPr>
+          <a:xfrm>
+            <a:off x="256032" y="3447288"/>
+            <a:ext cx="128016" cy="128016"/>
+          </a:xfrm>
+          <a:prstGeom prst="ellipse">
+            <a:avLst/>
+          </a:prstGeom>
+          <a:solidFill>
+            <a:srgbClr val="2E75B6"/>
+          </a:solidFill>
+          <a:ln w="12700">
+            <a:solidFill>
+              <a:srgbClr val="2E75B6"/>
+            </a:solidFill>
+            <a:prstDash val="solid"/>
+          </a:ln>
+        </p:spPr>
+      </p:sp>
+      <p:sp>
+        <p:nvSpPr>
+          <p:cNvPr id="19" name="Text 17"/>
+          <p:cNvSpPr/>
+          <p:nvPr/>
+        </p:nvSpPr>
+        <p:spPr>
+          <a:xfrm>
+            <a:off x="475488" y="3264408"/>
+            <a:ext cx="10485120" cy="493776"/>
+          </a:xfrm>
+          <a:prstGeom prst="rect">
+            <a:avLst/>
+          </a:prstGeom>
+          <a:noFill/>
+          <a:ln/>
+        </p:spPr>
+        <p:txBody>
+          <a:bodyPr wrap="square" rtlCol="0" anchor="ctr"/>
+          <a:lstStyle/>
+          <a:p>
+            <a:pPr indent="0" marL="0">
+              <a:buNone/>
+            </a:pPr>
+            <a:r>
+              <a:rPr lang="en-US" sz="1300" dirty="0">
+                <a:solidFill>
+                  <a:srgbClr val="2C2C2C"/>
+                </a:solidFill>
+                <a:latin typeface="Calibri" pitchFamily="34" charset="0"/>
+                <a:ea typeface="Calibri" pitchFamily="34" charset="-122"/>
+                <a:cs typeface="Calibri" pitchFamily="34" charset="-120"/>
+              </a:rPr>
+              <a:t>Step 5  Test:                Hello  /  ask a question  /  I want to speak to a human  —  show all 3 paths</a:t>
+            </a:r>
+            <a:endParaRPr lang="en-US" sz="1300" dirty="0"/>
           </a:p>
         </p:txBody>
       </p:sp>
@@ -3587,7 +3765,7 @@
                 <a:ea typeface="Calibri Light" pitchFamily="34" charset="-122"/>
                 <a:cs typeface="Calibri Light" pitchFamily="34" charset="-120"/>
               </a:rPr>
-              <a:t>How to Start on Your Next Project</a:t>
+              <a:t>What the Templates Did in That Demo</a:t>
             </a:r>
             <a:endParaRPr lang="en-US" sz="2400" dirty="0"/>
           </a:p>
@@ -3602,7 +3780,7 @@
         <p:spPr>
           <a:xfrm>
             <a:off x="109728" y="1143000"/>
-            <a:ext cx="11826240" cy="713232"/>
+            <a:ext cx="11826240" cy="493776"/>
           </a:xfrm>
           <a:prstGeom prst="rect">
             <a:avLst/>
@@ -3626,7 +3804,7 @@
         </p:nvSpPr>
         <p:spPr>
           <a:xfrm>
-            <a:off x="256032" y="1435608"/>
+            <a:off x="256032" y="1325880"/>
             <a:ext cx="128016" cy="128016"/>
           </a:xfrm>
           <a:prstGeom prst="ellipse">
@@ -3652,23 +3830,23 @@
         <p:spPr>
           <a:xfrm>
             <a:off x="475488" y="1143000"/>
-            <a:ext cx="10485120" cy="713232"/>
-          </a:xfrm>
-          <a:prstGeom prst="rect">
-            <a:avLst/>
-          </a:prstGeom>
-          <a:noFill/>
-          <a:ln/>
-        </p:spPr>
-        <p:txBody>
-          <a:bodyPr wrap="square" rtlCol="0" anchor="ctr"/>
-          <a:lstStyle/>
-          <a:p>
-            <a:pPr indent="0" marL="0">
-              <a:buNone/>
-            </a:pPr>
-            <a:r>
-              <a:rPr lang="en-US" sz="1400" dirty="0">
+            <a:ext cx="10485120" cy="493776"/>
+          </a:xfrm>
+          <a:prstGeom prst="rect">
+            <a:avLst/>
+          </a:prstGeom>
+          <a:noFill/>
+          <a:ln/>
+        </p:spPr>
+        <p:txBody>
+          <a:bodyPr wrap="square" rtlCol="0" anchor="ctr"/>
+          <a:lstStyle/>
+          <a:p>
+            <a:pPr indent="0" marL="0">
+              <a:buNone/>
+            </a:pPr>
+            <a:r>
+              <a:rPr lang="en-US" sz="1300" dirty="0">
                 <a:solidFill>
                   <a:srgbClr val="2C2C2C"/>
                 </a:solidFill>
@@ -3676,9 +3854,9 @@
                 <a:ea typeface="Calibri" pitchFamily="34" charset="-122"/>
                 <a:cs typeface="Calibri" pitchFamily="34" charset="-120"/>
               </a:rPr>
-              <a:t>Step 1  Set up tools once (~20 min)   Install PAC CLI  →  pac auth create  →  install 3 VS Code extensions</a:t>
-            </a:r>
-            <a:endParaRPr lang="en-US" sz="1400" dirty="0"/>
+              <a:t>base/ Fallback  —  3-retry loop and escalation instead of a single error message from the UI default</a:t>
+            </a:r>
+            <a:endParaRPr lang="en-US" sz="1300" dirty="0"/>
           </a:p>
         </p:txBody>
       </p:sp>
@@ -3690,8 +3868,8 @@
         </p:nvSpPr>
         <p:spPr>
           <a:xfrm>
-            <a:off x="109728" y="1892808"/>
-            <a:ext cx="11826240" cy="713232"/>
+            <a:off x="109728" y="1673352"/>
+            <a:ext cx="11826240" cy="493776"/>
           </a:xfrm>
           <a:prstGeom prst="rect">
             <a:avLst/>
@@ -3715,7 +3893,7 @@
         </p:nvSpPr>
         <p:spPr>
           <a:xfrm>
-            <a:off x="256032" y="2185416"/>
+            <a:off x="256032" y="1856232"/>
             <a:ext cx="128016" cy="128016"/>
           </a:xfrm>
           <a:prstGeom prst="ellipse">
@@ -3740,24 +3918,24 @@
         </p:nvSpPr>
         <p:spPr>
           <a:xfrm>
-            <a:off x="475488" y="1892808"/>
-            <a:ext cx="10485120" cy="713232"/>
-          </a:xfrm>
-          <a:prstGeom prst="rect">
-            <a:avLst/>
-          </a:prstGeom>
-          <a:noFill/>
-          <a:ln/>
-        </p:spPr>
-        <p:txBody>
-          <a:bodyPr wrap="square" rtlCol="0" anchor="ctr"/>
-          <a:lstStyle/>
-          <a:p>
-            <a:pPr indent="0" marL="0">
-              <a:buNone/>
-            </a:pPr>
-            <a:r>
-              <a:rPr lang="en-US" sz="1400" dirty="0">
+            <a:off x="475488" y="1673352"/>
+            <a:ext cx="10485120" cy="493776"/>
+          </a:xfrm>
+          <a:prstGeom prst="rect">
+            <a:avLst/>
+          </a:prstGeom>
+          <a:noFill/>
+          <a:ln/>
+        </p:spPr>
+        <p:txBody>
+          <a:bodyPr wrap="square" rtlCol="0" anchor="ctr"/>
+          <a:lstStyle/>
+          <a:p>
+            <a:pPr indent="0" marL="0">
+              <a:buNone/>
+            </a:pPr>
+            <a:r>
+              <a:rPr lang="en-US" sz="1300" dirty="0">
                 <a:solidFill>
                   <a:srgbClr val="2C2C2C"/>
                 </a:solidFill>
@@ -3765,9 +3943,9 @@
                 <a:ea typeface="Calibri" pitchFamily="34" charset="-122"/>
                 <a:cs typeface="Calibri" pitchFamily="34" charset="-120"/>
               </a:rPr>
-              <a:t>Step 2  Pick your recipe                   Open README.md, find your agent type in the recipe table, follow it</a:t>
-            </a:r>
-            <a:endParaRPr lang="en-US" sz="1400" dirty="0"/>
+              <a:t>base/ OnError   —  test mode shows debug details; production shows safe message + reference ID</a:t>
+            </a:r>
+            <a:endParaRPr lang="en-US" sz="1300" dirty="0"/>
           </a:p>
         </p:txBody>
       </p:sp>
@@ -3779,8 +3957,8 @@
         </p:nvSpPr>
         <p:spPr>
           <a:xfrm>
-            <a:off x="109728" y="2642616"/>
-            <a:ext cx="11826240" cy="713232"/>
+            <a:off x="109728" y="2203704"/>
+            <a:ext cx="11826240" cy="493776"/>
           </a:xfrm>
           <a:prstGeom prst="rect">
             <a:avLst/>
@@ -3804,7 +3982,7 @@
         </p:nvSpPr>
         <p:spPr>
           <a:xfrm>
-            <a:off x="256032" y="2935224"/>
+            <a:off x="256032" y="2386584"/>
             <a:ext cx="128016" cy="128016"/>
           </a:xfrm>
           <a:prstGeom prst="ellipse">
@@ -3829,24 +4007,24 @@
         </p:nvSpPr>
         <p:spPr>
           <a:xfrm>
-            <a:off x="475488" y="2642616"/>
-            <a:ext cx="10485120" cy="713232"/>
-          </a:xfrm>
-          <a:prstGeom prst="rect">
-            <a:avLst/>
-          </a:prstGeom>
-          <a:noFill/>
-          <a:ln/>
-        </p:spPr>
-        <p:txBody>
-          <a:bodyPr wrap="square" rtlCol="0" anchor="ctr"/>
-          <a:lstStyle/>
-          <a:p>
-            <a:pPr indent="0" marL="0">
-              <a:buNone/>
-            </a:pPr>
-            <a:r>
-              <a:rPr lang="en-US" sz="1400" dirty="0">
+            <a:off x="475488" y="2203704"/>
+            <a:ext cx="10485120" cy="493776"/>
+          </a:xfrm>
+          <a:prstGeom prst="rect">
+            <a:avLst/>
+          </a:prstGeom>
+          <a:noFill/>
+          <a:ln/>
+        </p:spPr>
+        <p:txBody>
+          <a:bodyPr wrap="square" rtlCol="0" anchor="ctr"/>
+          <a:lstStyle/>
+          <a:p>
+            <a:pPr indent="0" marL="0">
+              <a:buNone/>
+            </a:pPr>
+            <a:r>
+              <a:rPr lang="en-US" sz="1300" dirty="0">
                 <a:solidFill>
                   <a:srgbClr val="2C2C2C"/>
                 </a:solidFill>
@@ -3854,9 +4032,9 @@
                 <a:ea typeface="Calibri" pitchFamily="34" charset="-122"/>
                 <a:cs typeface="Calibri" pitchFamily="34" charset="-120"/>
               </a:rPr>
-              <a:t>Step 3  Follow your role entry point   Open ENGINEERING-PLAYBOOK.md  →  find your role  →  start at your stage</a:t>
-            </a:r>
-            <a:endParaRPr lang="en-US" sz="1400" dirty="0"/>
+              <a:t>base/ OutOfScope  —  not created by the UI at all; template adds redirect + telemetry event</a:t>
+            </a:r>
+            <a:endParaRPr lang="en-US" sz="1300" dirty="0"/>
           </a:p>
         </p:txBody>
       </p:sp>
@@ -3868,8 +4046,8 @@
         </p:nvSpPr>
         <p:spPr>
           <a:xfrm>
-            <a:off x="109728" y="3392424"/>
-            <a:ext cx="11826240" cy="713232"/>
+            <a:off x="109728" y="2734056"/>
+            <a:ext cx="11826240" cy="493776"/>
           </a:xfrm>
           <a:prstGeom prst="rect">
             <a:avLst/>
@@ -3893,7 +4071,7 @@
         </p:nvSpPr>
         <p:spPr>
           <a:xfrm>
-            <a:off x="256032" y="3685032"/>
+            <a:off x="256032" y="2916936"/>
             <a:ext cx="128016" cy="128016"/>
           </a:xfrm>
           <a:prstGeom prst="ellipse">
@@ -3918,24 +4096,24 @@
         </p:nvSpPr>
         <p:spPr>
           <a:xfrm>
-            <a:off x="475488" y="3392424"/>
-            <a:ext cx="10485120" cy="713232"/>
-          </a:xfrm>
-          <a:prstGeom prst="rect">
-            <a:avLst/>
-          </a:prstGeom>
-          <a:noFill/>
-          <a:ln/>
-        </p:spPr>
-        <p:txBody>
-          <a:bodyPr wrap="square" rtlCol="0" anchor="ctr"/>
-          <a:lstStyle/>
-          <a:p>
-            <a:pPr indent="0" marL="0">
-              <a:buNone/>
-            </a:pPr>
-            <a:r>
-              <a:rPr lang="en-US" sz="1400" dirty="0">
+            <a:off x="475488" y="2734056"/>
+            <a:ext cx="10485120" cy="493776"/>
+          </a:xfrm>
+          <a:prstGeom prst="rect">
+            <a:avLst/>
+          </a:prstGeom>
+          <a:noFill/>
+          <a:ln/>
+        </p:spPr>
+        <p:txBody>
+          <a:bodyPr wrap="square" rtlCol="0" anchor="ctr"/>
+          <a:lstStyle/>
+          <a:p>
+            <a:pPr indent="0" marL="0">
+              <a:buNone/>
+            </a:pPr>
+            <a:r>
+              <a:rPr lang="en-US" sz="1300" dirty="0">
                 <a:solidFill>
                   <a:srgbClr val="2C2C2C"/>
                 </a:solidFill>
@@ -3943,9 +4121,98 @@
                 <a:ea typeface="Calibri" pitchFamily="34" charset="-122"/>
                 <a:cs typeface="Calibri" pitchFamily="34" charset="-120"/>
               </a:rPr>
-              <a:t>Key doc: docs/QUICKSTART.md  —  working agent in under 1 hour</a:t>
-            </a:r>
-            <a:endParaRPr lang="en-US" sz="1400" dirty="0"/>
+              <a:t>components/knowledge/  —  knowledge source YAML with correct structure; filled 2 fields instead of writing from scratch</a:t>
+            </a:r>
+            <a:endParaRPr lang="en-US" sz="1300" dirty="0"/>
+          </a:p>
+        </p:txBody>
+      </p:sp>
+      <p:sp>
+        <p:nvSpPr>
+          <p:cNvPr id="17" name="Shape 15"/>
+          <p:cNvSpPr/>
+          <p:nvPr/>
+        </p:nvSpPr>
+        <p:spPr>
+          <a:xfrm>
+            <a:off x="109728" y="3264408"/>
+            <a:ext cx="11826240" cy="493776"/>
+          </a:xfrm>
+          <a:prstGeom prst="rect">
+            <a:avLst/>
+          </a:prstGeom>
+          <a:solidFill>
+            <a:srgbClr val="F2F2F2"/>
+          </a:solidFill>
+          <a:ln w="12700">
+            <a:solidFill>
+              <a:srgbClr val="F2F2F2"/>
+            </a:solidFill>
+            <a:prstDash val="solid"/>
+          </a:ln>
+        </p:spPr>
+      </p:sp>
+      <p:sp>
+        <p:nvSpPr>
+          <p:cNvPr id="18" name="Shape 16"/>
+          <p:cNvSpPr/>
+          <p:nvPr/>
+        </p:nvSpPr>
+        <p:spPr>
+          <a:xfrm>
+            <a:off x="256032" y="3447288"/>
+            <a:ext cx="128016" cy="128016"/>
+          </a:xfrm>
+          <a:prstGeom prst="ellipse">
+            <a:avLst/>
+          </a:prstGeom>
+          <a:solidFill>
+            <a:srgbClr val="2E75B6"/>
+          </a:solidFill>
+          <a:ln w="12700">
+            <a:solidFill>
+              <a:srgbClr val="2E75B6"/>
+            </a:solidFill>
+            <a:prstDash val="solid"/>
+          </a:ln>
+        </p:spPr>
+      </p:sp>
+      <p:sp>
+        <p:nvSpPr>
+          <p:cNvPr id="19" name="Text 17"/>
+          <p:cNvSpPr/>
+          <p:nvPr/>
+        </p:nvSpPr>
+        <p:spPr>
+          <a:xfrm>
+            <a:off x="475488" y="3264408"/>
+            <a:ext cx="10485120" cy="493776"/>
+          </a:xfrm>
+          <a:prstGeom prst="rect">
+            <a:avLst/>
+          </a:prstGeom>
+          <a:noFill/>
+          <a:ln/>
+        </p:spPr>
+        <p:txBody>
+          <a:bodyPr wrap="square" rtlCol="0" anchor="ctr"/>
+          <a:lstStyle/>
+          <a:p>
+            <a:pPr indent="0" marL="0">
+              <a:buNone/>
+            </a:pPr>
+            <a:r>
+              <a:rPr lang="en-US" sz="1300" dirty="0">
+                <a:solidFill>
+                  <a:srgbClr val="2C2C2C"/>
+                </a:solidFill>
+                <a:latin typeface="Calibri" pitchFamily="34" charset="0"/>
+                <a:ea typeface="Calibri" pitchFamily="34" charset="-122"/>
+                <a:cs typeface="Calibri" pitchFamily="34" charset="-120"/>
+              </a:rPr>
+              <a:t>Result: a consistent, monitored, production-ready starting point — not a blank slate</a:t>
+            </a:r>
+            <a:endParaRPr lang="en-US" sz="1300" dirty="0"/>
           </a:p>
         </p:txBody>
       </p:sp>
@@ -3963,7 +4230,7 @@
     <p:bg>
       <p:bgPr>
         <a:solidFill>
-          <a:srgbClr val="FFFFFF"/>
+          <a:srgbClr val="2E75B6"/>
         </a:solidFill>
       </p:bgPr>
     </p:bg>
@@ -3983,436 +4250,120 @@
       </p:grpSpPr>
       <p:sp>
         <p:nvSpPr>
-          <p:cNvPr id="2" name="Shape 0"/>
-          <p:cNvSpPr/>
-          <p:nvPr/>
-        </p:nvSpPr>
-        <p:spPr>
-          <a:xfrm>
-            <a:off x="0" y="0"/>
-            <a:ext cx="109728" cy="6858000"/>
-          </a:xfrm>
-          <a:prstGeom prst="rect">
-            <a:avLst/>
-          </a:prstGeom>
-          <a:solidFill>
-            <a:srgbClr val="1F3864"/>
-          </a:solidFill>
-          <a:ln/>
-        </p:spPr>
-      </p:sp>
-      <p:sp>
-        <p:nvSpPr>
-          <p:cNvPr id="3" name="Shape 1"/>
-          <p:cNvSpPr/>
-          <p:nvPr/>
-        </p:nvSpPr>
-        <p:spPr>
-          <a:xfrm>
-            <a:off x="109728" y="0"/>
-            <a:ext cx="11826240" cy="1005840"/>
-          </a:xfrm>
-          <a:prstGeom prst="rect">
-            <a:avLst/>
-          </a:prstGeom>
-          <a:solidFill>
-            <a:srgbClr val="1F3864"/>
-          </a:solidFill>
-          <a:ln/>
-        </p:spPr>
-      </p:sp>
-      <p:sp>
-        <p:nvSpPr>
-          <p:cNvPr id="4" name="Text 2"/>
-          <p:cNvSpPr/>
-          <p:nvPr/>
-        </p:nvSpPr>
-        <p:spPr>
-          <a:xfrm>
-            <a:off x="320040" y="91440"/>
-            <a:ext cx="10728960" cy="822960"/>
-          </a:xfrm>
-          <a:prstGeom prst="rect">
-            <a:avLst/>
-          </a:prstGeom>
-          <a:noFill/>
-          <a:ln/>
-        </p:spPr>
-        <p:txBody>
-          <a:bodyPr wrap="square" rtlCol="0" anchor="ctr"/>
-          <a:lstStyle/>
-          <a:p>
-            <a:pPr indent="0" marL="0">
-              <a:buNone/>
-            </a:pPr>
-            <a:r>
-              <a:rPr lang="en-US" sz="2400" b="1" dirty="0">
-                <a:solidFill>
-                  <a:srgbClr val="FFFFFF"/>
+          <p:cNvPr id="2" name="Text 0"/>
+          <p:cNvSpPr/>
+          <p:nvPr/>
+        </p:nvSpPr>
+        <p:spPr>
+          <a:xfrm>
+            <a:off x="457200" y="914400"/>
+            <a:ext cx="1828800" cy="1371600"/>
+          </a:xfrm>
+          <a:prstGeom prst="rect">
+            <a:avLst/>
+          </a:prstGeom>
+          <a:noFill/>
+          <a:ln/>
+        </p:spPr>
+        <p:txBody>
+          <a:bodyPr wrap="square" rtlCol="0" anchor="ctr"/>
+          <a:lstStyle/>
+          <a:p>
+            <a:pPr algn="ctr" indent="0" marL="0">
+              <a:buNone/>
+            </a:pPr>
+            <a:r>
+              <a:rPr lang="en-US" sz="8000" b="1" dirty="0">
+                <a:solidFill>
+                  <a:srgbClr val="FFFFFF">
+                    <a:alpha val="70000"/>
+                  </a:srgbClr>
                 </a:solidFill>
                 <a:latin typeface="Calibri Light" pitchFamily="34" charset="0"/>
                 <a:ea typeface="Calibri Light" pitchFamily="34" charset="-122"/>
                 <a:cs typeface="Calibri Light" pitchFamily="34" charset="-120"/>
               </a:rPr>
-              <a:t>How to Contribute Back</a:t>
-            </a:r>
-            <a:endParaRPr lang="en-US" sz="2400" dirty="0"/>
-          </a:p>
-        </p:txBody>
-      </p:sp>
-      <p:sp>
-        <p:nvSpPr>
-          <p:cNvPr id="5" name="Shape 3"/>
-          <p:cNvSpPr/>
-          <p:nvPr/>
-        </p:nvSpPr>
-        <p:spPr>
-          <a:xfrm>
-            <a:off x="109728" y="1143000"/>
-            <a:ext cx="11826240" cy="493776"/>
-          </a:xfrm>
-          <a:prstGeom prst="rect">
-            <a:avLst/>
-          </a:prstGeom>
-          <a:solidFill>
-            <a:srgbClr val="F2F2F2"/>
-          </a:solidFill>
-          <a:ln w="12700">
-            <a:solidFill>
-              <a:srgbClr val="F2F2F2"/>
-            </a:solidFill>
-            <a:prstDash val="solid"/>
-          </a:ln>
-        </p:spPr>
-      </p:sp>
-      <p:sp>
-        <p:nvSpPr>
-          <p:cNvPr id="6" name="Shape 4"/>
-          <p:cNvSpPr/>
-          <p:nvPr/>
-        </p:nvSpPr>
-        <p:spPr>
-          <a:xfrm>
-            <a:off x="256032" y="1325880"/>
-            <a:ext cx="128016" cy="128016"/>
-          </a:xfrm>
-          <a:prstGeom prst="ellipse">
-            <a:avLst/>
-          </a:prstGeom>
-          <a:solidFill>
-            <a:srgbClr val="2E75B6"/>
-          </a:solidFill>
-          <a:ln w="12700">
-            <a:solidFill>
-              <a:srgbClr val="2E75B6"/>
-            </a:solidFill>
-            <a:prstDash val="solid"/>
-          </a:ln>
-        </p:spPr>
-      </p:sp>
-      <p:sp>
-        <p:nvSpPr>
-          <p:cNvPr id="7" name="Text 5"/>
-          <p:cNvSpPr/>
-          <p:nvPr/>
-        </p:nvSpPr>
-        <p:spPr>
-          <a:xfrm>
-            <a:off x="475488" y="1143000"/>
-            <a:ext cx="10485120" cy="493776"/>
-          </a:xfrm>
-          <a:prstGeom prst="rect">
-            <a:avLst/>
-          </a:prstGeom>
-          <a:noFill/>
-          <a:ln/>
-        </p:spPr>
-        <p:txBody>
-          <a:bodyPr wrap="square" rtlCol="0" anchor="ctr"/>
-          <a:lstStyle/>
-          <a:p>
-            <a:pPr indent="0" marL="0">
-              <a:buNone/>
-            </a:pPr>
-            <a:r>
-              <a:rPr lang="en-US" sz="1400" dirty="0">
-                <a:solidFill>
-                  <a:srgbClr val="2C2C2C"/>
+              <a:t>04</a:t>
+            </a:r>
+            <a:endParaRPr lang="en-US" sz="8000" dirty="0"/>
+          </a:p>
+        </p:txBody>
+      </p:sp>
+      <p:sp>
+        <p:nvSpPr>
+          <p:cNvPr id="3" name="Text 1"/>
+          <p:cNvSpPr/>
+          <p:nvPr/>
+        </p:nvSpPr>
+        <p:spPr>
+          <a:xfrm>
+            <a:off x="2286000" y="1463040"/>
+            <a:ext cx="6400800" cy="914400"/>
+          </a:xfrm>
+          <a:prstGeom prst="rect">
+            <a:avLst/>
+          </a:prstGeom>
+          <a:noFill/>
+          <a:ln/>
+        </p:spPr>
+        <p:txBody>
+          <a:bodyPr wrap="square" rtlCol="0" anchor="ctr"/>
+          <a:lstStyle/>
+          <a:p>
+            <a:pPr indent="0" marL="0">
+              <a:buNone/>
+            </a:pPr>
+            <a:r>
+              <a:rPr lang="en-US" sz="3200" b="1" dirty="0">
+                <a:solidFill>
+                  <a:srgbClr val="FFFFFF"/>
+                </a:solidFill>
+                <a:latin typeface="Calibri Light" pitchFamily="34" charset="0"/>
+                <a:ea typeface="Calibri Light" pitchFamily="34" charset="-122"/>
+                <a:cs typeface="Calibri Light" pitchFamily="34" charset="-120"/>
+              </a:rPr>
+              <a:t>Start and Contribute</a:t>
+            </a:r>
+            <a:endParaRPr lang="en-US" sz="3200" dirty="0"/>
+          </a:p>
+        </p:txBody>
+      </p:sp>
+      <p:sp>
+        <p:nvSpPr>
+          <p:cNvPr id="4" name="Text 2"/>
+          <p:cNvSpPr/>
+          <p:nvPr/>
+        </p:nvSpPr>
+        <p:spPr>
+          <a:xfrm>
+            <a:off x="2286000" y="2468880"/>
+            <a:ext cx="6400800" cy="457200"/>
+          </a:xfrm>
+          <a:prstGeom prst="rect">
+            <a:avLst/>
+          </a:prstGeom>
+          <a:noFill/>
+          <a:ln/>
+        </p:spPr>
+        <p:txBody>
+          <a:bodyPr wrap="square" rtlCol="0" anchor="ctr"/>
+          <a:lstStyle/>
+          <a:p>
+            <a:pPr indent="0" marL="0">
+              <a:buNone/>
+            </a:pPr>
+            <a:r>
+              <a:rPr lang="en-US" sz="1800" dirty="0">
+                <a:solidFill>
+                  <a:srgbClr val="BDD7EE"/>
                 </a:solidFill>
                 <a:latin typeface="Calibri" pitchFamily="34" charset="0"/>
                 <a:ea typeface="Calibri" pitchFamily="34" charset="-122"/>
                 <a:cs typeface="Calibri" pitchFamily="34" charset="-120"/>
               </a:rPr>
-              <a:t>New topic pattern        Copy components/topics/_scaffold/   →   build your pattern   →   open a PR to components/topics/</a:t>
-            </a:r>
-            <a:endParaRPr lang="en-US" sz="1400" dirty="0"/>
-          </a:p>
-        </p:txBody>
-      </p:sp>
-      <p:sp>
-        <p:nvSpPr>
-          <p:cNvPr id="8" name="Shape 6"/>
-          <p:cNvSpPr/>
-          <p:nvPr/>
-        </p:nvSpPr>
-        <p:spPr>
-          <a:xfrm>
-            <a:off x="109728" y="1673352"/>
-            <a:ext cx="11826240" cy="493776"/>
-          </a:xfrm>
-          <a:prstGeom prst="rect">
-            <a:avLst/>
-          </a:prstGeom>
-          <a:solidFill>
-            <a:srgbClr val="FFFFFF"/>
-          </a:solidFill>
-          <a:ln w="12700">
-            <a:solidFill>
-              <a:srgbClr val="FFFFFF"/>
-            </a:solidFill>
-            <a:prstDash val="solid"/>
-          </a:ln>
-        </p:spPr>
-      </p:sp>
-      <p:sp>
-        <p:nvSpPr>
-          <p:cNvPr id="9" name="Shape 7"/>
-          <p:cNvSpPr/>
-          <p:nvPr/>
-        </p:nvSpPr>
-        <p:spPr>
-          <a:xfrm>
-            <a:off x="256032" y="1856232"/>
-            <a:ext cx="128016" cy="128016"/>
-          </a:xfrm>
-          <a:prstGeom prst="ellipse">
-            <a:avLst/>
-          </a:prstGeom>
-          <a:solidFill>
-            <a:srgbClr val="2E75B6"/>
-          </a:solidFill>
-          <a:ln w="12700">
-            <a:solidFill>
-              <a:srgbClr val="2E75B6"/>
-            </a:solidFill>
-            <a:prstDash val="solid"/>
-          </a:ln>
-        </p:spPr>
-      </p:sp>
-      <p:sp>
-        <p:nvSpPr>
-          <p:cNvPr id="10" name="Text 8"/>
-          <p:cNvSpPr/>
-          <p:nvPr/>
-        </p:nvSpPr>
-        <p:spPr>
-          <a:xfrm>
-            <a:off x="475488" y="1673352"/>
-            <a:ext cx="10485120" cy="493776"/>
-          </a:xfrm>
-          <a:prstGeom prst="rect">
-            <a:avLst/>
-          </a:prstGeom>
-          <a:noFill/>
-          <a:ln/>
-        </p:spPr>
-        <p:txBody>
-          <a:bodyPr wrap="square" rtlCol="0" anchor="ctr"/>
-          <a:lstStyle/>
-          <a:p>
-            <a:pPr indent="0" marL="0">
-              <a:buNone/>
-            </a:pPr>
-            <a:r>
-              <a:rPr lang="en-US" sz="1400" dirty="0">
-                <a:solidFill>
-                  <a:srgbClr val="2C2C2C"/>
-                </a:solidFill>
-                <a:latin typeface="Calibri" pitchFamily="34" charset="0"/>
-                <a:ea typeface="Calibri" pitchFamily="34" charset="-122"/>
-                <a:cs typeface="Calibri" pitchFamily="34" charset="-120"/>
-              </a:rPr>
-              <a:t>New agent persona      Add markdown file to prompts/system-prompts/   —   one file, one PR</a:t>
-            </a:r>
-            <a:endParaRPr lang="en-US" sz="1400" dirty="0"/>
-          </a:p>
-        </p:txBody>
-      </p:sp>
-      <p:sp>
-        <p:nvSpPr>
-          <p:cNvPr id="11" name="Shape 9"/>
-          <p:cNvSpPr/>
-          <p:nvPr/>
-        </p:nvSpPr>
-        <p:spPr>
-          <a:xfrm>
-            <a:off x="109728" y="2203704"/>
-            <a:ext cx="11826240" cy="493776"/>
-          </a:xfrm>
-          <a:prstGeom prst="rect">
-            <a:avLst/>
-          </a:prstGeom>
-          <a:solidFill>
-            <a:srgbClr val="F2F2F2"/>
-          </a:solidFill>
-          <a:ln w="12700">
-            <a:solidFill>
-              <a:srgbClr val="F2F2F2"/>
-            </a:solidFill>
-            <a:prstDash val="solid"/>
-          </a:ln>
-        </p:spPr>
-      </p:sp>
-      <p:sp>
-        <p:nvSpPr>
-          <p:cNvPr id="12" name="Shape 10"/>
-          <p:cNvSpPr/>
-          <p:nvPr/>
-        </p:nvSpPr>
-        <p:spPr>
-          <a:xfrm>
-            <a:off x="256032" y="2386584"/>
-            <a:ext cx="128016" cy="128016"/>
-          </a:xfrm>
-          <a:prstGeom prst="ellipse">
-            <a:avLst/>
-          </a:prstGeom>
-          <a:solidFill>
-            <a:srgbClr val="2E75B6"/>
-          </a:solidFill>
-          <a:ln w="12700">
-            <a:solidFill>
-              <a:srgbClr val="2E75B6"/>
-            </a:solidFill>
-            <a:prstDash val="solid"/>
-          </a:ln>
-        </p:spPr>
-      </p:sp>
-      <p:sp>
-        <p:nvSpPr>
-          <p:cNvPr id="13" name="Text 11"/>
-          <p:cNvSpPr/>
-          <p:nvPr/>
-        </p:nvSpPr>
-        <p:spPr>
-          <a:xfrm>
-            <a:off x="475488" y="2203704"/>
-            <a:ext cx="10485120" cy="493776"/>
-          </a:xfrm>
-          <a:prstGeom prst="rect">
-            <a:avLst/>
-          </a:prstGeom>
-          <a:noFill/>
-          <a:ln/>
-        </p:spPr>
-        <p:txBody>
-          <a:bodyPr wrap="square" rtlCol="0" anchor="ctr"/>
-          <a:lstStyle/>
-          <a:p>
-            <a:pPr indent="0" marL="0">
-              <a:buNone/>
-            </a:pPr>
-            <a:r>
-              <a:rPr lang="en-US" sz="1400" dirty="0">
-                <a:solidFill>
-                  <a:srgbClr val="2C2C2C"/>
-                </a:solidFill>
-                <a:latin typeface="Calibri" pitchFamily="34" charset="0"/>
-                <a:ea typeface="Calibri" pitchFamily="34" charset="-122"/>
-                <a:cs typeface="Calibri" pitchFamily="34" charset="-120"/>
-              </a:rPr>
-              <a:t>New recipe                  Document a template combination not yet covered   →   add to recipes/</a:t>
-            </a:r>
-            <a:endParaRPr lang="en-US" sz="1400" dirty="0"/>
-          </a:p>
-        </p:txBody>
-      </p:sp>
-      <p:sp>
-        <p:nvSpPr>
-          <p:cNvPr id="14" name="Shape 12"/>
-          <p:cNvSpPr/>
-          <p:nvPr/>
-        </p:nvSpPr>
-        <p:spPr>
-          <a:xfrm>
-            <a:off x="109728" y="2734056"/>
-            <a:ext cx="11826240" cy="493776"/>
-          </a:xfrm>
-          <a:prstGeom prst="rect">
-            <a:avLst/>
-          </a:prstGeom>
-          <a:solidFill>
-            <a:srgbClr val="FFFFFF"/>
-          </a:solidFill>
-          <a:ln w="12700">
-            <a:solidFill>
-              <a:srgbClr val="FFFFFF"/>
-            </a:solidFill>
-            <a:prstDash val="solid"/>
-          </a:ln>
-        </p:spPr>
-      </p:sp>
-      <p:sp>
-        <p:nvSpPr>
-          <p:cNvPr id="15" name="Shape 13"/>
-          <p:cNvSpPr/>
-          <p:nvPr/>
-        </p:nvSpPr>
-        <p:spPr>
-          <a:xfrm>
-            <a:off x="256032" y="2916936"/>
-            <a:ext cx="128016" cy="128016"/>
-          </a:xfrm>
-          <a:prstGeom prst="ellipse">
-            <a:avLst/>
-          </a:prstGeom>
-          <a:solidFill>
-            <a:srgbClr val="2E75B6"/>
-          </a:solidFill>
-          <a:ln w="12700">
-            <a:solidFill>
-              <a:srgbClr val="2E75B6"/>
-            </a:solidFill>
-            <a:prstDash val="solid"/>
-          </a:ln>
-        </p:spPr>
-      </p:sp>
-      <p:sp>
-        <p:nvSpPr>
-          <p:cNvPr id="16" name="Text 14"/>
-          <p:cNvSpPr/>
-          <p:nvPr/>
-        </p:nvSpPr>
-        <p:spPr>
-          <a:xfrm>
-            <a:off x="475488" y="2734056"/>
-            <a:ext cx="10485120" cy="493776"/>
-          </a:xfrm>
-          <a:prstGeom prst="rect">
-            <a:avLst/>
-          </a:prstGeom>
-          <a:noFill/>
-          <a:ln/>
-        </p:spPr>
-        <p:txBody>
-          <a:bodyPr wrap="square" rtlCol="0" anchor="ctr"/>
-          <a:lstStyle/>
-          <a:p>
-            <a:pPr indent="0" marL="0">
-              <a:buNone/>
-            </a:pPr>
-            <a:r>
-              <a:rPr lang="en-US" sz="1400" dirty="0">
-                <a:solidFill>
-                  <a:srgbClr val="2C2C2C"/>
-                </a:solidFill>
-                <a:latin typeface="Calibri" pitchFamily="34" charset="0"/>
-                <a:ea typeface="Calibri" pitchFamily="34" charset="-122"/>
-                <a:cs typeface="Calibri" pitchFamily="34" charset="-120"/>
-              </a:rPr>
-              <a:t>Goal: every team member adds back what they build  —  the repo grows with each project</a:t>
-            </a:r>
-            <a:endParaRPr lang="en-US" sz="1400" dirty="0"/>
+              <a:t>Your next steps  |  5 min</a:t>
+            </a:r>
+            <a:endParaRPr lang="en-US" sz="1800" dirty="0"/>
           </a:p>
         </p:txBody>
       </p:sp>
@@ -4521,6 +4472,940 @@
                 <a:ea typeface="Calibri Light" pitchFamily="34" charset="-122"/>
                 <a:cs typeface="Calibri Light" pitchFamily="34" charset="-120"/>
               </a:rPr>
+              <a:t>How to Start on Your Next Project</a:t>
+            </a:r>
+            <a:endParaRPr lang="en-US" sz="2400" dirty="0"/>
+          </a:p>
+        </p:txBody>
+      </p:sp>
+      <p:sp>
+        <p:nvSpPr>
+          <p:cNvPr id="5" name="Shape 3"/>
+          <p:cNvSpPr/>
+          <p:nvPr/>
+        </p:nvSpPr>
+        <p:spPr>
+          <a:xfrm>
+            <a:off x="109728" y="1143000"/>
+            <a:ext cx="11826240" cy="713232"/>
+          </a:xfrm>
+          <a:prstGeom prst="rect">
+            <a:avLst/>
+          </a:prstGeom>
+          <a:solidFill>
+            <a:srgbClr val="F2F2F2"/>
+          </a:solidFill>
+          <a:ln w="12700">
+            <a:solidFill>
+              <a:srgbClr val="F2F2F2"/>
+            </a:solidFill>
+            <a:prstDash val="solid"/>
+          </a:ln>
+        </p:spPr>
+      </p:sp>
+      <p:sp>
+        <p:nvSpPr>
+          <p:cNvPr id="6" name="Shape 4"/>
+          <p:cNvSpPr/>
+          <p:nvPr/>
+        </p:nvSpPr>
+        <p:spPr>
+          <a:xfrm>
+            <a:off x="256032" y="1435608"/>
+            <a:ext cx="128016" cy="128016"/>
+          </a:xfrm>
+          <a:prstGeom prst="ellipse">
+            <a:avLst/>
+          </a:prstGeom>
+          <a:solidFill>
+            <a:srgbClr val="2E75B6"/>
+          </a:solidFill>
+          <a:ln w="12700">
+            <a:solidFill>
+              <a:srgbClr val="2E75B6"/>
+            </a:solidFill>
+            <a:prstDash val="solid"/>
+          </a:ln>
+        </p:spPr>
+      </p:sp>
+      <p:sp>
+        <p:nvSpPr>
+          <p:cNvPr id="7" name="Text 5"/>
+          <p:cNvSpPr/>
+          <p:nvPr/>
+        </p:nvSpPr>
+        <p:spPr>
+          <a:xfrm>
+            <a:off x="475488" y="1143000"/>
+            <a:ext cx="10485120" cy="713232"/>
+          </a:xfrm>
+          <a:prstGeom prst="rect">
+            <a:avLst/>
+          </a:prstGeom>
+          <a:noFill/>
+          <a:ln/>
+        </p:spPr>
+        <p:txBody>
+          <a:bodyPr wrap="square" rtlCol="0" anchor="ctr"/>
+          <a:lstStyle/>
+          <a:p>
+            <a:pPr indent="0" marL="0">
+              <a:buNone/>
+            </a:pPr>
+            <a:r>
+              <a:rPr lang="en-US" sz="1400" dirty="0">
+                <a:solidFill>
+                  <a:srgbClr val="2C2C2C"/>
+                </a:solidFill>
+                <a:latin typeface="Calibri" pitchFamily="34" charset="0"/>
+                <a:ea typeface="Calibri" pitchFamily="34" charset="-122"/>
+                <a:cs typeface="Calibri" pitchFamily="34" charset="-120"/>
+              </a:rPr>
+              <a:t>Step 1  Set up tools once (~20 min)   Install PAC CLI  →  pac auth create  →  install 3 VS Code extensions</a:t>
+            </a:r>
+            <a:endParaRPr lang="en-US" sz="1400" dirty="0"/>
+          </a:p>
+        </p:txBody>
+      </p:sp>
+      <p:sp>
+        <p:nvSpPr>
+          <p:cNvPr id="8" name="Shape 6"/>
+          <p:cNvSpPr/>
+          <p:nvPr/>
+        </p:nvSpPr>
+        <p:spPr>
+          <a:xfrm>
+            <a:off x="109728" y="1892808"/>
+            <a:ext cx="11826240" cy="713232"/>
+          </a:xfrm>
+          <a:prstGeom prst="rect">
+            <a:avLst/>
+          </a:prstGeom>
+          <a:solidFill>
+            <a:srgbClr val="FFFFFF"/>
+          </a:solidFill>
+          <a:ln w="12700">
+            <a:solidFill>
+              <a:srgbClr val="FFFFFF"/>
+            </a:solidFill>
+            <a:prstDash val="solid"/>
+          </a:ln>
+        </p:spPr>
+      </p:sp>
+      <p:sp>
+        <p:nvSpPr>
+          <p:cNvPr id="9" name="Shape 7"/>
+          <p:cNvSpPr/>
+          <p:nvPr/>
+        </p:nvSpPr>
+        <p:spPr>
+          <a:xfrm>
+            <a:off x="256032" y="2185416"/>
+            <a:ext cx="128016" cy="128016"/>
+          </a:xfrm>
+          <a:prstGeom prst="ellipse">
+            <a:avLst/>
+          </a:prstGeom>
+          <a:solidFill>
+            <a:srgbClr val="2E75B6"/>
+          </a:solidFill>
+          <a:ln w="12700">
+            <a:solidFill>
+              <a:srgbClr val="2E75B6"/>
+            </a:solidFill>
+            <a:prstDash val="solid"/>
+          </a:ln>
+        </p:spPr>
+      </p:sp>
+      <p:sp>
+        <p:nvSpPr>
+          <p:cNvPr id="10" name="Text 8"/>
+          <p:cNvSpPr/>
+          <p:nvPr/>
+        </p:nvSpPr>
+        <p:spPr>
+          <a:xfrm>
+            <a:off x="475488" y="1892808"/>
+            <a:ext cx="10485120" cy="713232"/>
+          </a:xfrm>
+          <a:prstGeom prst="rect">
+            <a:avLst/>
+          </a:prstGeom>
+          <a:noFill/>
+          <a:ln/>
+        </p:spPr>
+        <p:txBody>
+          <a:bodyPr wrap="square" rtlCol="0" anchor="ctr"/>
+          <a:lstStyle/>
+          <a:p>
+            <a:pPr indent="0" marL="0">
+              <a:buNone/>
+            </a:pPr>
+            <a:r>
+              <a:rPr lang="en-US" sz="1400" dirty="0">
+                <a:solidFill>
+                  <a:srgbClr val="2C2C2C"/>
+                </a:solidFill>
+                <a:latin typeface="Calibri" pitchFamily="34" charset="0"/>
+                <a:ea typeface="Calibri" pitchFamily="34" charset="-122"/>
+                <a:cs typeface="Calibri" pitchFamily="34" charset="-120"/>
+              </a:rPr>
+              <a:t>Step 2  Pick your recipe                   Open README.md, find your agent type in the recipe table, follow it</a:t>
+            </a:r>
+            <a:endParaRPr lang="en-US" sz="1400" dirty="0"/>
+          </a:p>
+        </p:txBody>
+      </p:sp>
+      <p:sp>
+        <p:nvSpPr>
+          <p:cNvPr id="11" name="Shape 9"/>
+          <p:cNvSpPr/>
+          <p:nvPr/>
+        </p:nvSpPr>
+        <p:spPr>
+          <a:xfrm>
+            <a:off x="109728" y="2642616"/>
+            <a:ext cx="11826240" cy="713232"/>
+          </a:xfrm>
+          <a:prstGeom prst="rect">
+            <a:avLst/>
+          </a:prstGeom>
+          <a:solidFill>
+            <a:srgbClr val="F2F2F2"/>
+          </a:solidFill>
+          <a:ln w="12700">
+            <a:solidFill>
+              <a:srgbClr val="F2F2F2"/>
+            </a:solidFill>
+            <a:prstDash val="solid"/>
+          </a:ln>
+        </p:spPr>
+      </p:sp>
+      <p:sp>
+        <p:nvSpPr>
+          <p:cNvPr id="12" name="Shape 10"/>
+          <p:cNvSpPr/>
+          <p:nvPr/>
+        </p:nvSpPr>
+        <p:spPr>
+          <a:xfrm>
+            <a:off x="256032" y="2935224"/>
+            <a:ext cx="128016" cy="128016"/>
+          </a:xfrm>
+          <a:prstGeom prst="ellipse">
+            <a:avLst/>
+          </a:prstGeom>
+          <a:solidFill>
+            <a:srgbClr val="2E75B6"/>
+          </a:solidFill>
+          <a:ln w="12700">
+            <a:solidFill>
+              <a:srgbClr val="2E75B6"/>
+            </a:solidFill>
+            <a:prstDash val="solid"/>
+          </a:ln>
+        </p:spPr>
+      </p:sp>
+      <p:sp>
+        <p:nvSpPr>
+          <p:cNvPr id="13" name="Text 11"/>
+          <p:cNvSpPr/>
+          <p:nvPr/>
+        </p:nvSpPr>
+        <p:spPr>
+          <a:xfrm>
+            <a:off x="475488" y="2642616"/>
+            <a:ext cx="10485120" cy="713232"/>
+          </a:xfrm>
+          <a:prstGeom prst="rect">
+            <a:avLst/>
+          </a:prstGeom>
+          <a:noFill/>
+          <a:ln/>
+        </p:spPr>
+        <p:txBody>
+          <a:bodyPr wrap="square" rtlCol="0" anchor="ctr"/>
+          <a:lstStyle/>
+          <a:p>
+            <a:pPr indent="0" marL="0">
+              <a:buNone/>
+            </a:pPr>
+            <a:r>
+              <a:rPr lang="en-US" sz="1400" dirty="0">
+                <a:solidFill>
+                  <a:srgbClr val="2C2C2C"/>
+                </a:solidFill>
+                <a:latin typeface="Calibri" pitchFamily="34" charset="0"/>
+                <a:ea typeface="Calibri" pitchFamily="34" charset="-122"/>
+                <a:cs typeface="Calibri" pitchFamily="34" charset="-120"/>
+              </a:rPr>
+              <a:t>Step 3  Follow your role entry point   Open ENGINEERING-PLAYBOOK.md  →  find your role  →  start at your stage</a:t>
+            </a:r>
+            <a:endParaRPr lang="en-US" sz="1400" dirty="0"/>
+          </a:p>
+        </p:txBody>
+      </p:sp>
+      <p:sp>
+        <p:nvSpPr>
+          <p:cNvPr id="14" name="Shape 12"/>
+          <p:cNvSpPr/>
+          <p:nvPr/>
+        </p:nvSpPr>
+        <p:spPr>
+          <a:xfrm>
+            <a:off x="109728" y="3392424"/>
+            <a:ext cx="11826240" cy="713232"/>
+          </a:xfrm>
+          <a:prstGeom prst="rect">
+            <a:avLst/>
+          </a:prstGeom>
+          <a:solidFill>
+            <a:srgbClr val="FFFFFF"/>
+          </a:solidFill>
+          <a:ln w="12700">
+            <a:solidFill>
+              <a:srgbClr val="FFFFFF"/>
+            </a:solidFill>
+            <a:prstDash val="solid"/>
+          </a:ln>
+        </p:spPr>
+      </p:sp>
+      <p:sp>
+        <p:nvSpPr>
+          <p:cNvPr id="15" name="Shape 13"/>
+          <p:cNvSpPr/>
+          <p:nvPr/>
+        </p:nvSpPr>
+        <p:spPr>
+          <a:xfrm>
+            <a:off x="256032" y="3685032"/>
+            <a:ext cx="128016" cy="128016"/>
+          </a:xfrm>
+          <a:prstGeom prst="ellipse">
+            <a:avLst/>
+          </a:prstGeom>
+          <a:solidFill>
+            <a:srgbClr val="2E75B6"/>
+          </a:solidFill>
+          <a:ln w="12700">
+            <a:solidFill>
+              <a:srgbClr val="2E75B6"/>
+            </a:solidFill>
+            <a:prstDash val="solid"/>
+          </a:ln>
+        </p:spPr>
+      </p:sp>
+      <p:sp>
+        <p:nvSpPr>
+          <p:cNvPr id="16" name="Text 14"/>
+          <p:cNvSpPr/>
+          <p:nvPr/>
+        </p:nvSpPr>
+        <p:spPr>
+          <a:xfrm>
+            <a:off x="475488" y="3392424"/>
+            <a:ext cx="10485120" cy="713232"/>
+          </a:xfrm>
+          <a:prstGeom prst="rect">
+            <a:avLst/>
+          </a:prstGeom>
+          <a:noFill/>
+          <a:ln/>
+        </p:spPr>
+        <p:txBody>
+          <a:bodyPr wrap="square" rtlCol="0" anchor="ctr"/>
+          <a:lstStyle/>
+          <a:p>
+            <a:pPr indent="0" marL="0">
+              <a:buNone/>
+            </a:pPr>
+            <a:r>
+              <a:rPr lang="en-US" sz="1400" dirty="0">
+                <a:solidFill>
+                  <a:srgbClr val="2C2C2C"/>
+                </a:solidFill>
+                <a:latin typeface="Calibri" pitchFamily="34" charset="0"/>
+                <a:ea typeface="Calibri" pitchFamily="34" charset="-122"/>
+                <a:cs typeface="Calibri" pitchFamily="34" charset="-120"/>
+              </a:rPr>
+              <a:t>Key doc: docs/QUICKSTART.md  —  working agent in under 1 hour</a:t>
+            </a:r>
+            <a:endParaRPr lang="en-US" sz="1400" dirty="0"/>
+          </a:p>
+        </p:txBody>
+      </p:sp>
+    </p:spTree>
+  </p:cSld>
+  <p:clrMapOvr>
+    <a:masterClrMapping/>
+  </p:clrMapOvr>
+</p:sld>
+</file>
+
+<file path=ppt/slides/slide16.xml><?xml version="1.0" encoding="utf-8"?>
+<p:sld xmlns:a="http://schemas.openxmlformats.org/drawingml/2006/main" xmlns:r="http://schemas.openxmlformats.org/officeDocument/2006/relationships" xmlns:p="http://schemas.openxmlformats.org/presentationml/2006/main">
+  <p:cSld name="Slide 16">
+    <p:bg>
+      <p:bgPr>
+        <a:solidFill>
+          <a:srgbClr val="FFFFFF"/>
+        </a:solidFill>
+      </p:bgPr>
+    </p:bg>
+    <p:spTree>
+      <p:nvGrpSpPr>
+        <p:cNvPr id="1" name=""/>
+        <p:cNvGrpSpPr/>
+        <p:nvPr/>
+      </p:nvGrpSpPr>
+      <p:grpSpPr>
+        <a:xfrm>
+          <a:off x="0" y="0"/>
+          <a:ext cx="0" cy="0"/>
+          <a:chOff x="0" y="0"/>
+          <a:chExt cx="0" cy="0"/>
+        </a:xfrm>
+      </p:grpSpPr>
+      <p:sp>
+        <p:nvSpPr>
+          <p:cNvPr id="2" name="Shape 0"/>
+          <p:cNvSpPr/>
+          <p:nvPr/>
+        </p:nvSpPr>
+        <p:spPr>
+          <a:xfrm>
+            <a:off x="0" y="0"/>
+            <a:ext cx="109728" cy="6858000"/>
+          </a:xfrm>
+          <a:prstGeom prst="rect">
+            <a:avLst/>
+          </a:prstGeom>
+          <a:solidFill>
+            <a:srgbClr val="1F3864"/>
+          </a:solidFill>
+          <a:ln/>
+        </p:spPr>
+      </p:sp>
+      <p:sp>
+        <p:nvSpPr>
+          <p:cNvPr id="3" name="Shape 1"/>
+          <p:cNvSpPr/>
+          <p:nvPr/>
+        </p:nvSpPr>
+        <p:spPr>
+          <a:xfrm>
+            <a:off x="109728" y="0"/>
+            <a:ext cx="11826240" cy="1005840"/>
+          </a:xfrm>
+          <a:prstGeom prst="rect">
+            <a:avLst/>
+          </a:prstGeom>
+          <a:solidFill>
+            <a:srgbClr val="1F3864"/>
+          </a:solidFill>
+          <a:ln/>
+        </p:spPr>
+      </p:sp>
+      <p:sp>
+        <p:nvSpPr>
+          <p:cNvPr id="4" name="Text 2"/>
+          <p:cNvSpPr/>
+          <p:nvPr/>
+        </p:nvSpPr>
+        <p:spPr>
+          <a:xfrm>
+            <a:off x="320040" y="91440"/>
+            <a:ext cx="10728960" cy="822960"/>
+          </a:xfrm>
+          <a:prstGeom prst="rect">
+            <a:avLst/>
+          </a:prstGeom>
+          <a:noFill/>
+          <a:ln/>
+        </p:spPr>
+        <p:txBody>
+          <a:bodyPr wrap="square" rtlCol="0" anchor="ctr"/>
+          <a:lstStyle/>
+          <a:p>
+            <a:pPr indent="0" marL="0">
+              <a:buNone/>
+            </a:pPr>
+            <a:r>
+              <a:rPr lang="en-US" sz="2400" b="1" dirty="0">
+                <a:solidFill>
+                  <a:srgbClr val="FFFFFF"/>
+                </a:solidFill>
+                <a:latin typeface="Calibri Light" pitchFamily="34" charset="0"/>
+                <a:ea typeface="Calibri Light" pitchFamily="34" charset="-122"/>
+                <a:cs typeface="Calibri Light" pitchFamily="34" charset="-120"/>
+              </a:rPr>
+              <a:t>How to Contribute Back</a:t>
+            </a:r>
+            <a:endParaRPr lang="en-US" sz="2400" dirty="0"/>
+          </a:p>
+        </p:txBody>
+      </p:sp>
+      <p:sp>
+        <p:nvSpPr>
+          <p:cNvPr id="5" name="Shape 3"/>
+          <p:cNvSpPr/>
+          <p:nvPr/>
+        </p:nvSpPr>
+        <p:spPr>
+          <a:xfrm>
+            <a:off x="109728" y="1143000"/>
+            <a:ext cx="11826240" cy="493776"/>
+          </a:xfrm>
+          <a:prstGeom prst="rect">
+            <a:avLst/>
+          </a:prstGeom>
+          <a:solidFill>
+            <a:srgbClr val="F2F2F2"/>
+          </a:solidFill>
+          <a:ln w="12700">
+            <a:solidFill>
+              <a:srgbClr val="F2F2F2"/>
+            </a:solidFill>
+            <a:prstDash val="solid"/>
+          </a:ln>
+        </p:spPr>
+      </p:sp>
+      <p:sp>
+        <p:nvSpPr>
+          <p:cNvPr id="6" name="Shape 4"/>
+          <p:cNvSpPr/>
+          <p:nvPr/>
+        </p:nvSpPr>
+        <p:spPr>
+          <a:xfrm>
+            <a:off x="256032" y="1325880"/>
+            <a:ext cx="128016" cy="128016"/>
+          </a:xfrm>
+          <a:prstGeom prst="ellipse">
+            <a:avLst/>
+          </a:prstGeom>
+          <a:solidFill>
+            <a:srgbClr val="2E75B6"/>
+          </a:solidFill>
+          <a:ln w="12700">
+            <a:solidFill>
+              <a:srgbClr val="2E75B6"/>
+            </a:solidFill>
+            <a:prstDash val="solid"/>
+          </a:ln>
+        </p:spPr>
+      </p:sp>
+      <p:sp>
+        <p:nvSpPr>
+          <p:cNvPr id="7" name="Text 5"/>
+          <p:cNvSpPr/>
+          <p:nvPr/>
+        </p:nvSpPr>
+        <p:spPr>
+          <a:xfrm>
+            <a:off x="475488" y="1143000"/>
+            <a:ext cx="10485120" cy="493776"/>
+          </a:xfrm>
+          <a:prstGeom prst="rect">
+            <a:avLst/>
+          </a:prstGeom>
+          <a:noFill/>
+          <a:ln/>
+        </p:spPr>
+        <p:txBody>
+          <a:bodyPr wrap="square" rtlCol="0" anchor="ctr"/>
+          <a:lstStyle/>
+          <a:p>
+            <a:pPr indent="0" marL="0">
+              <a:buNone/>
+            </a:pPr>
+            <a:r>
+              <a:rPr lang="en-US" sz="1400" dirty="0">
+                <a:solidFill>
+                  <a:srgbClr val="2C2C2C"/>
+                </a:solidFill>
+                <a:latin typeface="Calibri" pitchFamily="34" charset="0"/>
+                <a:ea typeface="Calibri" pitchFamily="34" charset="-122"/>
+                <a:cs typeface="Calibri" pitchFamily="34" charset="-120"/>
+              </a:rPr>
+              <a:t>New topic pattern        Copy components/topics/_scaffold/   →   build your pattern   →   open a PR to components/topics/</a:t>
+            </a:r>
+            <a:endParaRPr lang="en-US" sz="1400" dirty="0"/>
+          </a:p>
+        </p:txBody>
+      </p:sp>
+      <p:sp>
+        <p:nvSpPr>
+          <p:cNvPr id="8" name="Shape 6"/>
+          <p:cNvSpPr/>
+          <p:nvPr/>
+        </p:nvSpPr>
+        <p:spPr>
+          <a:xfrm>
+            <a:off x="109728" y="1673352"/>
+            <a:ext cx="11826240" cy="493776"/>
+          </a:xfrm>
+          <a:prstGeom prst="rect">
+            <a:avLst/>
+          </a:prstGeom>
+          <a:solidFill>
+            <a:srgbClr val="FFFFFF"/>
+          </a:solidFill>
+          <a:ln w="12700">
+            <a:solidFill>
+              <a:srgbClr val="FFFFFF"/>
+            </a:solidFill>
+            <a:prstDash val="solid"/>
+          </a:ln>
+        </p:spPr>
+      </p:sp>
+      <p:sp>
+        <p:nvSpPr>
+          <p:cNvPr id="9" name="Shape 7"/>
+          <p:cNvSpPr/>
+          <p:nvPr/>
+        </p:nvSpPr>
+        <p:spPr>
+          <a:xfrm>
+            <a:off x="256032" y="1856232"/>
+            <a:ext cx="128016" cy="128016"/>
+          </a:xfrm>
+          <a:prstGeom prst="ellipse">
+            <a:avLst/>
+          </a:prstGeom>
+          <a:solidFill>
+            <a:srgbClr val="2E75B6"/>
+          </a:solidFill>
+          <a:ln w="12700">
+            <a:solidFill>
+              <a:srgbClr val="2E75B6"/>
+            </a:solidFill>
+            <a:prstDash val="solid"/>
+          </a:ln>
+        </p:spPr>
+      </p:sp>
+      <p:sp>
+        <p:nvSpPr>
+          <p:cNvPr id="10" name="Text 8"/>
+          <p:cNvSpPr/>
+          <p:nvPr/>
+        </p:nvSpPr>
+        <p:spPr>
+          <a:xfrm>
+            <a:off x="475488" y="1673352"/>
+            <a:ext cx="10485120" cy="493776"/>
+          </a:xfrm>
+          <a:prstGeom prst="rect">
+            <a:avLst/>
+          </a:prstGeom>
+          <a:noFill/>
+          <a:ln/>
+        </p:spPr>
+        <p:txBody>
+          <a:bodyPr wrap="square" rtlCol="0" anchor="ctr"/>
+          <a:lstStyle/>
+          <a:p>
+            <a:pPr indent="0" marL="0">
+              <a:buNone/>
+            </a:pPr>
+            <a:r>
+              <a:rPr lang="en-US" sz="1400" dirty="0">
+                <a:solidFill>
+                  <a:srgbClr val="2C2C2C"/>
+                </a:solidFill>
+                <a:latin typeface="Calibri" pitchFamily="34" charset="0"/>
+                <a:ea typeface="Calibri" pitchFamily="34" charset="-122"/>
+                <a:cs typeface="Calibri" pitchFamily="34" charset="-120"/>
+              </a:rPr>
+              <a:t>New agent persona      Add markdown file to prompts/system-prompts/   —   one file, one PR</a:t>
+            </a:r>
+            <a:endParaRPr lang="en-US" sz="1400" dirty="0"/>
+          </a:p>
+        </p:txBody>
+      </p:sp>
+      <p:sp>
+        <p:nvSpPr>
+          <p:cNvPr id="11" name="Shape 9"/>
+          <p:cNvSpPr/>
+          <p:nvPr/>
+        </p:nvSpPr>
+        <p:spPr>
+          <a:xfrm>
+            <a:off x="109728" y="2203704"/>
+            <a:ext cx="11826240" cy="493776"/>
+          </a:xfrm>
+          <a:prstGeom prst="rect">
+            <a:avLst/>
+          </a:prstGeom>
+          <a:solidFill>
+            <a:srgbClr val="F2F2F2"/>
+          </a:solidFill>
+          <a:ln w="12700">
+            <a:solidFill>
+              <a:srgbClr val="F2F2F2"/>
+            </a:solidFill>
+            <a:prstDash val="solid"/>
+          </a:ln>
+        </p:spPr>
+      </p:sp>
+      <p:sp>
+        <p:nvSpPr>
+          <p:cNvPr id="12" name="Shape 10"/>
+          <p:cNvSpPr/>
+          <p:nvPr/>
+        </p:nvSpPr>
+        <p:spPr>
+          <a:xfrm>
+            <a:off x="256032" y="2386584"/>
+            <a:ext cx="128016" cy="128016"/>
+          </a:xfrm>
+          <a:prstGeom prst="ellipse">
+            <a:avLst/>
+          </a:prstGeom>
+          <a:solidFill>
+            <a:srgbClr val="2E75B6"/>
+          </a:solidFill>
+          <a:ln w="12700">
+            <a:solidFill>
+              <a:srgbClr val="2E75B6"/>
+            </a:solidFill>
+            <a:prstDash val="solid"/>
+          </a:ln>
+        </p:spPr>
+      </p:sp>
+      <p:sp>
+        <p:nvSpPr>
+          <p:cNvPr id="13" name="Text 11"/>
+          <p:cNvSpPr/>
+          <p:nvPr/>
+        </p:nvSpPr>
+        <p:spPr>
+          <a:xfrm>
+            <a:off x="475488" y="2203704"/>
+            <a:ext cx="10485120" cy="493776"/>
+          </a:xfrm>
+          <a:prstGeom prst="rect">
+            <a:avLst/>
+          </a:prstGeom>
+          <a:noFill/>
+          <a:ln/>
+        </p:spPr>
+        <p:txBody>
+          <a:bodyPr wrap="square" rtlCol="0" anchor="ctr"/>
+          <a:lstStyle/>
+          <a:p>
+            <a:pPr indent="0" marL="0">
+              <a:buNone/>
+            </a:pPr>
+            <a:r>
+              <a:rPr lang="en-US" sz="1400" dirty="0">
+                <a:solidFill>
+                  <a:srgbClr val="2C2C2C"/>
+                </a:solidFill>
+                <a:latin typeface="Calibri" pitchFamily="34" charset="0"/>
+                <a:ea typeface="Calibri" pitchFamily="34" charset="-122"/>
+                <a:cs typeface="Calibri" pitchFamily="34" charset="-120"/>
+              </a:rPr>
+              <a:t>New recipe                  Document a template combination not yet covered   →   add to recipes/</a:t>
+            </a:r>
+            <a:endParaRPr lang="en-US" sz="1400" dirty="0"/>
+          </a:p>
+        </p:txBody>
+      </p:sp>
+      <p:sp>
+        <p:nvSpPr>
+          <p:cNvPr id="14" name="Shape 12"/>
+          <p:cNvSpPr/>
+          <p:nvPr/>
+        </p:nvSpPr>
+        <p:spPr>
+          <a:xfrm>
+            <a:off x="109728" y="2734056"/>
+            <a:ext cx="11826240" cy="493776"/>
+          </a:xfrm>
+          <a:prstGeom prst="rect">
+            <a:avLst/>
+          </a:prstGeom>
+          <a:solidFill>
+            <a:srgbClr val="FFFFFF"/>
+          </a:solidFill>
+          <a:ln w="12700">
+            <a:solidFill>
+              <a:srgbClr val="FFFFFF"/>
+            </a:solidFill>
+            <a:prstDash val="solid"/>
+          </a:ln>
+        </p:spPr>
+      </p:sp>
+      <p:sp>
+        <p:nvSpPr>
+          <p:cNvPr id="15" name="Shape 13"/>
+          <p:cNvSpPr/>
+          <p:nvPr/>
+        </p:nvSpPr>
+        <p:spPr>
+          <a:xfrm>
+            <a:off x="256032" y="2916936"/>
+            <a:ext cx="128016" cy="128016"/>
+          </a:xfrm>
+          <a:prstGeom prst="ellipse">
+            <a:avLst/>
+          </a:prstGeom>
+          <a:solidFill>
+            <a:srgbClr val="2E75B6"/>
+          </a:solidFill>
+          <a:ln w="12700">
+            <a:solidFill>
+              <a:srgbClr val="2E75B6"/>
+            </a:solidFill>
+            <a:prstDash val="solid"/>
+          </a:ln>
+        </p:spPr>
+      </p:sp>
+      <p:sp>
+        <p:nvSpPr>
+          <p:cNvPr id="16" name="Text 14"/>
+          <p:cNvSpPr/>
+          <p:nvPr/>
+        </p:nvSpPr>
+        <p:spPr>
+          <a:xfrm>
+            <a:off x="475488" y="2734056"/>
+            <a:ext cx="10485120" cy="493776"/>
+          </a:xfrm>
+          <a:prstGeom prst="rect">
+            <a:avLst/>
+          </a:prstGeom>
+          <a:noFill/>
+          <a:ln/>
+        </p:spPr>
+        <p:txBody>
+          <a:bodyPr wrap="square" rtlCol="0" anchor="ctr"/>
+          <a:lstStyle/>
+          <a:p>
+            <a:pPr indent="0" marL="0">
+              <a:buNone/>
+            </a:pPr>
+            <a:r>
+              <a:rPr lang="en-US" sz="1400" dirty="0">
+                <a:solidFill>
+                  <a:srgbClr val="2C2C2C"/>
+                </a:solidFill>
+                <a:latin typeface="Calibri" pitchFamily="34" charset="0"/>
+                <a:ea typeface="Calibri" pitchFamily="34" charset="-122"/>
+                <a:cs typeface="Calibri" pitchFamily="34" charset="-120"/>
+              </a:rPr>
+              <a:t>Goal: every team member adds back what they build  —  the repo grows with each project</a:t>
+            </a:r>
+            <a:endParaRPr lang="en-US" sz="1400" dirty="0"/>
+          </a:p>
+        </p:txBody>
+      </p:sp>
+    </p:spTree>
+  </p:cSld>
+  <p:clrMapOvr>
+    <a:masterClrMapping/>
+  </p:clrMapOvr>
+</p:sld>
+</file>
+
+<file path=ppt/slides/slide17.xml><?xml version="1.0" encoding="utf-8"?>
+<p:sld xmlns:a="http://schemas.openxmlformats.org/drawingml/2006/main" xmlns:r="http://schemas.openxmlformats.org/officeDocument/2006/relationships" xmlns:p="http://schemas.openxmlformats.org/presentationml/2006/main">
+  <p:cSld name="Slide 17">
+    <p:bg>
+      <p:bgPr>
+        <a:solidFill>
+          <a:srgbClr val="FFFFFF"/>
+        </a:solidFill>
+      </p:bgPr>
+    </p:bg>
+    <p:spTree>
+      <p:nvGrpSpPr>
+        <p:cNvPr id="1" name=""/>
+        <p:cNvGrpSpPr/>
+        <p:nvPr/>
+      </p:nvGrpSpPr>
+      <p:grpSpPr>
+        <a:xfrm>
+          <a:off x="0" y="0"/>
+          <a:ext cx="0" cy="0"/>
+          <a:chOff x="0" y="0"/>
+          <a:chExt cx="0" cy="0"/>
+        </a:xfrm>
+      </p:grpSpPr>
+      <p:sp>
+        <p:nvSpPr>
+          <p:cNvPr id="2" name="Shape 0"/>
+          <p:cNvSpPr/>
+          <p:nvPr/>
+        </p:nvSpPr>
+        <p:spPr>
+          <a:xfrm>
+            <a:off x="0" y="0"/>
+            <a:ext cx="109728" cy="6858000"/>
+          </a:xfrm>
+          <a:prstGeom prst="rect">
+            <a:avLst/>
+          </a:prstGeom>
+          <a:solidFill>
+            <a:srgbClr val="1F3864"/>
+          </a:solidFill>
+          <a:ln/>
+        </p:spPr>
+      </p:sp>
+      <p:sp>
+        <p:nvSpPr>
+          <p:cNvPr id="3" name="Shape 1"/>
+          <p:cNvSpPr/>
+          <p:nvPr/>
+        </p:nvSpPr>
+        <p:spPr>
+          <a:xfrm>
+            <a:off x="109728" y="0"/>
+            <a:ext cx="11826240" cy="1005840"/>
+          </a:xfrm>
+          <a:prstGeom prst="rect">
+            <a:avLst/>
+          </a:prstGeom>
+          <a:solidFill>
+            <a:srgbClr val="1F3864"/>
+          </a:solidFill>
+          <a:ln/>
+        </p:spPr>
+      </p:sp>
+      <p:sp>
+        <p:nvSpPr>
+          <p:cNvPr id="4" name="Text 2"/>
+          <p:cNvSpPr/>
+          <p:nvPr/>
+        </p:nvSpPr>
+        <p:spPr>
+          <a:xfrm>
+            <a:off x="320040" y="91440"/>
+            <a:ext cx="10728960" cy="822960"/>
+          </a:xfrm>
+          <a:prstGeom prst="rect">
+            <a:avLst/>
+          </a:prstGeom>
+          <a:noFill/>
+          <a:ln/>
+        </p:spPr>
+        <p:txBody>
+          <a:bodyPr wrap="square" rtlCol="0" anchor="ctr"/>
+          <a:lstStyle/>
+          <a:p>
+            <a:pPr indent="0" marL="0">
+              <a:buNone/>
+            </a:pPr>
+            <a:r>
+              <a:rPr lang="en-US" sz="2400" b="1" dirty="0">
+                <a:solidFill>
+                  <a:srgbClr val="FFFFFF"/>
+                </a:solidFill>
+                <a:latin typeface="Calibri Light" pitchFamily="34" charset="0"/>
+                <a:ea typeface="Calibri Light" pitchFamily="34" charset="-122"/>
+                <a:cs typeface="Calibri Light" pitchFamily="34" charset="-120"/>
+              </a:rPr>
               <a:t>Next Steps</a:t>
             </a:r>
             <a:endParaRPr lang="en-US" sz="2400" dirty="0"/>
@@ -5166,7 +6051,7 @@
                 <a:ea typeface="Calibri" pitchFamily="34" charset="-122"/>
                 <a:cs typeface="Calibri" pitchFamily="34" charset="-120"/>
               </a:rPr>
-              <a:t>01   Why  —  The problem this repo solves                              5 min</a:t>
+              <a:t>01   Why  —  Where the UI stops and templates start                  5 min</a:t>
             </a:r>
             <a:endParaRPr lang="en-US" sz="1600" dirty="0"/>
           </a:p>
@@ -5255,7 +6140,7 @@
                 <a:ea typeface="Calibri" pitchFamily="34" charset="-122"/>
                 <a:cs typeface="Calibri" pitchFamily="34" charset="-120"/>
               </a:rPr>
-              <a:t>02   What  —  Repo walkthrough in VS Code                            8 min</a:t>
+              <a:t>02   What  —  Repo walkthrough: what each folder solves           8 min</a:t>
             </a:r>
             <a:endParaRPr lang="en-US" sz="1600" dirty="0"/>
           </a:p>
@@ -5344,7 +6229,7 @@
                 <a:ea typeface="Calibri" pitchFamily="34" charset="-122"/>
                 <a:cs typeface="Calibri" pitchFamily="34" charset="-120"/>
               </a:rPr>
-              <a:t>03   How  —  Live build: Basic FAQ agent                             12 min</a:t>
+              <a:t>03   How  —  Live build: Basic FAQ agent                               12 min</a:t>
             </a:r>
             <a:endParaRPr lang="en-US" sz="1600" dirty="0"/>
           </a:p>
@@ -5433,7 +6318,7 @@
                 <a:ea typeface="Calibri" pitchFamily="34" charset="-122"/>
                 <a:cs typeface="Calibri" pitchFamily="34" charset="-120"/>
               </a:rPr>
-              <a:t>04   Start and Contribute  —  Your next steps                         5 min</a:t>
+              <a:t>04   Start and Contribute  —  Your next steps                           5 min</a:t>
             </a:r>
             <a:endParaRPr lang="en-US" sz="1600" dirty="0"/>
           </a:p>
@@ -5584,7 +6469,7 @@
                 <a:ea typeface="Calibri" pitchFamily="34" charset="-122"/>
                 <a:cs typeface="Calibri" pitchFamily="34" charset="-120"/>
               </a:rPr>
-              <a:t>The problem this repo solves  |  5 min</a:t>
+              <a:t>Where the UI stops and templates start  |  5 min</a:t>
             </a:r>
             <a:endParaRPr lang="en-US" sz="1800" dirty="0"/>
           </a:p>
@@ -5695,7 +6580,7 @@
                 <a:ea typeface="Calibri Light" pitchFamily="34" charset="-122"/>
                 <a:cs typeface="Calibri Light" pitchFamily="34" charset="-120"/>
               </a:rPr>
-              <a:t>The Problem  —  Starting From Blank Every Time</a:t>
+              <a:t>The UI Is Fine  —  Until These Scenarios Hit</a:t>
             </a:r>
             <a:endParaRPr lang="en-US" sz="2400" dirty="0"/>
           </a:p>
@@ -5703,14 +6588,115 @@
       </p:sp>
       <p:sp>
         <p:nvSpPr>
-          <p:cNvPr id="5" name="Shape 3"/>
-          <p:cNvSpPr/>
-          <p:nvPr/>
-        </p:nvSpPr>
-        <p:spPr>
-          <a:xfrm>
-            <a:off x="109728" y="1143000"/>
-            <a:ext cx="11826240" cy="493776"/>
+          <p:cNvPr id="5" name="Text 3"/>
+          <p:cNvSpPr/>
+          <p:nvPr/>
+        </p:nvSpPr>
+        <p:spPr>
+          <a:xfrm>
+            <a:off x="228600" y="1024128"/>
+            <a:ext cx="1828800" cy="292608"/>
+          </a:xfrm>
+          <a:prstGeom prst="rect">
+            <a:avLst/>
+          </a:prstGeom>
+          <a:noFill/>
+          <a:ln/>
+        </p:spPr>
+        <p:txBody>
+          <a:bodyPr wrap="square" rtlCol="0" anchor="ctr"/>
+          <a:lstStyle/>
+          <a:p>
+            <a:pPr indent="0" marL="0">
+              <a:buNone/>
+            </a:pPr>
+            <a:r>
+              <a:rPr lang="en-US" sz="1100" b="1" dirty="0">
+                <a:solidFill>
+                  <a:srgbClr val="666666"/>
+                </a:solidFill>
+                <a:latin typeface="Calibri" pitchFamily="34" charset="0"/>
+                <a:ea typeface="Calibri" pitchFamily="34" charset="-122"/>
+                <a:cs typeface="Calibri" pitchFamily="34" charset="-120"/>
+              </a:rPr>
+              <a:t>Folder</a:t>
+            </a:r>
+            <a:endParaRPr lang="en-US" sz="1100" dirty="0"/>
+          </a:p>
+        </p:txBody>
+      </p:sp>
+      <p:sp>
+        <p:nvSpPr>
+          <p:cNvPr id="6" name="Text 4"/>
+          <p:cNvSpPr/>
+          <p:nvPr/>
+        </p:nvSpPr>
+        <p:spPr>
+          <a:xfrm>
+            <a:off x="2194560" y="1024128"/>
+            <a:ext cx="6400800" cy="292608"/>
+          </a:xfrm>
+          <a:prstGeom prst="rect">
+            <a:avLst/>
+          </a:prstGeom>
+          <a:noFill/>
+          <a:ln/>
+        </p:spPr>
+        <p:txBody>
+          <a:bodyPr wrap="square" rtlCol="0" anchor="ctr"/>
+          <a:lstStyle/>
+          <a:p>
+            <a:pPr indent="0" marL="0">
+              <a:buNone/>
+            </a:pPr>
+            <a:r>
+              <a:rPr lang="en-US" sz="1100" b="1" dirty="0">
+                <a:solidFill>
+                  <a:srgbClr val="666666"/>
+                </a:solidFill>
+                <a:latin typeface="Calibri" pitchFamily="34" charset="0"/>
+                <a:ea typeface="Calibri" pitchFamily="34" charset="-122"/>
+                <a:cs typeface="Calibri" pitchFamily="34" charset="-120"/>
+              </a:rPr>
+              <a:t>Where it helps</a:t>
+            </a:r>
+            <a:endParaRPr lang="en-US" sz="1100" dirty="0"/>
+          </a:p>
+        </p:txBody>
+      </p:sp>
+      <p:sp>
+        <p:nvSpPr>
+          <p:cNvPr id="7" name="Shape 5"/>
+          <p:cNvSpPr/>
+          <p:nvPr/>
+        </p:nvSpPr>
+        <p:spPr>
+          <a:xfrm>
+            <a:off x="182880" y="1316736"/>
+            <a:ext cx="8595360" cy="0"/>
+          </a:xfrm>
+          <a:prstGeom prst="line">
+            <a:avLst/>
+          </a:prstGeom>
+          <a:noFill/>
+          <a:ln w="12700">
+            <a:solidFill>
+              <a:srgbClr val="CCCCCC"/>
+            </a:solidFill>
+            <a:prstDash val="solid"/>
+          </a:ln>
+        </p:spPr>
+      </p:sp>
+      <p:sp>
+        <p:nvSpPr>
+          <p:cNvPr id="8" name="Shape 6"/>
+          <p:cNvSpPr/>
+          <p:nvPr/>
+        </p:nvSpPr>
+        <p:spPr>
+          <a:xfrm>
+            <a:off x="109728" y="1371600"/>
+            <a:ext cx="11826240" cy="585216"/>
           </a:xfrm>
           <a:prstGeom prst="rect">
             <a:avLst/>
@@ -5728,78 +6714,109 @@
       </p:sp>
       <p:sp>
         <p:nvSpPr>
-          <p:cNvPr id="6" name="Shape 4"/>
-          <p:cNvSpPr/>
-          <p:nvPr/>
-        </p:nvSpPr>
-        <p:spPr>
-          <a:xfrm>
-            <a:off x="256032" y="1325880"/>
-            <a:ext cx="128016" cy="128016"/>
-          </a:xfrm>
-          <a:prstGeom prst="ellipse">
-            <a:avLst/>
-          </a:prstGeom>
-          <a:solidFill>
-            <a:srgbClr val="2E75B6"/>
-          </a:solidFill>
-          <a:ln w="12700">
-            <a:solidFill>
-              <a:srgbClr val="2E75B6"/>
-            </a:solidFill>
-            <a:prstDash val="solid"/>
-          </a:ln>
-        </p:spPr>
-      </p:sp>
-      <p:sp>
-        <p:nvSpPr>
-          <p:cNvPr id="7" name="Text 5"/>
-          <p:cNvSpPr/>
-          <p:nvPr/>
-        </p:nvSpPr>
-        <p:spPr>
-          <a:xfrm>
-            <a:off x="475488" y="1143000"/>
-            <a:ext cx="10485120" cy="493776"/>
-          </a:xfrm>
-          <a:prstGeom prst="rect">
-            <a:avLst/>
-          </a:prstGeom>
-          <a:noFill/>
-          <a:ln/>
-        </p:spPr>
-        <p:txBody>
-          <a:bodyPr wrap="square" rtlCol="0" anchor="ctr"/>
-          <a:lstStyle/>
-          <a:p>
-            <a:pPr indent="0" marL="0">
-              <a:buNone/>
-            </a:pPr>
-            <a:r>
-              <a:rPr lang="en-US" sz="1400" dirty="0">
-                <a:solidFill>
-                  <a:srgbClr val="2C2C2C"/>
+          <p:cNvPr id="9" name="Text 7"/>
+          <p:cNvSpPr/>
+          <p:nvPr/>
+        </p:nvSpPr>
+        <p:spPr>
+          <a:xfrm>
+            <a:off x="201168" y="1371600"/>
+            <a:ext cx="1920240" cy="585216"/>
+          </a:xfrm>
+          <a:prstGeom prst="rect">
+            <a:avLst/>
+          </a:prstGeom>
+          <a:noFill/>
+          <a:ln/>
+        </p:spPr>
+        <p:txBody>
+          <a:bodyPr wrap="square" rtlCol="0" anchor="ctr"/>
+          <a:lstStyle/>
+          <a:p>
+            <a:pPr indent="0" marL="0">
+              <a:buNone/>
+            </a:pPr>
+            <a:r>
+              <a:rPr lang="en-US" sz="1200" b="1" dirty="0">
+                <a:solidFill>
+                  <a:srgbClr val="1F3864"/>
                 </a:solidFill>
                 <a:latin typeface="Calibri" pitchFamily="34" charset="0"/>
                 <a:ea typeface="Calibri" pitchFamily="34" charset="-122"/>
                 <a:cs typeface="Calibri" pitchFamily="34" charset="-120"/>
               </a:rPr>
-              <a:t>Every new agent project: set up error handling, wire telemetry, write fallback topic, build CI/CD pipeline</a:t>
-            </a:r>
-            <a:endParaRPr lang="en-US" sz="1400" dirty="0"/>
-          </a:p>
-        </p:txBody>
-      </p:sp>
-      <p:sp>
-        <p:nvSpPr>
-          <p:cNvPr id="8" name="Shape 6"/>
-          <p:cNvSpPr/>
-          <p:nvPr/>
-        </p:nvSpPr>
-        <p:spPr>
-          <a:xfrm>
-            <a:off x="109728" y="1673352"/>
-            <a:ext cx="11826240" cy="493776"/>
+              <a:t>One developer</a:t>
+            </a:r>
+            <a:endParaRPr lang="en-US" sz="1200" dirty="0"/>
+          </a:p>
+          <a:p>
+            <a:pPr indent="0" marL="0">
+              <a:buNone/>
+            </a:pPr>
+            <a:r>
+              <a:rPr lang="en-US" sz="1200" b="1" dirty="0">
+                <a:solidFill>
+                  <a:srgbClr val="1F3864"/>
+                </a:solidFill>
+                <a:latin typeface="Calibri" pitchFamily="34" charset="0"/>
+                <a:ea typeface="Calibri" pitchFamily="34" charset="-122"/>
+                <a:cs typeface="Calibri" pitchFamily="34" charset="-120"/>
+              </a:rPr>
+              <a:t>building solo</a:t>
+            </a:r>
+            <a:endParaRPr lang="en-US" sz="1200" dirty="0"/>
+          </a:p>
+        </p:txBody>
+      </p:sp>
+      <p:sp>
+        <p:nvSpPr>
+          <p:cNvPr id="10" name="Text 8"/>
+          <p:cNvSpPr/>
+          <p:nvPr/>
+        </p:nvSpPr>
+        <p:spPr>
+          <a:xfrm>
+            <a:off x="2194560" y="1371600"/>
+            <a:ext cx="6400800" cy="585216"/>
+          </a:xfrm>
+          <a:prstGeom prst="rect">
+            <a:avLst/>
+          </a:prstGeom>
+          <a:noFill/>
+          <a:ln/>
+        </p:spPr>
+        <p:txBody>
+          <a:bodyPr wrap="square" rtlCol="0" anchor="ctr"/>
+          <a:lstStyle/>
+          <a:p>
+            <a:pPr indent="0" marL="0">
+              <a:buNone/>
+            </a:pPr>
+            <a:r>
+              <a:rPr lang="en-US" sz="1200" dirty="0">
+                <a:solidFill>
+                  <a:srgbClr val="2C2C2C"/>
+                </a:solidFill>
+                <a:latin typeface="Calibri" pitchFamily="34" charset="0"/>
+                <a:ea typeface="Calibri" pitchFamily="34" charset="-122"/>
+                <a:cs typeface="Calibri" pitchFamily="34" charset="-120"/>
+              </a:rPr>
+              <a:t>UI is completely fine — build, test, publish. No templates needed.</a:t>
+            </a:r>
+            <a:endParaRPr lang="en-US" sz="1200" dirty="0"/>
+          </a:p>
+        </p:txBody>
+      </p:sp>
+      <p:sp>
+        <p:nvSpPr>
+          <p:cNvPr id="11" name="Shape 9"/>
+          <p:cNvSpPr/>
+          <p:nvPr/>
+        </p:nvSpPr>
+        <p:spPr>
+          <a:xfrm>
+            <a:off x="109728" y="1993392"/>
+            <a:ext cx="11826240" cy="585216"/>
           </a:xfrm>
           <a:prstGeom prst="rect">
             <a:avLst/>
@@ -5817,78 +6834,109 @@
       </p:sp>
       <p:sp>
         <p:nvSpPr>
-          <p:cNvPr id="9" name="Shape 7"/>
-          <p:cNvSpPr/>
-          <p:nvPr/>
-        </p:nvSpPr>
-        <p:spPr>
-          <a:xfrm>
-            <a:off x="256032" y="1856232"/>
-            <a:ext cx="128016" cy="128016"/>
-          </a:xfrm>
-          <a:prstGeom prst="ellipse">
-            <a:avLst/>
-          </a:prstGeom>
-          <a:solidFill>
-            <a:srgbClr val="2E75B6"/>
-          </a:solidFill>
-          <a:ln w="12700">
-            <a:solidFill>
-              <a:srgbClr val="2E75B6"/>
-            </a:solidFill>
-            <a:prstDash val="solid"/>
-          </a:ln>
-        </p:spPr>
-      </p:sp>
-      <p:sp>
-        <p:nvSpPr>
-          <p:cNvPr id="10" name="Text 8"/>
-          <p:cNvSpPr/>
-          <p:nvPr/>
-        </p:nvSpPr>
-        <p:spPr>
-          <a:xfrm>
-            <a:off x="475488" y="1673352"/>
-            <a:ext cx="10485120" cy="493776"/>
-          </a:xfrm>
-          <a:prstGeom prst="rect">
-            <a:avLst/>
-          </a:prstGeom>
-          <a:noFill/>
-          <a:ln/>
-        </p:spPr>
-        <p:txBody>
-          <a:bodyPr wrap="square" rtlCol="0" anchor="ctr"/>
-          <a:lstStyle/>
-          <a:p>
-            <a:pPr indent="0" marL="0">
-              <a:buNone/>
-            </a:pPr>
-            <a:r>
-              <a:rPr lang="en-US" sz="1400" dirty="0">
-                <a:solidFill>
-                  <a:srgbClr val="2C2C2C"/>
+          <p:cNvPr id="12" name="Text 10"/>
+          <p:cNvSpPr/>
+          <p:nvPr/>
+        </p:nvSpPr>
+        <p:spPr>
+          <a:xfrm>
+            <a:off x="201168" y="1993392"/>
+            <a:ext cx="1920240" cy="585216"/>
+          </a:xfrm>
+          <a:prstGeom prst="rect">
+            <a:avLst/>
+          </a:prstGeom>
+          <a:noFill/>
+          <a:ln/>
+        </p:spPr>
+        <p:txBody>
+          <a:bodyPr wrap="square" rtlCol="0" anchor="ctr"/>
+          <a:lstStyle/>
+          <a:p>
+            <a:pPr indent="0" marL="0">
+              <a:buNone/>
+            </a:pPr>
+            <a:r>
+              <a:rPr lang="en-US" sz="1200" b="1" dirty="0">
+                <a:solidFill>
+                  <a:srgbClr val="1F3864"/>
                 </a:solidFill>
                 <a:latin typeface="Calibri" pitchFamily="34" charset="0"/>
                 <a:ea typeface="Calibri" pitchFamily="34" charset="-122"/>
                 <a:cs typeface="Calibri" pitchFamily="34" charset="-120"/>
               </a:rPr>
-              <a:t>None of this is the actual agent  —  it is scaffolding we rebuild from scratch every time</a:t>
-            </a:r>
-            <a:endParaRPr lang="en-US" sz="1400" dirty="0"/>
-          </a:p>
-        </p:txBody>
-      </p:sp>
-      <p:sp>
-        <p:nvSpPr>
-          <p:cNvPr id="11" name="Shape 9"/>
-          <p:cNvSpPr/>
-          <p:nvPr/>
-        </p:nvSpPr>
-        <p:spPr>
-          <a:xfrm>
-            <a:off x="109728" y="2203704"/>
-            <a:ext cx="11826240" cy="493776"/>
+              <a:t>A team</a:t>
+            </a:r>
+            <a:endParaRPr lang="en-US" sz="1200" dirty="0"/>
+          </a:p>
+          <a:p>
+            <a:pPr indent="0" marL="0">
+              <a:buNone/>
+            </a:pPr>
+            <a:r>
+              <a:rPr lang="en-US" sz="1200" b="1" dirty="0">
+                <a:solidFill>
+                  <a:srgbClr val="1F3864"/>
+                </a:solidFill>
+                <a:latin typeface="Calibri" pitchFamily="34" charset="0"/>
+                <a:ea typeface="Calibri" pitchFamily="34" charset="-122"/>
+                <a:cs typeface="Calibri" pitchFamily="34" charset="-120"/>
+              </a:rPr>
+              <a:t>of developers</a:t>
+            </a:r>
+            <a:endParaRPr lang="en-US" sz="1200" dirty="0"/>
+          </a:p>
+        </p:txBody>
+      </p:sp>
+      <p:sp>
+        <p:nvSpPr>
+          <p:cNvPr id="13" name="Text 11"/>
+          <p:cNvSpPr/>
+          <p:nvPr/>
+        </p:nvSpPr>
+        <p:spPr>
+          <a:xfrm>
+            <a:off x="2194560" y="1993392"/>
+            <a:ext cx="6400800" cy="585216"/>
+          </a:xfrm>
+          <a:prstGeom prst="rect">
+            <a:avLst/>
+          </a:prstGeom>
+          <a:noFill/>
+          <a:ln/>
+        </p:spPr>
+        <p:txBody>
+          <a:bodyPr wrap="square" rtlCol="0" anchor="ctr"/>
+          <a:lstStyle/>
+          <a:p>
+            <a:pPr indent="0" marL="0">
+              <a:buNone/>
+            </a:pPr>
+            <a:r>
+              <a:rPr lang="en-US" sz="1200" dirty="0">
+                <a:solidFill>
+                  <a:srgbClr val="2C2C2C"/>
+                </a:solidFill>
+                <a:latin typeface="Calibri" pitchFamily="34" charset="0"/>
+                <a:ea typeface="Calibri" pitchFamily="34" charset="-122"/>
+                <a:cs typeface="Calibri" pitchFamily="34" charset="-120"/>
+              </a:rPr>
+              <a:t>Every developer wires error handling and telemetry differently. Six months later you have 5 agents with 5 different patterns that nobody can maintain consistently.</a:t>
+            </a:r>
+            <a:endParaRPr lang="en-US" sz="1200" dirty="0"/>
+          </a:p>
+        </p:txBody>
+      </p:sp>
+      <p:sp>
+        <p:nvSpPr>
+          <p:cNvPr id="14" name="Shape 12"/>
+          <p:cNvSpPr/>
+          <p:nvPr/>
+        </p:nvSpPr>
+        <p:spPr>
+          <a:xfrm>
+            <a:off x="109728" y="2615184"/>
+            <a:ext cx="11826240" cy="585216"/>
           </a:xfrm>
           <a:prstGeom prst="rect">
             <a:avLst/>
@@ -5906,78 +6954,109 @@
       </p:sp>
       <p:sp>
         <p:nvSpPr>
-          <p:cNvPr id="12" name="Shape 10"/>
-          <p:cNvSpPr/>
-          <p:nvPr/>
-        </p:nvSpPr>
-        <p:spPr>
-          <a:xfrm>
-            <a:off x="256032" y="2386584"/>
-            <a:ext cx="128016" cy="128016"/>
-          </a:xfrm>
-          <a:prstGeom prst="ellipse">
-            <a:avLst/>
-          </a:prstGeom>
-          <a:solidFill>
-            <a:srgbClr val="2E75B6"/>
-          </a:solidFill>
-          <a:ln w="12700">
-            <a:solidFill>
-              <a:srgbClr val="2E75B6"/>
-            </a:solidFill>
-            <a:prstDash val="solid"/>
-          </a:ln>
-        </p:spPr>
-      </p:sp>
-      <p:sp>
-        <p:nvSpPr>
-          <p:cNvPr id="13" name="Text 11"/>
-          <p:cNvSpPr/>
-          <p:nvPr/>
-        </p:nvSpPr>
-        <p:spPr>
-          <a:xfrm>
-            <a:off x="475488" y="2203704"/>
-            <a:ext cx="10485120" cy="493776"/>
-          </a:xfrm>
-          <a:prstGeom prst="rect">
-            <a:avLst/>
-          </a:prstGeom>
-          <a:noFill/>
-          <a:ln/>
-        </p:spPr>
-        <p:txBody>
-          <a:bodyPr wrap="square" rtlCol="0" anchor="ctr"/>
-          <a:lstStyle/>
-          <a:p>
-            <a:pPr indent="0" marL="0">
-              <a:buNone/>
-            </a:pPr>
-            <a:r>
-              <a:rPr lang="en-US" sz="1400" dirty="0">
-                <a:solidFill>
-                  <a:srgbClr val="2C2C2C"/>
+          <p:cNvPr id="15" name="Text 13"/>
+          <p:cNvSpPr/>
+          <p:nvPr/>
+        </p:nvSpPr>
+        <p:spPr>
+          <a:xfrm>
+            <a:off x="201168" y="2615184"/>
+            <a:ext cx="1920240" cy="585216"/>
+          </a:xfrm>
+          <a:prstGeom prst="rect">
+            <a:avLst/>
+          </a:prstGeom>
+          <a:noFill/>
+          <a:ln/>
+        </p:spPr>
+        <p:txBody>
+          <a:bodyPr wrap="square" rtlCol="0" anchor="ctr"/>
+          <a:lstStyle/>
+          <a:p>
+            <a:pPr indent="0" marL="0">
+              <a:buNone/>
+            </a:pPr>
+            <a:r>
+              <a:rPr lang="en-US" sz="1200" b="1" dirty="0">
+                <a:solidFill>
+                  <a:srgbClr val="1F3864"/>
                 </a:solidFill>
                 <a:latin typeface="Calibri" pitchFamily="34" charset="0"/>
                 <a:ea typeface="Calibri" pitchFamily="34" charset="-122"/>
                 <a:cs typeface="Calibri" pitchFamily="34" charset="-120"/>
               </a:rPr>
-              <a:t>Result: inconsistent quality across projects, 2–3 days of repetitive setup per engagement</a:t>
-            </a:r>
-            <a:endParaRPr lang="en-US" sz="1400" dirty="0"/>
-          </a:p>
-        </p:txBody>
-      </p:sp>
-      <p:sp>
-        <p:nvSpPr>
-          <p:cNvPr id="14" name="Shape 12"/>
-          <p:cNvSpPr/>
-          <p:nvPr/>
-        </p:nvSpPr>
-        <p:spPr>
-          <a:xfrm>
-            <a:off x="109728" y="2734056"/>
-            <a:ext cx="11826240" cy="493776"/>
+              <a:t>Multiple</a:t>
+            </a:r>
+            <a:endParaRPr lang="en-US" sz="1200" dirty="0"/>
+          </a:p>
+          <a:p>
+            <a:pPr indent="0" marL="0">
+              <a:buNone/>
+            </a:pPr>
+            <a:r>
+              <a:rPr lang="en-US" sz="1200" b="1" dirty="0">
+                <a:solidFill>
+                  <a:srgbClr val="1F3864"/>
+                </a:solidFill>
+                <a:latin typeface="Calibri" pitchFamily="34" charset="0"/>
+                <a:ea typeface="Calibri" pitchFamily="34" charset="-122"/>
+                <a:cs typeface="Calibri" pitchFamily="34" charset="-120"/>
+              </a:rPr>
+              <a:t>environments</a:t>
+            </a:r>
+            <a:endParaRPr lang="en-US" sz="1200" dirty="0"/>
+          </a:p>
+        </p:txBody>
+      </p:sp>
+      <p:sp>
+        <p:nvSpPr>
+          <p:cNvPr id="16" name="Text 14"/>
+          <p:cNvSpPr/>
+          <p:nvPr/>
+        </p:nvSpPr>
+        <p:spPr>
+          <a:xfrm>
+            <a:off x="2194560" y="2615184"/>
+            <a:ext cx="6400800" cy="585216"/>
+          </a:xfrm>
+          <a:prstGeom prst="rect">
+            <a:avLst/>
+          </a:prstGeom>
+          <a:noFill/>
+          <a:ln/>
+        </p:spPr>
+        <p:txBody>
+          <a:bodyPr wrap="square" rtlCol="0" anchor="ctr"/>
+          <a:lstStyle/>
+          <a:p>
+            <a:pPr indent="0" marL="0">
+              <a:buNone/>
+            </a:pPr>
+            <a:r>
+              <a:rPr lang="en-US" sz="1200" dirty="0">
+                <a:solidFill>
+                  <a:srgbClr val="2C2C2C"/>
+                </a:solidFill>
+                <a:latin typeface="Calibri" pitchFamily="34" charset="0"/>
+                <a:ea typeface="Calibri" pitchFamily="34" charset="-122"/>
+                <a:cs typeface="Calibri" pitchFamily="34" charset="-120"/>
+              </a:rPr>
+              <a:t>The UI has no Dev → UAT → Prod promotion. Every release is a manual republish and reconfigure. No audit trail, no rollback.</a:t>
+            </a:r>
+            <a:endParaRPr lang="en-US" sz="1200" dirty="0"/>
+          </a:p>
+        </p:txBody>
+      </p:sp>
+      <p:sp>
+        <p:nvSpPr>
+          <p:cNvPr id="17" name="Shape 15"/>
+          <p:cNvSpPr/>
+          <p:nvPr/>
+        </p:nvSpPr>
+        <p:spPr>
+          <a:xfrm>
+            <a:off x="109728" y="3236976"/>
+            <a:ext cx="11826240" cy="585216"/>
           </a:xfrm>
           <a:prstGeom prst="rect">
             <a:avLst/>
@@ -5995,24 +7074,119 @@
       </p:sp>
       <p:sp>
         <p:nvSpPr>
-          <p:cNvPr id="15" name="Shape 13"/>
-          <p:cNvSpPr/>
-          <p:nvPr/>
-        </p:nvSpPr>
-        <p:spPr>
-          <a:xfrm>
-            <a:off x="256032" y="2916936"/>
-            <a:ext cx="128016" cy="128016"/>
-          </a:xfrm>
-          <a:prstGeom prst="ellipse">
-            <a:avLst/>
-          </a:prstGeom>
-          <a:solidFill>
-            <a:srgbClr val="2E75B6"/>
+          <p:cNvPr id="18" name="Text 16"/>
+          <p:cNvSpPr/>
+          <p:nvPr/>
+        </p:nvSpPr>
+        <p:spPr>
+          <a:xfrm>
+            <a:off x="201168" y="3236976"/>
+            <a:ext cx="1920240" cy="585216"/>
+          </a:xfrm>
+          <a:prstGeom prst="rect">
+            <a:avLst/>
+          </a:prstGeom>
+          <a:noFill/>
+          <a:ln/>
+        </p:spPr>
+        <p:txBody>
+          <a:bodyPr wrap="square" rtlCol="0" anchor="ctr"/>
+          <a:lstStyle/>
+          <a:p>
+            <a:pPr indent="0" marL="0">
+              <a:buNone/>
+            </a:pPr>
+            <a:r>
+              <a:rPr lang="en-US" sz="1200" b="1" dirty="0">
+                <a:solidFill>
+                  <a:srgbClr val="1F3864"/>
+                </a:solidFill>
+                <a:latin typeface="Calibri" pitchFamily="34" charset="0"/>
+                <a:ea typeface="Calibri" pitchFamily="34" charset="-122"/>
+                <a:cs typeface="Calibri" pitchFamily="34" charset="-120"/>
+              </a:rPr>
+              <a:t>Production</a:t>
+            </a:r>
+            <a:endParaRPr lang="en-US" sz="1200" dirty="0"/>
+          </a:p>
+          <a:p>
+            <a:pPr indent="0" marL="0">
+              <a:buNone/>
+            </a:pPr>
+            <a:r>
+              <a:rPr lang="en-US" sz="1200" b="1" dirty="0">
+                <a:solidFill>
+                  <a:srgbClr val="1F3864"/>
+                </a:solidFill>
+                <a:latin typeface="Calibri" pitchFamily="34" charset="0"/>
+                <a:ea typeface="Calibri" pitchFamily="34" charset="-122"/>
+                <a:cs typeface="Calibri" pitchFamily="34" charset="-120"/>
+              </a:rPr>
+              <a:t>monitoring</a:t>
+            </a:r>
+            <a:endParaRPr lang="en-US" sz="1200" dirty="0"/>
+          </a:p>
+        </p:txBody>
+      </p:sp>
+      <p:sp>
+        <p:nvSpPr>
+          <p:cNvPr id="19" name="Text 17"/>
+          <p:cNvSpPr/>
+          <p:nvPr/>
+        </p:nvSpPr>
+        <p:spPr>
+          <a:xfrm>
+            <a:off x="2194560" y="3236976"/>
+            <a:ext cx="6400800" cy="585216"/>
+          </a:xfrm>
+          <a:prstGeom prst="rect">
+            <a:avLst/>
+          </a:prstGeom>
+          <a:noFill/>
+          <a:ln/>
+        </p:spPr>
+        <p:txBody>
+          <a:bodyPr wrap="square" rtlCol="0" anchor="ctr"/>
+          <a:lstStyle/>
+          <a:p>
+            <a:pPr indent="0" marL="0">
+              <a:buNone/>
+            </a:pPr>
+            <a:r>
+              <a:rPr lang="en-US" sz="1200" dirty="0">
+                <a:solidFill>
+                  <a:srgbClr val="2C2C2C"/>
+                </a:solidFill>
+                <a:latin typeface="Calibri" pitchFamily="34" charset="0"/>
+                <a:ea typeface="Calibri" pitchFamily="34" charset="-122"/>
+                <a:cs typeface="Calibri" pitchFamily="34" charset="-120"/>
+              </a:rPr>
+              <a:t>The default topics emit no telemetry. You have zero visibility into fallback rate, escalation triggers, or error frequency once the agent is live.</a:t>
+            </a:r>
+            <a:endParaRPr lang="en-US" sz="1200" dirty="0"/>
+          </a:p>
+        </p:txBody>
+      </p:sp>
+      <p:sp>
+        <p:nvSpPr>
+          <p:cNvPr id="20" name="Shape 18"/>
+          <p:cNvSpPr/>
+          <p:nvPr/>
+        </p:nvSpPr>
+        <p:spPr>
+          <a:xfrm>
+            <a:off x="109728" y="3858768"/>
+            <a:ext cx="11826240" cy="585216"/>
+          </a:xfrm>
+          <a:prstGeom prst="rect">
+            <a:avLst/>
+          </a:prstGeom>
+          <a:solidFill>
+            <a:srgbClr val="F2F2F2"/>
           </a:solidFill>
           <a:ln w="12700">
             <a:solidFill>
-              <a:srgbClr val="2E75B6"/>
+              <a:srgbClr val="F2F2F2"/>
             </a:solidFill>
             <a:prstDash val="solid"/>
           </a:ln>
@@ -6020,40 +7194,216 @@
       </p:sp>
       <p:sp>
         <p:nvSpPr>
-          <p:cNvPr id="16" name="Text 14"/>
-          <p:cNvSpPr/>
-          <p:nvPr/>
-        </p:nvSpPr>
-        <p:spPr>
-          <a:xfrm>
-            <a:off x="475488" y="2734056"/>
-            <a:ext cx="10485120" cy="493776"/>
-          </a:xfrm>
-          <a:prstGeom prst="rect">
-            <a:avLst/>
-          </a:prstGeom>
-          <a:noFill/>
-          <a:ln/>
-        </p:spPr>
-        <p:txBody>
-          <a:bodyPr wrap="square" rtlCol="0" anchor="ctr"/>
-          <a:lstStyle/>
-          <a:p>
-            <a:pPr indent="0" marL="0">
-              <a:buNone/>
-            </a:pPr>
-            <a:r>
-              <a:rPr lang="en-US" sz="1400" dirty="0">
-                <a:solidFill>
-                  <a:srgbClr val="2C2C2C"/>
+          <p:cNvPr id="21" name="Text 19"/>
+          <p:cNvSpPr/>
+          <p:nvPr/>
+        </p:nvSpPr>
+        <p:spPr>
+          <a:xfrm>
+            <a:off x="201168" y="3858768"/>
+            <a:ext cx="1920240" cy="585216"/>
+          </a:xfrm>
+          <a:prstGeom prst="rect">
+            <a:avLst/>
+          </a:prstGeom>
+          <a:noFill/>
+          <a:ln/>
+        </p:spPr>
+        <p:txBody>
+          <a:bodyPr wrap="square" rtlCol="0" anchor="ctr"/>
+          <a:lstStyle/>
+          <a:p>
+            <a:pPr indent="0" marL="0">
+              <a:buNone/>
+            </a:pPr>
+            <a:r>
+              <a:rPr lang="en-US" sz="1200" b="1" dirty="0">
+                <a:solidFill>
+                  <a:srgbClr val="1F3864"/>
                 </a:solidFill>
                 <a:latin typeface="Calibri" pitchFamily="34" charset="0"/>
                 <a:ea typeface="Calibri" pitchFamily="34" charset="-122"/>
                 <a:cs typeface="Calibri" pitchFamily="34" charset="-120"/>
               </a:rPr>
-              <a:t>Engineers still configure placeholders and understand the YAML  —  this is a starting point, not a wizard</a:t>
-            </a:r>
-            <a:endParaRPr lang="en-US" sz="1400" dirty="0"/>
+              <a:t>More than</a:t>
+            </a:r>
+            <a:endParaRPr lang="en-US" sz="1200" dirty="0"/>
+          </a:p>
+          <a:p>
+            <a:pPr indent="0" marL="0">
+              <a:buNone/>
+            </a:pPr>
+            <a:r>
+              <a:rPr lang="en-US" sz="1200" b="1" dirty="0">
+                <a:solidFill>
+                  <a:srgbClr val="1F3864"/>
+                </a:solidFill>
+                <a:latin typeface="Calibri" pitchFamily="34" charset="0"/>
+                <a:ea typeface="Calibri" pitchFamily="34" charset="-122"/>
+                <a:cs typeface="Calibri" pitchFamily="34" charset="-120"/>
+              </a:rPr>
+              <a:t>one agent project</a:t>
+            </a:r>
+            <a:endParaRPr lang="en-US" sz="1200" dirty="0"/>
+          </a:p>
+        </p:txBody>
+      </p:sp>
+      <p:sp>
+        <p:nvSpPr>
+          <p:cNvPr id="22" name="Text 20"/>
+          <p:cNvSpPr/>
+          <p:nvPr/>
+        </p:nvSpPr>
+        <p:spPr>
+          <a:xfrm>
+            <a:off x="2194560" y="3858768"/>
+            <a:ext cx="6400800" cy="585216"/>
+          </a:xfrm>
+          <a:prstGeom prst="rect">
+            <a:avLst/>
+          </a:prstGeom>
+          <a:noFill/>
+          <a:ln/>
+        </p:spPr>
+        <p:txBody>
+          <a:bodyPr wrap="square" rtlCol="0" anchor="ctr"/>
+          <a:lstStyle/>
+          <a:p>
+            <a:pPr indent="0" marL="0">
+              <a:buNone/>
+            </a:pPr>
+            <a:r>
+              <a:rPr lang="en-US" sz="1200" dirty="0">
+                <a:solidFill>
+                  <a:srgbClr val="2C2C2C"/>
+                </a:solidFill>
+                <a:latin typeface="Calibri" pitchFamily="34" charset="0"/>
+                <a:ea typeface="Calibri" pitchFamily="34" charset="-122"/>
+                <a:cs typeface="Calibri" pitchFamily="34" charset="-120"/>
+              </a:rPr>
+              <a:t>The second agent, you rebuild the same retry logic, the same CI/CD pipeline, the same UAT test plan. Templates mean you do it once.</a:t>
+            </a:r>
+            <a:endParaRPr lang="en-US" sz="1200" dirty="0"/>
+          </a:p>
+        </p:txBody>
+      </p:sp>
+      <p:sp>
+        <p:nvSpPr>
+          <p:cNvPr id="23" name="Shape 21"/>
+          <p:cNvSpPr/>
+          <p:nvPr/>
+        </p:nvSpPr>
+        <p:spPr>
+          <a:xfrm>
+            <a:off x="109728" y="4480560"/>
+            <a:ext cx="11826240" cy="585216"/>
+          </a:xfrm>
+          <a:prstGeom prst="rect">
+            <a:avLst/>
+          </a:prstGeom>
+          <a:solidFill>
+            <a:srgbClr val="FFFFFF"/>
+          </a:solidFill>
+          <a:ln w="12700">
+            <a:solidFill>
+              <a:srgbClr val="FFFFFF"/>
+            </a:solidFill>
+            <a:prstDash val="solid"/>
+          </a:ln>
+        </p:spPr>
+      </p:sp>
+      <p:sp>
+        <p:nvSpPr>
+          <p:cNvPr id="24" name="Text 22"/>
+          <p:cNvSpPr/>
+          <p:nvPr/>
+        </p:nvSpPr>
+        <p:spPr>
+          <a:xfrm>
+            <a:off x="201168" y="4480560"/>
+            <a:ext cx="1920240" cy="585216"/>
+          </a:xfrm>
+          <a:prstGeom prst="rect">
+            <a:avLst/>
+          </a:prstGeom>
+          <a:noFill/>
+          <a:ln/>
+        </p:spPr>
+        <p:txBody>
+          <a:bodyPr wrap="square" rtlCol="0" anchor="ctr"/>
+          <a:lstStyle/>
+          <a:p>
+            <a:pPr indent="0" marL="0">
+              <a:buNone/>
+            </a:pPr>
+            <a:r>
+              <a:rPr lang="en-US" sz="1200" b="1" dirty="0">
+                <a:solidFill>
+                  <a:srgbClr val="1F3864"/>
+                </a:solidFill>
+                <a:latin typeface="Calibri" pitchFamily="34" charset="0"/>
+                <a:ea typeface="Calibri" pitchFamily="34" charset="-122"/>
+                <a:cs typeface="Calibri" pitchFamily="34" charset="-120"/>
+              </a:rPr>
+              <a:t>Onboarding a</a:t>
+            </a:r>
+            <a:endParaRPr lang="en-US" sz="1200" dirty="0"/>
+          </a:p>
+          <a:p>
+            <a:pPr indent="0" marL="0">
+              <a:buNone/>
+            </a:pPr>
+            <a:r>
+              <a:rPr lang="en-US" sz="1200" b="1" dirty="0">
+                <a:solidFill>
+                  <a:srgbClr val="1F3864"/>
+                </a:solidFill>
+                <a:latin typeface="Calibri" pitchFamily="34" charset="0"/>
+                <a:ea typeface="Calibri" pitchFamily="34" charset="-122"/>
+                <a:cs typeface="Calibri" pitchFamily="34" charset="-120"/>
+              </a:rPr>
+              <a:t>new team member</a:t>
+            </a:r>
+            <a:endParaRPr lang="en-US" sz="1200" dirty="0"/>
+          </a:p>
+        </p:txBody>
+      </p:sp>
+      <p:sp>
+        <p:nvSpPr>
+          <p:cNvPr id="25" name="Text 23"/>
+          <p:cNvSpPr/>
+          <p:nvPr/>
+        </p:nvSpPr>
+        <p:spPr>
+          <a:xfrm>
+            <a:off x="2194560" y="4480560"/>
+            <a:ext cx="6400800" cy="585216"/>
+          </a:xfrm>
+          <a:prstGeom prst="rect">
+            <a:avLst/>
+          </a:prstGeom>
+          <a:noFill/>
+          <a:ln/>
+        </p:spPr>
+        <p:txBody>
+          <a:bodyPr wrap="square" rtlCol="0" anchor="ctr"/>
+          <a:lstStyle/>
+          <a:p>
+            <a:pPr indent="0" marL="0">
+              <a:buNone/>
+            </a:pPr>
+            <a:r>
+              <a:rPr lang="en-US" sz="1200" dirty="0">
+                <a:solidFill>
+                  <a:srgbClr val="2C2C2C"/>
+                </a:solidFill>
+                <a:latin typeface="Calibri" pitchFamily="34" charset="0"/>
+                <a:ea typeface="Calibri" pitchFamily="34" charset="-122"/>
+                <a:cs typeface="Calibri" pitchFamily="34" charset="-120"/>
+              </a:rPr>
+              <a:t>Without templates, new developers learn by reading whatever the last person wrote — which varies. Templates give everyone the same starting point.</a:t>
+            </a:r>
+            <a:endParaRPr lang="en-US" sz="1200" dirty="0"/>
           </a:p>
         </p:txBody>
       </p:sp>
@@ -6162,7 +7512,7 @@
                 <a:ea typeface="Calibri Light" pitchFamily="34" charset="-122"/>
                 <a:cs typeface="Calibri Light" pitchFamily="34" charset="-120"/>
               </a:rPr>
-              <a:t>What the Repo Fixes  —  Before vs After</a:t>
+              <a:t>The One-Line Answer</a:t>
             </a:r>
             <a:endParaRPr lang="en-US" sz="2400" dirty="0"/>
           </a:p>
@@ -6177,7 +7527,7 @@
         <p:spPr>
           <a:xfrm>
             <a:off x="109728" y="1143000"/>
-            <a:ext cx="11826240" cy="493776"/>
+            <a:ext cx="11826240" cy="877824"/>
           </a:xfrm>
           <a:prstGeom prst="rect">
             <a:avLst/>
@@ -6201,7 +7551,7 @@
         </p:nvSpPr>
         <p:spPr>
           <a:xfrm>
-            <a:off x="256032" y="1325880"/>
+            <a:off x="256032" y="1517904"/>
             <a:ext cx="128016" cy="128016"/>
           </a:xfrm>
           <a:prstGeom prst="ellipse">
@@ -6227,23 +7577,23 @@
         <p:spPr>
           <a:xfrm>
             <a:off x="475488" y="1143000"/>
-            <a:ext cx="10485120" cy="493776"/>
-          </a:xfrm>
-          <a:prstGeom prst="rect">
-            <a:avLst/>
-          </a:prstGeom>
-          <a:noFill/>
-          <a:ln/>
-        </p:spPr>
-        <p:txBody>
-          <a:bodyPr wrap="square" rtlCol="0" anchor="ctr"/>
-          <a:lstStyle/>
-          <a:p>
-            <a:pPr indent="0" marL="0">
-              <a:buNone/>
-            </a:pPr>
-            <a:r>
-              <a:rPr lang="en-US" sz="1300" dirty="0">
+            <a:ext cx="10485120" cy="877824"/>
+          </a:xfrm>
+          <a:prstGeom prst="rect">
+            <a:avLst/>
+          </a:prstGeom>
+          <a:noFill/>
+          <a:ln/>
+        </p:spPr>
+        <p:txBody>
+          <a:bodyPr wrap="square" rtlCol="0" anchor="ctr"/>
+          <a:lstStyle/>
+          <a:p>
+            <a:pPr indent="0" marL="0">
+              <a:buNone/>
+            </a:pPr>
+            <a:r>
+              <a:rPr lang="en-US" sz="1500" dirty="0">
                 <a:solidFill>
                   <a:srgbClr val="2C2C2C"/>
                 </a:solidFill>
@@ -6251,9 +7601,9 @@
                 <a:ea typeface="Calibri" pitchFamily="34" charset="-122"/>
                 <a:cs typeface="Calibri" pitchFamily="34" charset="-120"/>
               </a:rPr>
-              <a:t>BEFORE: Write Greeting/Fallback/OnError/OutOfScope manually   ▶   AFTER: Copy base/  —  telemetry and retry built in</a:t>
-            </a:r>
-            <a:endParaRPr lang="en-US" sz="1300" dirty="0"/>
+              <a:t>"The UI builds a working agent.  Templates build an agent a team can maintain, monitor, and deploy consistently."</a:t>
+            </a:r>
+            <a:endParaRPr lang="en-US" sz="1500" dirty="0"/>
           </a:p>
         </p:txBody>
       </p:sp>
@@ -6265,8 +7615,8 @@
         </p:nvSpPr>
         <p:spPr>
           <a:xfrm>
-            <a:off x="109728" y="1673352"/>
-            <a:ext cx="11826240" cy="493776"/>
+            <a:off x="109728" y="2057400"/>
+            <a:ext cx="11826240" cy="877824"/>
           </a:xfrm>
           <a:prstGeom prst="rect">
             <a:avLst/>
@@ -6290,7 +7640,7 @@
         </p:nvSpPr>
         <p:spPr>
           <a:xfrm>
-            <a:off x="256032" y="1856232"/>
+            <a:off x="256032" y="2432304"/>
             <a:ext cx="128016" cy="128016"/>
           </a:xfrm>
           <a:prstGeom prst="ellipse">
@@ -6315,24 +7665,24 @@
         </p:nvSpPr>
         <p:spPr>
           <a:xfrm>
-            <a:off x="475488" y="1673352"/>
-            <a:ext cx="10485120" cy="493776"/>
-          </a:xfrm>
-          <a:prstGeom prst="rect">
-            <a:avLst/>
-          </a:prstGeom>
-          <a:noFill/>
-          <a:ln/>
-        </p:spPr>
-        <p:txBody>
-          <a:bodyPr wrap="square" rtlCol="0" anchor="ctr"/>
-          <a:lstStyle/>
-          <a:p>
-            <a:pPr indent="0" marL="0">
-              <a:buNone/>
-            </a:pPr>
-            <a:r>
-              <a:rPr lang="en-US" sz="1300" dirty="0">
+            <a:off x="475488" y="2057400"/>
+            <a:ext cx="10485120" cy="877824"/>
+          </a:xfrm>
+          <a:prstGeom prst="rect">
+            <a:avLst/>
+          </a:prstGeom>
+          <a:noFill/>
+          <a:ln/>
+        </p:spPr>
+        <p:txBody>
+          <a:bodyPr wrap="square" rtlCol="0" anchor="ctr"/>
+          <a:lstStyle/>
+          <a:p>
+            <a:pPr indent="0" marL="0">
+              <a:buNone/>
+            </a:pPr>
+            <a:r>
+              <a:rPr lang="en-US" sz="1500" dirty="0">
                 <a:solidFill>
                   <a:srgbClr val="2C2C2C"/>
                 </a:solidFill>
@@ -6340,9 +7690,9 @@
                 <a:ea typeface="Calibri" pitchFamily="34" charset="-122"/>
                 <a:cs typeface="Calibri" pitchFamily="34" charset="-120"/>
               </a:rPr>
-              <a:t>BEFORE: Figure out knowledge source YAML each time              ▶   AFTER: Copy components/knowledge/  —  fill in your URL</a:t>
-            </a:r>
-            <a:endParaRPr lang="en-US" sz="1300" dirty="0"/>
+              <a:t>Working agent   =   right responses, correct topics, knowledge connected</a:t>
+            </a:r>
+            <a:endParaRPr lang="en-US" sz="1500" dirty="0"/>
           </a:p>
         </p:txBody>
       </p:sp>
@@ -6354,8 +7704,8 @@
         </p:nvSpPr>
         <p:spPr>
           <a:xfrm>
-            <a:off x="109728" y="2203704"/>
-            <a:ext cx="11826240" cy="493776"/>
+            <a:off x="109728" y="2971800"/>
+            <a:ext cx="11826240" cy="877824"/>
           </a:xfrm>
           <a:prstGeom prst="rect">
             <a:avLst/>
@@ -6379,7 +7729,7 @@
         </p:nvSpPr>
         <p:spPr>
           <a:xfrm>
-            <a:off x="256032" y="2386584"/>
+            <a:off x="256032" y="3346704"/>
             <a:ext cx="128016" cy="128016"/>
           </a:xfrm>
           <a:prstGeom prst="ellipse">
@@ -6404,24 +7754,24 @@
         </p:nvSpPr>
         <p:spPr>
           <a:xfrm>
-            <a:off x="475488" y="2203704"/>
-            <a:ext cx="10485120" cy="493776"/>
-          </a:xfrm>
-          <a:prstGeom prst="rect">
-            <a:avLst/>
-          </a:prstGeom>
-          <a:noFill/>
-          <a:ln/>
-        </p:spPr>
-        <p:txBody>
-          <a:bodyPr wrap="square" rtlCol="0" anchor="ctr"/>
-          <a:lstStyle/>
-          <a:p>
-            <a:pPr indent="0" marL="0">
-              <a:buNone/>
-            </a:pPr>
-            <a:r>
-              <a:rPr lang="en-US" sz="1300" dirty="0">
+            <a:off x="475488" y="2971800"/>
+            <a:ext cx="10485120" cy="877824"/>
+          </a:xfrm>
+          <a:prstGeom prst="rect">
+            <a:avLst/>
+          </a:prstGeom>
+          <a:noFill/>
+          <a:ln/>
+        </p:spPr>
+        <p:txBody>
+          <a:bodyPr wrap="square" rtlCol="0" anchor="ctr"/>
+          <a:lstStyle/>
+          <a:p>
+            <a:pPr indent="0" marL="0">
+              <a:buNone/>
+            </a:pPr>
+            <a:r>
+              <a:rPr lang="en-US" sz="1500" dirty="0">
                 <a:solidFill>
                   <a:srgbClr val="2C2C2C"/>
                 </a:solidFill>
@@ -6429,9 +7779,9 @@
                 <a:ea typeface="Calibri" pitchFamily="34" charset="-122"/>
                 <a:cs typeface="Calibri" pitchFamily="34" charset="-120"/>
               </a:rPr>
-              <a:t>BEFORE: Build CI/CD pipeline per project                              ▶   AFTER: Copy ci-cd/  —  Dev to UAT to Prod already wired</a:t>
-            </a:r>
-            <a:endParaRPr lang="en-US" sz="1300" dirty="0"/>
+              <a:t>Production agent  =   telemetry to monitor it, CI/CD to deploy it, consistent patterns across the team, governance docs to sign it off</a:t>
+            </a:r>
+            <a:endParaRPr lang="en-US" sz="1500" dirty="0"/>
           </a:p>
         </p:txBody>
       </p:sp>
@@ -6443,8 +7793,8 @@
         </p:nvSpPr>
         <p:spPr>
           <a:xfrm>
-            <a:off x="109728" y="2734056"/>
-            <a:ext cx="11826240" cy="493776"/>
+            <a:off x="109728" y="3886200"/>
+            <a:ext cx="11826240" cy="877824"/>
           </a:xfrm>
           <a:prstGeom prst="rect">
             <a:avLst/>
@@ -6468,7 +7818,7 @@
         </p:nvSpPr>
         <p:spPr>
           <a:xfrm>
-            <a:off x="256032" y="2916936"/>
+            <a:off x="256032" y="4261104"/>
             <a:ext cx="128016" cy="128016"/>
           </a:xfrm>
           <a:prstGeom prst="ellipse">
@@ -6493,24 +7843,24 @@
         </p:nvSpPr>
         <p:spPr>
           <a:xfrm>
-            <a:off x="475488" y="2734056"/>
-            <a:ext cx="10485120" cy="493776"/>
-          </a:xfrm>
-          <a:prstGeom prst="rect">
-            <a:avLst/>
-          </a:prstGeom>
-          <a:noFill/>
-          <a:ln/>
-        </p:spPr>
-        <p:txBody>
-          <a:bodyPr wrap="square" rtlCol="0" anchor="ctr"/>
-          <a:lstStyle/>
-          <a:p>
-            <a:pPr indent="0" marL="0">
-              <a:buNone/>
-            </a:pPr>
-            <a:r>
-              <a:rPr lang="en-US" sz="1300" dirty="0">
+            <a:off x="475488" y="3886200"/>
+            <a:ext cx="10485120" cy="877824"/>
+          </a:xfrm>
+          <a:prstGeom prst="rect">
+            <a:avLst/>
+          </a:prstGeom>
+          <a:noFill/>
+          <a:ln/>
+        </p:spPr>
+        <p:txBody>
+          <a:bodyPr wrap="square" rtlCol="0" anchor="ctr"/>
+          <a:lstStyle/>
+          <a:p>
+            <a:pPr indent="0" marL="0">
+              <a:buNone/>
+            </a:pPr>
+            <a:r>
+              <a:rPr lang="en-US" sz="1500" dirty="0">
                 <a:solidFill>
                   <a:srgbClr val="2C2C2C"/>
                 </a:solidFill>
@@ -6518,9 +7868,9 @@
                 <a:ea typeface="Calibri" pitchFamily="34" charset="-122"/>
                 <a:cs typeface="Calibri" pitchFamily="34" charset="-120"/>
               </a:rPr>
-              <a:t>BEFORE: Create UAT test plans each engagement                    ▶   AFTER: Open project-delivery/  —  12 artifacts ready</a:t>
-            </a:r>
-            <a:endParaRPr lang="en-US" sz="1300" dirty="0"/>
+              <a:t>These templates close the gap between the two.</a:t>
+            </a:r>
+            <a:endParaRPr lang="en-US" sz="1500" dirty="0"/>
           </a:p>
         </p:txBody>
       </p:sp>
@@ -6669,7 +8019,7 @@
                 <a:ea typeface="Calibri" pitchFamily="34" charset="-122"/>
                 <a:cs typeface="Calibri" pitchFamily="34" charset="-120"/>
               </a:rPr>
-              <a:t>Repo walkthrough in VS Code  |  8 min</a:t>
+              <a:t>Repo walkthrough: what each folder solves  |  8 min</a:t>
             </a:r>
             <a:endParaRPr lang="en-US" sz="1800" dirty="0"/>
           </a:p>
@@ -6780,7 +8130,7 @@
                 <a:ea typeface="Calibri Light" pitchFamily="34" charset="-122"/>
                 <a:cs typeface="Calibri Light" pitchFamily="34" charset="-120"/>
               </a:rPr>
-              <a:t>Repo Structure  —  What Is Where</a:t>
+              <a:t>base/  and  components/  —  What Each Folder Solves</a:t>
             </a:r>
             <a:endParaRPr lang="en-US" sz="2400" dirty="0"/>
           </a:p>
@@ -6788,14 +8138,115 @@
       </p:sp>
       <p:sp>
         <p:nvSpPr>
-          <p:cNvPr id="5" name="Shape 3"/>
-          <p:cNvSpPr/>
-          <p:nvPr/>
-        </p:nvSpPr>
-        <p:spPr>
-          <a:xfrm>
-            <a:off x="109728" y="1143000"/>
-            <a:ext cx="11826240" cy="603504"/>
+          <p:cNvPr id="5" name="Text 3"/>
+          <p:cNvSpPr/>
+          <p:nvPr/>
+        </p:nvSpPr>
+        <p:spPr>
+          <a:xfrm>
+            <a:off x="228600" y="1024128"/>
+            <a:ext cx="1828800" cy="292608"/>
+          </a:xfrm>
+          <a:prstGeom prst="rect">
+            <a:avLst/>
+          </a:prstGeom>
+          <a:noFill/>
+          <a:ln/>
+        </p:spPr>
+        <p:txBody>
+          <a:bodyPr wrap="square" rtlCol="0" anchor="ctr"/>
+          <a:lstStyle/>
+          <a:p>
+            <a:pPr indent="0" marL="0">
+              <a:buNone/>
+            </a:pPr>
+            <a:r>
+              <a:rPr lang="en-US" sz="1100" b="1" dirty="0">
+                <a:solidFill>
+                  <a:srgbClr val="666666"/>
+                </a:solidFill>
+                <a:latin typeface="Calibri" pitchFamily="34" charset="0"/>
+                <a:ea typeface="Calibri" pitchFamily="34" charset="-122"/>
+                <a:cs typeface="Calibri" pitchFamily="34" charset="-120"/>
+              </a:rPr>
+              <a:t>Folder</a:t>
+            </a:r>
+            <a:endParaRPr lang="en-US" sz="1100" dirty="0"/>
+          </a:p>
+        </p:txBody>
+      </p:sp>
+      <p:sp>
+        <p:nvSpPr>
+          <p:cNvPr id="6" name="Text 4"/>
+          <p:cNvSpPr/>
+          <p:nvPr/>
+        </p:nvSpPr>
+        <p:spPr>
+          <a:xfrm>
+            <a:off x="2194560" y="1024128"/>
+            <a:ext cx="6400800" cy="292608"/>
+          </a:xfrm>
+          <a:prstGeom prst="rect">
+            <a:avLst/>
+          </a:prstGeom>
+          <a:noFill/>
+          <a:ln/>
+        </p:spPr>
+        <p:txBody>
+          <a:bodyPr wrap="square" rtlCol="0" anchor="ctr"/>
+          <a:lstStyle/>
+          <a:p>
+            <a:pPr indent="0" marL="0">
+              <a:buNone/>
+            </a:pPr>
+            <a:r>
+              <a:rPr lang="en-US" sz="1100" b="1" dirty="0">
+                <a:solidFill>
+                  <a:srgbClr val="666666"/>
+                </a:solidFill>
+                <a:latin typeface="Calibri" pitchFamily="34" charset="0"/>
+                <a:ea typeface="Calibri" pitchFamily="34" charset="-122"/>
+                <a:cs typeface="Calibri" pitchFamily="34" charset="-120"/>
+              </a:rPr>
+              <a:t>Where it helps</a:t>
+            </a:r>
+            <a:endParaRPr lang="en-US" sz="1100" dirty="0"/>
+          </a:p>
+        </p:txBody>
+      </p:sp>
+      <p:sp>
+        <p:nvSpPr>
+          <p:cNvPr id="7" name="Shape 5"/>
+          <p:cNvSpPr/>
+          <p:nvPr/>
+        </p:nvSpPr>
+        <p:spPr>
+          <a:xfrm>
+            <a:off x="182880" y="1316736"/>
+            <a:ext cx="8595360" cy="0"/>
+          </a:xfrm>
+          <a:prstGeom prst="line">
+            <a:avLst/>
+          </a:prstGeom>
+          <a:noFill/>
+          <a:ln w="12700">
+            <a:solidFill>
+              <a:srgbClr val="CCCCCC"/>
+            </a:solidFill>
+            <a:prstDash val="solid"/>
+          </a:ln>
+        </p:spPr>
+      </p:sp>
+      <p:sp>
+        <p:nvSpPr>
+          <p:cNvPr id="8" name="Shape 6"/>
+          <p:cNvSpPr/>
+          <p:nvPr/>
+        </p:nvSpPr>
+        <p:spPr>
+          <a:xfrm>
+            <a:off x="109728" y="1371600"/>
+            <a:ext cx="11826240" cy="585216"/>
           </a:xfrm>
           <a:prstGeom prst="rect">
             <a:avLst/>
@@ -6813,78 +8264,92 @@
       </p:sp>
       <p:sp>
         <p:nvSpPr>
-          <p:cNvPr id="6" name="Shape 4"/>
-          <p:cNvSpPr/>
-          <p:nvPr/>
-        </p:nvSpPr>
-        <p:spPr>
-          <a:xfrm>
-            <a:off x="256032" y="1380744"/>
-            <a:ext cx="128016" cy="128016"/>
-          </a:xfrm>
-          <a:prstGeom prst="ellipse">
-            <a:avLst/>
-          </a:prstGeom>
-          <a:solidFill>
-            <a:srgbClr val="2E75B6"/>
-          </a:solidFill>
-          <a:ln w="12700">
-            <a:solidFill>
-              <a:srgbClr val="2E75B6"/>
-            </a:solidFill>
-            <a:prstDash val="solid"/>
-          </a:ln>
-        </p:spPr>
-      </p:sp>
-      <p:sp>
-        <p:nvSpPr>
-          <p:cNvPr id="7" name="Text 5"/>
-          <p:cNvSpPr/>
-          <p:nvPr/>
-        </p:nvSpPr>
-        <p:spPr>
-          <a:xfrm>
-            <a:off x="475488" y="1143000"/>
-            <a:ext cx="10485120" cy="603504"/>
-          </a:xfrm>
-          <a:prstGeom prst="rect">
-            <a:avLst/>
-          </a:prstGeom>
-          <a:noFill/>
-          <a:ln/>
-        </p:spPr>
-        <p:txBody>
-          <a:bodyPr wrap="square" rtlCol="0" anchor="ctr"/>
-          <a:lstStyle/>
-          <a:p>
-            <a:pPr indent="0" marL="0">
-              <a:buNone/>
-            </a:pPr>
-            <a:r>
-              <a:rPr lang="en-US" sz="1300" dirty="0">
-                <a:solidFill>
-                  <a:srgbClr val="2C2C2C"/>
+          <p:cNvPr id="9" name="Text 7"/>
+          <p:cNvSpPr/>
+          <p:nvPr/>
+        </p:nvSpPr>
+        <p:spPr>
+          <a:xfrm>
+            <a:off x="201168" y="1371600"/>
+            <a:ext cx="1920240" cy="585216"/>
+          </a:xfrm>
+          <a:prstGeom prst="rect">
+            <a:avLst/>
+          </a:prstGeom>
+          <a:noFill/>
+          <a:ln/>
+        </p:spPr>
+        <p:txBody>
+          <a:bodyPr wrap="square" rtlCol="0" anchor="ctr"/>
+          <a:lstStyle/>
+          <a:p>
+            <a:pPr indent="0" marL="0">
+              <a:buNone/>
+            </a:pPr>
+            <a:r>
+              <a:rPr lang="en-US" sz="1200" b="1" dirty="0">
+                <a:solidFill>
+                  <a:srgbClr val="1F3864"/>
                 </a:solidFill>
                 <a:latin typeface="Calibri" pitchFamily="34" charset="0"/>
                 <a:ea typeface="Calibri" pitchFamily="34" charset="-122"/>
                 <a:cs typeface="Calibri" pitchFamily="34" charset="-120"/>
               </a:rPr>
-              <a:t>base/              5 files every agent starts from: agent.mcs.yml, settings.mcs.yml, Greeting, Fallback, OnError, OutOfScope</a:t>
-            </a:r>
-            <a:endParaRPr lang="en-US" sz="1300" dirty="0"/>
-          </a:p>
-        </p:txBody>
-      </p:sp>
-      <p:sp>
-        <p:nvSpPr>
-          <p:cNvPr id="8" name="Shape 6"/>
-          <p:cNvSpPr/>
-          <p:nvPr/>
-        </p:nvSpPr>
-        <p:spPr>
-          <a:xfrm>
-            <a:off x="109728" y="1783080"/>
-            <a:ext cx="11826240" cy="603504"/>
+              <a:t>base/</a:t>
+            </a:r>
+            <a:endParaRPr lang="en-US" sz="1200" dirty="0"/>
+          </a:p>
+        </p:txBody>
+      </p:sp>
+      <p:sp>
+        <p:nvSpPr>
+          <p:cNvPr id="10" name="Text 8"/>
+          <p:cNvSpPr/>
+          <p:nvPr/>
+        </p:nvSpPr>
+        <p:spPr>
+          <a:xfrm>
+            <a:off x="2194560" y="1371600"/>
+            <a:ext cx="6400800" cy="585216"/>
+          </a:xfrm>
+          <a:prstGeom prst="rect">
+            <a:avLst/>
+          </a:prstGeom>
+          <a:noFill/>
+          <a:ln/>
+        </p:spPr>
+        <p:txBody>
+          <a:bodyPr wrap="square" rtlCol="0" anchor="ctr"/>
+          <a:lstStyle/>
+          <a:p>
+            <a:pPr indent="0" marL="0">
+              <a:buNone/>
+            </a:pPr>
+            <a:r>
+              <a:rPr lang="en-US" sz="1200" dirty="0">
+                <a:solidFill>
+                  <a:srgbClr val="2C2C2C"/>
+                </a:solidFill>
+                <a:latin typeface="Calibri" pitchFamily="34" charset="0"/>
+                <a:ea typeface="Calibri" pitchFamily="34" charset="-122"/>
+                <a:cs typeface="Calibri" pitchFamily="34" charset="-120"/>
+              </a:rPr>
+              <a:t>5 files every agent starts from. Replaces minimal UI defaults with: 3-retry fallback, structured telemetry events, test-vs-production error handling, OutOfScope (not created by UI at all).</a:t>
+            </a:r>
+            <a:endParaRPr lang="en-US" sz="1200" dirty="0"/>
+          </a:p>
+        </p:txBody>
+      </p:sp>
+      <p:sp>
+        <p:nvSpPr>
+          <p:cNvPr id="11" name="Shape 9"/>
+          <p:cNvSpPr/>
+          <p:nvPr/>
+        </p:nvSpPr>
+        <p:spPr>
+          <a:xfrm>
+            <a:off x="109728" y="1993392"/>
+            <a:ext cx="11826240" cy="585216"/>
           </a:xfrm>
           <a:prstGeom prst="rect">
             <a:avLst/>
@@ -6902,78 +8367,109 @@
       </p:sp>
       <p:sp>
         <p:nvSpPr>
-          <p:cNvPr id="9" name="Shape 7"/>
-          <p:cNvSpPr/>
-          <p:nvPr/>
-        </p:nvSpPr>
-        <p:spPr>
-          <a:xfrm>
-            <a:off x="256032" y="2020824"/>
-            <a:ext cx="128016" cy="128016"/>
-          </a:xfrm>
-          <a:prstGeom prst="ellipse">
-            <a:avLst/>
-          </a:prstGeom>
-          <a:solidFill>
-            <a:srgbClr val="2E75B6"/>
-          </a:solidFill>
-          <a:ln w="12700">
-            <a:solidFill>
-              <a:srgbClr val="2E75B6"/>
-            </a:solidFill>
-            <a:prstDash val="solid"/>
-          </a:ln>
-        </p:spPr>
-      </p:sp>
-      <p:sp>
-        <p:nvSpPr>
-          <p:cNvPr id="10" name="Text 8"/>
-          <p:cNvSpPr/>
-          <p:nvPr/>
-        </p:nvSpPr>
-        <p:spPr>
-          <a:xfrm>
-            <a:off x="475488" y="1783080"/>
-            <a:ext cx="10485120" cy="603504"/>
-          </a:xfrm>
-          <a:prstGeom prst="rect">
-            <a:avLst/>
-          </a:prstGeom>
-          <a:noFill/>
-          <a:ln/>
-        </p:spPr>
-        <p:txBody>
-          <a:bodyPr wrap="square" rtlCol="0" anchor="ctr"/>
-          <a:lstStyle/>
-          <a:p>
-            <a:pPr indent="0" marL="0">
-              <a:buNone/>
-            </a:pPr>
-            <a:r>
-              <a:rPr lang="en-US" sz="1300" dirty="0">
-                <a:solidFill>
-                  <a:srgbClr val="2C2C2C"/>
+          <p:cNvPr id="12" name="Text 10"/>
+          <p:cNvSpPr/>
+          <p:nvPr/>
+        </p:nvSpPr>
+        <p:spPr>
+          <a:xfrm>
+            <a:off x="201168" y="1993392"/>
+            <a:ext cx="1920240" cy="585216"/>
+          </a:xfrm>
+          <a:prstGeom prst="rect">
+            <a:avLst/>
+          </a:prstGeom>
+          <a:noFill/>
+          <a:ln/>
+        </p:spPr>
+        <p:txBody>
+          <a:bodyPr wrap="square" rtlCol="0" anchor="ctr"/>
+          <a:lstStyle/>
+          <a:p>
+            <a:pPr indent="0" marL="0">
+              <a:buNone/>
+            </a:pPr>
+            <a:r>
+              <a:rPr lang="en-US" sz="1200" b="1" dirty="0">
+                <a:solidFill>
+                  <a:srgbClr val="1F3864"/>
                 </a:solidFill>
                 <a:latin typeface="Calibri" pitchFamily="34" charset="0"/>
                 <a:ea typeface="Calibri" pitchFamily="34" charset="-122"/>
                 <a:cs typeface="Calibri" pitchFamily="34" charset="-120"/>
               </a:rPr>
-              <a:t>components/     Drop-in additions: 11 topics, 3 knowledge sources, 2 actions, 6 adaptive cards, child agents</a:t>
-            </a:r>
-            <a:endParaRPr lang="en-US" sz="1300" dirty="0"/>
-          </a:p>
-        </p:txBody>
-      </p:sp>
-      <p:sp>
-        <p:nvSpPr>
-          <p:cNvPr id="11" name="Shape 9"/>
-          <p:cNvSpPr/>
-          <p:nvPr/>
-        </p:nvSpPr>
-        <p:spPr>
-          <a:xfrm>
-            <a:off x="109728" y="2423160"/>
-            <a:ext cx="11826240" cy="603504"/>
+              <a:t>components/</a:t>
+            </a:r>
+            <a:endParaRPr lang="en-US" sz="1200" dirty="0"/>
+          </a:p>
+          <a:p>
+            <a:pPr indent="0" marL="0">
+              <a:buNone/>
+            </a:pPr>
+            <a:r>
+              <a:rPr lang="en-US" sz="1200" b="1" dirty="0">
+                <a:solidFill>
+                  <a:srgbClr val="1F3864"/>
+                </a:solidFill>
+                <a:latin typeface="Calibri" pitchFamily="34" charset="0"/>
+                <a:ea typeface="Calibri" pitchFamily="34" charset="-122"/>
+                <a:cs typeface="Calibri" pitchFamily="34" charset="-120"/>
+              </a:rPr>
+              <a:t>topics/</a:t>
+            </a:r>
+            <a:endParaRPr lang="en-US" sz="1200" dirty="0"/>
+          </a:p>
+        </p:txBody>
+      </p:sp>
+      <p:sp>
+        <p:nvSpPr>
+          <p:cNvPr id="13" name="Text 11"/>
+          <p:cNvSpPr/>
+          <p:nvPr/>
+        </p:nvSpPr>
+        <p:spPr>
+          <a:xfrm>
+            <a:off x="2194560" y="1993392"/>
+            <a:ext cx="6400800" cy="585216"/>
+          </a:xfrm>
+          <a:prstGeom prst="rect">
+            <a:avLst/>
+          </a:prstGeom>
+          <a:noFill/>
+          <a:ln/>
+        </p:spPr>
+        <p:txBody>
+          <a:bodyPr wrap="square" rtlCol="0" anchor="ctr"/>
+          <a:lstStyle/>
+          <a:p>
+            <a:pPr indent="0" marL="0">
+              <a:buNone/>
+            </a:pPr>
+            <a:r>
+              <a:rPr lang="en-US" sz="1200" dirty="0">
+                <a:solidFill>
+                  <a:srgbClr val="2C2C2C"/>
+                </a:solidFill>
+                <a:latin typeface="Calibri" pitchFamily="34" charset="0"/>
+                <a:ea typeface="Calibri" pitchFamily="34" charset="-122"/>
+                <a:cs typeface="Calibri" pitchFamily="34" charset="-120"/>
+              </a:rPr>
+              <a:t>11 drop-in topic patterns: escalation, disambiguation, CSAT, auth sign-in, knowledge search. Common patterns every team solves from scratch — these are already solved.</a:t>
+            </a:r>
+            <a:endParaRPr lang="en-US" sz="1200" dirty="0"/>
+          </a:p>
+        </p:txBody>
+      </p:sp>
+      <p:sp>
+        <p:nvSpPr>
+          <p:cNvPr id="14" name="Shape 12"/>
+          <p:cNvSpPr/>
+          <p:nvPr/>
+        </p:nvSpPr>
+        <p:spPr>
+          <a:xfrm>
+            <a:off x="109728" y="2615184"/>
+            <a:ext cx="11826240" cy="585216"/>
           </a:xfrm>
           <a:prstGeom prst="rect">
             <a:avLst/>
@@ -6991,78 +8487,109 @@
       </p:sp>
       <p:sp>
         <p:nvSpPr>
-          <p:cNvPr id="12" name="Shape 10"/>
-          <p:cNvSpPr/>
-          <p:nvPr/>
-        </p:nvSpPr>
-        <p:spPr>
-          <a:xfrm>
-            <a:off x="256032" y="2660904"/>
-            <a:ext cx="128016" cy="128016"/>
-          </a:xfrm>
-          <a:prstGeom prst="ellipse">
-            <a:avLst/>
-          </a:prstGeom>
-          <a:solidFill>
-            <a:srgbClr val="2E75B6"/>
-          </a:solidFill>
-          <a:ln w="12700">
-            <a:solidFill>
-              <a:srgbClr val="2E75B6"/>
-            </a:solidFill>
-            <a:prstDash val="solid"/>
-          </a:ln>
-        </p:spPr>
-      </p:sp>
-      <p:sp>
-        <p:nvSpPr>
-          <p:cNvPr id="13" name="Text 11"/>
-          <p:cNvSpPr/>
-          <p:nvPr/>
-        </p:nvSpPr>
-        <p:spPr>
-          <a:xfrm>
-            <a:off x="475488" y="2423160"/>
-            <a:ext cx="10485120" cy="603504"/>
-          </a:xfrm>
-          <a:prstGeom prst="rect">
-            <a:avLst/>
-          </a:prstGeom>
-          <a:noFill/>
-          <a:ln/>
-        </p:spPr>
-        <p:txBody>
-          <a:bodyPr wrap="square" rtlCol="0" anchor="ctr"/>
-          <a:lstStyle/>
-          <a:p>
-            <a:pPr indent="0" marL="0">
-              <a:buNone/>
-            </a:pPr>
-            <a:r>
-              <a:rPr lang="en-US" sz="1300" dirty="0">
-                <a:solidFill>
-                  <a:srgbClr val="2C2C2C"/>
+          <p:cNvPr id="15" name="Text 13"/>
+          <p:cNvSpPr/>
+          <p:nvPr/>
+        </p:nvSpPr>
+        <p:spPr>
+          <a:xfrm>
+            <a:off x="201168" y="2615184"/>
+            <a:ext cx="1920240" cy="585216"/>
+          </a:xfrm>
+          <a:prstGeom prst="rect">
+            <a:avLst/>
+          </a:prstGeom>
+          <a:noFill/>
+          <a:ln/>
+        </p:spPr>
+        <p:txBody>
+          <a:bodyPr wrap="square" rtlCol="0" anchor="ctr"/>
+          <a:lstStyle/>
+          <a:p>
+            <a:pPr indent="0" marL="0">
+              <a:buNone/>
+            </a:pPr>
+            <a:r>
+              <a:rPr lang="en-US" sz="1200" b="1" dirty="0">
+                <a:solidFill>
+                  <a:srgbClr val="1F3864"/>
                 </a:solidFill>
                 <a:latin typeface="Calibri" pitchFamily="34" charset="0"/>
                 <a:ea typeface="Calibri" pitchFamily="34" charset="-122"/>
                 <a:cs typeface="Calibri" pitchFamily="34" charset="-120"/>
               </a:rPr>
-              <a:t>recipes/           8 step-by-step guides combining base + components for specific agent types  (30 min to 3 hrs)</a:t>
-            </a:r>
-            <a:endParaRPr lang="en-US" sz="1300" dirty="0"/>
-          </a:p>
-        </p:txBody>
-      </p:sp>
-      <p:sp>
-        <p:nvSpPr>
-          <p:cNvPr id="14" name="Shape 12"/>
-          <p:cNvSpPr/>
-          <p:nvPr/>
-        </p:nvSpPr>
-        <p:spPr>
-          <a:xfrm>
-            <a:off x="109728" y="3063240"/>
-            <a:ext cx="11826240" cy="603504"/>
+              <a:t>components/</a:t>
+            </a:r>
+            <a:endParaRPr lang="en-US" sz="1200" dirty="0"/>
+          </a:p>
+          <a:p>
+            <a:pPr indent="0" marL="0">
+              <a:buNone/>
+            </a:pPr>
+            <a:r>
+              <a:rPr lang="en-US" sz="1200" b="1" dirty="0">
+                <a:solidFill>
+                  <a:srgbClr val="1F3864"/>
+                </a:solidFill>
+                <a:latin typeface="Calibri" pitchFamily="34" charset="0"/>
+                <a:ea typeface="Calibri" pitchFamily="34" charset="-122"/>
+                <a:cs typeface="Calibri" pitchFamily="34" charset="-120"/>
+              </a:rPr>
+              <a:t>knowledge/</a:t>
+            </a:r>
+            <a:endParaRPr lang="en-US" sz="1200" dirty="0"/>
+          </a:p>
+        </p:txBody>
+      </p:sp>
+      <p:sp>
+        <p:nvSpPr>
+          <p:cNvPr id="16" name="Text 14"/>
+          <p:cNvSpPr/>
+          <p:nvPr/>
+        </p:nvSpPr>
+        <p:spPr>
+          <a:xfrm>
+            <a:off x="2194560" y="2615184"/>
+            <a:ext cx="6400800" cy="585216"/>
+          </a:xfrm>
+          <a:prstGeom prst="rect">
+            <a:avLst/>
+          </a:prstGeom>
+          <a:noFill/>
+          <a:ln/>
+        </p:spPr>
+        <p:txBody>
+          <a:bodyPr wrap="square" rtlCol="0" anchor="ctr"/>
+          <a:lstStyle/>
+          <a:p>
+            <a:pPr indent="0" marL="0">
+              <a:buNone/>
+            </a:pPr>
+            <a:r>
+              <a:rPr lang="en-US" sz="1200" dirty="0">
+                <a:solidFill>
+                  <a:srgbClr val="2C2C2C"/>
+                </a:solidFill>
+                <a:latin typeface="Calibri" pitchFamily="34" charset="0"/>
+                <a:ea typeface="Calibri" pitchFamily="34" charset="-122"/>
+                <a:cs typeface="Calibri" pitchFamily="34" charset="-120"/>
+              </a:rPr>
+              <a:t>3 knowledge source templates (SharePoint, public website, Dataverse glossary). The UI creates knowledge sources but without consistent structure or glossary injection.</a:t>
+            </a:r>
+            <a:endParaRPr lang="en-US" sz="1200" dirty="0"/>
+          </a:p>
+        </p:txBody>
+      </p:sp>
+      <p:sp>
+        <p:nvSpPr>
+          <p:cNvPr id="17" name="Shape 15"/>
+          <p:cNvSpPr/>
+          <p:nvPr/>
+        </p:nvSpPr>
+        <p:spPr>
+          <a:xfrm>
+            <a:off x="109728" y="3236976"/>
+            <a:ext cx="11826240" cy="585216"/>
           </a:xfrm>
           <a:prstGeom prst="rect">
             <a:avLst/>
@@ -7080,78 +8607,109 @@
       </p:sp>
       <p:sp>
         <p:nvSpPr>
-          <p:cNvPr id="15" name="Shape 13"/>
-          <p:cNvSpPr/>
-          <p:nvPr/>
-        </p:nvSpPr>
-        <p:spPr>
-          <a:xfrm>
-            <a:off x="256032" y="3300984"/>
-            <a:ext cx="128016" cy="128016"/>
-          </a:xfrm>
-          <a:prstGeom prst="ellipse">
-            <a:avLst/>
-          </a:prstGeom>
-          <a:solidFill>
-            <a:srgbClr val="2E75B6"/>
-          </a:solidFill>
-          <a:ln w="12700">
-            <a:solidFill>
-              <a:srgbClr val="2E75B6"/>
-            </a:solidFill>
-            <a:prstDash val="solid"/>
-          </a:ln>
-        </p:spPr>
-      </p:sp>
-      <p:sp>
-        <p:nvSpPr>
-          <p:cNvPr id="16" name="Text 14"/>
-          <p:cNvSpPr/>
-          <p:nvPr/>
-        </p:nvSpPr>
-        <p:spPr>
-          <a:xfrm>
-            <a:off x="475488" y="3063240"/>
-            <a:ext cx="10485120" cy="603504"/>
-          </a:xfrm>
-          <a:prstGeom prst="rect">
-            <a:avLst/>
-          </a:prstGeom>
-          <a:noFill/>
-          <a:ln/>
-        </p:spPr>
-        <p:txBody>
-          <a:bodyPr wrap="square" rtlCol="0" anchor="ctr"/>
-          <a:lstStyle/>
-          <a:p>
-            <a:pPr indent="0" marL="0">
-              <a:buNone/>
-            </a:pPr>
-            <a:r>
-              <a:rPr lang="en-US" sz="1300" dirty="0">
-                <a:solidFill>
-                  <a:srgbClr val="2C2C2C"/>
+          <p:cNvPr id="18" name="Text 16"/>
+          <p:cNvSpPr/>
+          <p:nvPr/>
+        </p:nvSpPr>
+        <p:spPr>
+          <a:xfrm>
+            <a:off x="201168" y="3236976"/>
+            <a:ext cx="1920240" cy="585216"/>
+          </a:xfrm>
+          <a:prstGeom prst="rect">
+            <a:avLst/>
+          </a:prstGeom>
+          <a:noFill/>
+          <a:ln/>
+        </p:spPr>
+        <p:txBody>
+          <a:bodyPr wrap="square" rtlCol="0" anchor="ctr"/>
+          <a:lstStyle/>
+          <a:p>
+            <a:pPr indent="0" marL="0">
+              <a:buNone/>
+            </a:pPr>
+            <a:r>
+              <a:rPr lang="en-US" sz="1200" b="1" dirty="0">
+                <a:solidFill>
+                  <a:srgbClr val="1F3864"/>
                 </a:solidFill>
                 <a:latin typeface="Calibri" pitchFamily="34" charset="0"/>
                 <a:ea typeface="Calibri" pitchFamily="34" charset="-122"/>
                 <a:cs typeface="Calibri" pitchFamily="34" charset="-120"/>
               </a:rPr>
-              <a:t>prompts/           4 system prompt personas + 6 AI prompts to generate YAML via Claude</a:t>
-            </a:r>
-            <a:endParaRPr lang="en-US" sz="1300" dirty="0"/>
-          </a:p>
-        </p:txBody>
-      </p:sp>
-      <p:sp>
-        <p:nvSpPr>
-          <p:cNvPr id="17" name="Shape 15"/>
-          <p:cNvSpPr/>
-          <p:nvPr/>
-        </p:nvSpPr>
-        <p:spPr>
-          <a:xfrm>
-            <a:off x="109728" y="3703320"/>
-            <a:ext cx="11826240" cy="603504"/>
+              <a:t>components/</a:t>
+            </a:r>
+            <a:endParaRPr lang="en-US" sz="1200" dirty="0"/>
+          </a:p>
+          <a:p>
+            <a:pPr indent="0" marL="0">
+              <a:buNone/>
+            </a:pPr>
+            <a:r>
+              <a:rPr lang="en-US" sz="1200" b="1" dirty="0">
+                <a:solidFill>
+                  <a:srgbClr val="1F3864"/>
+                </a:solidFill>
+                <a:latin typeface="Calibri" pitchFamily="34" charset="0"/>
+                <a:ea typeface="Calibri" pitchFamily="34" charset="-122"/>
+                <a:cs typeface="Calibri" pitchFamily="34" charset="-120"/>
+              </a:rPr>
+              <a:t>actions/</a:t>
+            </a:r>
+            <a:endParaRPr lang="en-US" sz="1200" dirty="0"/>
+          </a:p>
+        </p:txBody>
+      </p:sp>
+      <p:sp>
+        <p:nvSpPr>
+          <p:cNvPr id="19" name="Text 17"/>
+          <p:cNvSpPr/>
+          <p:nvPr/>
+        </p:nvSpPr>
+        <p:spPr>
+          <a:xfrm>
+            <a:off x="2194560" y="3236976"/>
+            <a:ext cx="6400800" cy="585216"/>
+          </a:xfrm>
+          <a:prstGeom prst="rect">
+            <a:avLst/>
+          </a:prstGeom>
+          <a:noFill/>
+          <a:ln/>
+        </p:spPr>
+        <p:txBody>
+          <a:bodyPr wrap="square" rtlCol="0" anchor="ctr"/>
+          <a:lstStyle/>
+          <a:p>
+            <a:pPr indent="0" marL="0">
+              <a:buNone/>
+            </a:pPr>
+            <a:r>
+              <a:rPr lang="en-US" sz="1200" dirty="0">
+                <a:solidFill>
+                  <a:srgbClr val="2C2C2C"/>
+                </a:solidFill>
+                <a:latin typeface="Calibri" pitchFamily="34" charset="0"/>
+                <a:ea typeface="Calibri" pitchFamily="34" charset="-122"/>
+                <a:cs typeface="Calibri" pitchFamily="34" charset="-120"/>
+              </a:rPr>
+              <a:t>2 action templates (connector + MCP) with output validation and telemetry. The UI wires actions but without error handling or logging on the action call.</a:t>
+            </a:r>
+            <a:endParaRPr lang="en-US" sz="1200" dirty="0"/>
+          </a:p>
+        </p:txBody>
+      </p:sp>
+      <p:sp>
+        <p:nvSpPr>
+          <p:cNvPr id="20" name="Shape 18"/>
+          <p:cNvSpPr/>
+          <p:nvPr/>
+        </p:nvSpPr>
+        <p:spPr>
+          <a:xfrm>
+            <a:off x="109728" y="3858768"/>
+            <a:ext cx="11826240" cy="585216"/>
           </a:xfrm>
           <a:prstGeom prst="rect">
             <a:avLst/>
@@ -7169,78 +8727,109 @@
       </p:sp>
       <p:sp>
         <p:nvSpPr>
-          <p:cNvPr id="18" name="Shape 16"/>
-          <p:cNvSpPr/>
-          <p:nvPr/>
-        </p:nvSpPr>
-        <p:spPr>
-          <a:xfrm>
-            <a:off x="256032" y="3941064"/>
-            <a:ext cx="128016" cy="128016"/>
-          </a:xfrm>
-          <a:prstGeom prst="ellipse">
-            <a:avLst/>
-          </a:prstGeom>
-          <a:solidFill>
-            <a:srgbClr val="2E75B6"/>
-          </a:solidFill>
-          <a:ln w="12700">
-            <a:solidFill>
-              <a:srgbClr val="2E75B6"/>
-            </a:solidFill>
-            <a:prstDash val="solid"/>
-          </a:ln>
-        </p:spPr>
-      </p:sp>
-      <p:sp>
-        <p:nvSpPr>
-          <p:cNvPr id="19" name="Text 17"/>
-          <p:cNvSpPr/>
-          <p:nvPr/>
-        </p:nvSpPr>
-        <p:spPr>
-          <a:xfrm>
-            <a:off x="475488" y="3703320"/>
-            <a:ext cx="10485120" cy="603504"/>
-          </a:xfrm>
-          <a:prstGeom prst="rect">
-            <a:avLst/>
-          </a:prstGeom>
-          <a:noFill/>
-          <a:ln/>
-        </p:spPr>
-        <p:txBody>
-          <a:bodyPr wrap="square" rtlCol="0" anchor="ctr"/>
-          <a:lstStyle/>
-          <a:p>
-            <a:pPr indent="0" marL="0">
-              <a:buNone/>
-            </a:pPr>
-            <a:r>
-              <a:rPr lang="en-US" sz="1300" dirty="0">
-                <a:solidFill>
-                  <a:srgbClr val="2C2C2C"/>
+          <p:cNvPr id="21" name="Text 19"/>
+          <p:cNvSpPr/>
+          <p:nvPr/>
+        </p:nvSpPr>
+        <p:spPr>
+          <a:xfrm>
+            <a:off x="201168" y="3858768"/>
+            <a:ext cx="1920240" cy="585216"/>
+          </a:xfrm>
+          <a:prstGeom prst="rect">
+            <a:avLst/>
+          </a:prstGeom>
+          <a:noFill/>
+          <a:ln/>
+        </p:spPr>
+        <p:txBody>
+          <a:bodyPr wrap="square" rtlCol="0" anchor="ctr"/>
+          <a:lstStyle/>
+          <a:p>
+            <a:pPr indent="0" marL="0">
+              <a:buNone/>
+            </a:pPr>
+            <a:r>
+              <a:rPr lang="en-US" sz="1200" b="1" dirty="0">
+                <a:solidFill>
+                  <a:srgbClr val="1F3864"/>
                 </a:solidFill>
                 <a:latin typeface="Calibri" pitchFamily="34" charset="0"/>
                 <a:ea typeface="Calibri" pitchFamily="34" charset="-122"/>
                 <a:cs typeface="Calibri" pitchFamily="34" charset="-120"/>
               </a:rPr>
-              <a:t>ci-cd/              5 GitHub Actions workflows: push to Dev on PR, promote to UAT, promote to Prod</a:t>
-            </a:r>
-            <a:endParaRPr lang="en-US" sz="1300" dirty="0"/>
-          </a:p>
-        </p:txBody>
-      </p:sp>
-      <p:sp>
-        <p:nvSpPr>
-          <p:cNvPr id="20" name="Shape 18"/>
-          <p:cNvSpPr/>
-          <p:nvPr/>
-        </p:nvSpPr>
-        <p:spPr>
-          <a:xfrm>
-            <a:off x="109728" y="4343400"/>
-            <a:ext cx="11826240" cy="603504"/>
+              <a:t>components/</a:t>
+            </a:r>
+            <a:endParaRPr lang="en-US" sz="1200" dirty="0"/>
+          </a:p>
+          <a:p>
+            <a:pPr indent="0" marL="0">
+              <a:buNone/>
+            </a:pPr>
+            <a:r>
+              <a:rPr lang="en-US" sz="1200" b="1" dirty="0">
+                <a:solidFill>
+                  <a:srgbClr val="1F3864"/>
+                </a:solidFill>
+                <a:latin typeface="Calibri" pitchFamily="34" charset="0"/>
+                <a:ea typeface="Calibri" pitchFamily="34" charset="-122"/>
+                <a:cs typeface="Calibri" pitchFamily="34" charset="-120"/>
+              </a:rPr>
+              <a:t>adaptive-cards/</a:t>
+            </a:r>
+            <a:endParaRPr lang="en-US" sz="1200" dirty="0"/>
+          </a:p>
+        </p:txBody>
+      </p:sp>
+      <p:sp>
+        <p:nvSpPr>
+          <p:cNvPr id="22" name="Text 20"/>
+          <p:cNvSpPr/>
+          <p:nvPr/>
+        </p:nvSpPr>
+        <p:spPr>
+          <a:xfrm>
+            <a:off x="2194560" y="3858768"/>
+            <a:ext cx="6400800" cy="585216"/>
+          </a:xfrm>
+          <a:prstGeom prst="rect">
+            <a:avLst/>
+          </a:prstGeom>
+          <a:noFill/>
+          <a:ln/>
+        </p:spPr>
+        <p:txBody>
+          <a:bodyPr wrap="square" rtlCol="0" anchor="ctr"/>
+          <a:lstStyle/>
+          <a:p>
+            <a:pPr indent="0" marL="0">
+              <a:buNone/>
+            </a:pPr>
+            <a:r>
+              <a:rPr lang="en-US" sz="1200" dirty="0">
+                <a:solidFill>
+                  <a:srgbClr val="2C2C2C"/>
+                </a:solidFill>
+                <a:latin typeface="Calibri" pitchFamily="34" charset="0"/>
+                <a:ea typeface="Calibri" pitchFamily="34" charset="-122"/>
+                <a:cs typeface="Calibri" pitchFamily="34" charset="-120"/>
+              </a:rPr>
+              <a:t>6 card designs: confirmation, status, form, feedback thumbs/rating/category. Adaptive card JSON is complex — these are tested, PII-safe, reusable.</a:t>
+            </a:r>
+            <a:endParaRPr lang="en-US" sz="1200" dirty="0"/>
+          </a:p>
+        </p:txBody>
+      </p:sp>
+      <p:sp>
+        <p:nvSpPr>
+          <p:cNvPr id="23" name="Shape 21"/>
+          <p:cNvSpPr/>
+          <p:nvPr/>
+        </p:nvSpPr>
+        <p:spPr>
+          <a:xfrm>
+            <a:off x="109728" y="4480560"/>
+            <a:ext cx="11826240" cy="585216"/>
           </a:xfrm>
           <a:prstGeom prst="rect">
             <a:avLst/>
@@ -7258,65 +8847,96 @@
       </p:sp>
       <p:sp>
         <p:nvSpPr>
-          <p:cNvPr id="21" name="Shape 19"/>
-          <p:cNvSpPr/>
-          <p:nvPr/>
-        </p:nvSpPr>
-        <p:spPr>
-          <a:xfrm>
-            <a:off x="256032" y="4581144"/>
-            <a:ext cx="128016" cy="128016"/>
-          </a:xfrm>
-          <a:prstGeom prst="ellipse">
-            <a:avLst/>
-          </a:prstGeom>
-          <a:solidFill>
-            <a:srgbClr val="2E75B6"/>
-          </a:solidFill>
-          <a:ln w="12700">
-            <a:solidFill>
-              <a:srgbClr val="2E75B6"/>
-            </a:solidFill>
-            <a:prstDash val="solid"/>
-          </a:ln>
-        </p:spPr>
-      </p:sp>
-      <p:sp>
-        <p:nvSpPr>
-          <p:cNvPr id="22" name="Text 20"/>
-          <p:cNvSpPr/>
-          <p:nvPr/>
-        </p:nvSpPr>
-        <p:spPr>
-          <a:xfrm>
-            <a:off x="475488" y="4343400"/>
-            <a:ext cx="10485120" cy="603504"/>
-          </a:xfrm>
-          <a:prstGeom prst="rect">
-            <a:avLst/>
-          </a:prstGeom>
-          <a:noFill/>
-          <a:ln/>
-        </p:spPr>
-        <p:txBody>
-          <a:bodyPr wrap="square" rtlCol="0" anchor="ctr"/>
-          <a:lstStyle/>
-          <a:p>
-            <a:pPr indent="0" marL="0">
-              <a:buNone/>
-            </a:pPr>
-            <a:r>
-              <a:rPr lang="en-US" sz="1300" dirty="0">
-                <a:solidFill>
-                  <a:srgbClr val="2C2C2C"/>
+          <p:cNvPr id="24" name="Text 22"/>
+          <p:cNvSpPr/>
+          <p:nvPr/>
+        </p:nvSpPr>
+        <p:spPr>
+          <a:xfrm>
+            <a:off x="201168" y="4480560"/>
+            <a:ext cx="1920240" cy="585216"/>
+          </a:xfrm>
+          <a:prstGeom prst="rect">
+            <a:avLst/>
+          </a:prstGeom>
+          <a:noFill/>
+          <a:ln/>
+        </p:spPr>
+        <p:txBody>
+          <a:bodyPr wrap="square" rtlCol="0" anchor="ctr"/>
+          <a:lstStyle/>
+          <a:p>
+            <a:pPr indent="0" marL="0">
+              <a:buNone/>
+            </a:pPr>
+            <a:r>
+              <a:rPr lang="en-US" sz="1200" b="1" dirty="0">
+                <a:solidFill>
+                  <a:srgbClr val="1F3864"/>
                 </a:solidFill>
                 <a:latin typeface="Calibri" pitchFamily="34" charset="0"/>
                 <a:ea typeface="Calibri" pitchFamily="34" charset="-122"/>
                 <a:cs typeface="Calibri" pitchFamily="34" charset="-120"/>
               </a:rPr>
-              <a:t>project-delivery/  12 delivery artifacts: requirements questionnaire, design worksheets, UAT test plan</a:t>
-            </a:r>
-            <a:endParaRPr lang="en-US" sz="1300" dirty="0"/>
+              <a:t>components/</a:t>
+            </a:r>
+            <a:endParaRPr lang="en-US" sz="1200" dirty="0"/>
+          </a:p>
+          <a:p>
+            <a:pPr indent="0" marL="0">
+              <a:buNone/>
+            </a:pPr>
+            <a:r>
+              <a:rPr lang="en-US" sz="1200" b="1" dirty="0">
+                <a:solidFill>
+                  <a:srgbClr val="1F3864"/>
+                </a:solidFill>
+                <a:latin typeface="Calibri" pitchFamily="34" charset="0"/>
+                <a:ea typeface="Calibri" pitchFamily="34" charset="-122"/>
+                <a:cs typeface="Calibri" pitchFamily="34" charset="-120"/>
+              </a:rPr>
+              <a:t>agents/</a:t>
+            </a:r>
+            <a:endParaRPr lang="en-US" sz="1200" dirty="0"/>
+          </a:p>
+        </p:txBody>
+      </p:sp>
+      <p:sp>
+        <p:nvSpPr>
+          <p:cNvPr id="25" name="Text 23"/>
+          <p:cNvSpPr/>
+          <p:nvPr/>
+        </p:nvSpPr>
+        <p:spPr>
+          <a:xfrm>
+            <a:off x="2194560" y="4480560"/>
+            <a:ext cx="6400800" cy="585216"/>
+          </a:xfrm>
+          <a:prstGeom prst="rect">
+            <a:avLst/>
+          </a:prstGeom>
+          <a:noFill/>
+          <a:ln/>
+        </p:spPr>
+        <p:txBody>
+          <a:bodyPr wrap="square" rtlCol="0" anchor="ctr"/>
+          <a:lstStyle/>
+          <a:p>
+            <a:pPr indent="0" marL="0">
+              <a:buNone/>
+            </a:pPr>
+            <a:r>
+              <a:rPr lang="en-US" sz="1200" dirty="0">
+                <a:solidFill>
+                  <a:srgbClr val="2C2C2C"/>
+                </a:solidFill>
+                <a:latin typeface="Calibri" pitchFamily="34" charset="0"/>
+                <a:ea typeface="Calibri" pitchFamily="34" charset="-122"/>
+                <a:cs typeface="Calibri" pitchFamily="34" charset="-120"/>
+              </a:rPr>
+              <a:t>Child agent template for orchestrator pattern. Use when one agent needs to hand off to a specialist. Recipe 05 shows how to wire them together.</a:t>
+            </a:r>
+            <a:endParaRPr lang="en-US" sz="1200" dirty="0"/>
           </a:p>
         </p:txBody>
       </p:sp>
@@ -7425,7 +9045,7 @@
                 <a:ea typeface="Calibri Light" pitchFamily="34" charset="-122"/>
                 <a:cs typeface="Calibri Light" pitchFamily="34" charset="-120"/>
               </a:rPr>
-              <a:t>Engineering Playbook  —  Entry Point by Role</a:t>
+              <a:t>recipes/  prompts/  ci-cd/  project-delivery/  —  What Each Solves</a:t>
             </a:r>
             <a:endParaRPr lang="en-US" sz="2400" dirty="0"/>
           </a:p>
@@ -7433,14 +9053,115 @@
       </p:sp>
       <p:sp>
         <p:nvSpPr>
-          <p:cNvPr id="5" name="Shape 3"/>
-          <p:cNvSpPr/>
-          <p:nvPr/>
-        </p:nvSpPr>
-        <p:spPr>
-          <a:xfrm>
-            <a:off x="109728" y="1143000"/>
-            <a:ext cx="11826240" cy="603504"/>
+          <p:cNvPr id="5" name="Text 3"/>
+          <p:cNvSpPr/>
+          <p:nvPr/>
+        </p:nvSpPr>
+        <p:spPr>
+          <a:xfrm>
+            <a:off x="228600" y="1024128"/>
+            <a:ext cx="1828800" cy="292608"/>
+          </a:xfrm>
+          <a:prstGeom prst="rect">
+            <a:avLst/>
+          </a:prstGeom>
+          <a:noFill/>
+          <a:ln/>
+        </p:spPr>
+        <p:txBody>
+          <a:bodyPr wrap="square" rtlCol="0" anchor="ctr"/>
+          <a:lstStyle/>
+          <a:p>
+            <a:pPr indent="0" marL="0">
+              <a:buNone/>
+            </a:pPr>
+            <a:r>
+              <a:rPr lang="en-US" sz="1100" b="1" dirty="0">
+                <a:solidFill>
+                  <a:srgbClr val="666666"/>
+                </a:solidFill>
+                <a:latin typeface="Calibri" pitchFamily="34" charset="0"/>
+                <a:ea typeface="Calibri" pitchFamily="34" charset="-122"/>
+                <a:cs typeface="Calibri" pitchFamily="34" charset="-120"/>
+              </a:rPr>
+              <a:t>Folder</a:t>
+            </a:r>
+            <a:endParaRPr lang="en-US" sz="1100" dirty="0"/>
+          </a:p>
+        </p:txBody>
+      </p:sp>
+      <p:sp>
+        <p:nvSpPr>
+          <p:cNvPr id="6" name="Text 4"/>
+          <p:cNvSpPr/>
+          <p:nvPr/>
+        </p:nvSpPr>
+        <p:spPr>
+          <a:xfrm>
+            <a:off x="2194560" y="1024128"/>
+            <a:ext cx="6400800" cy="292608"/>
+          </a:xfrm>
+          <a:prstGeom prst="rect">
+            <a:avLst/>
+          </a:prstGeom>
+          <a:noFill/>
+          <a:ln/>
+        </p:spPr>
+        <p:txBody>
+          <a:bodyPr wrap="square" rtlCol="0" anchor="ctr"/>
+          <a:lstStyle/>
+          <a:p>
+            <a:pPr indent="0" marL="0">
+              <a:buNone/>
+            </a:pPr>
+            <a:r>
+              <a:rPr lang="en-US" sz="1100" b="1" dirty="0">
+                <a:solidFill>
+                  <a:srgbClr val="666666"/>
+                </a:solidFill>
+                <a:latin typeface="Calibri" pitchFamily="34" charset="0"/>
+                <a:ea typeface="Calibri" pitchFamily="34" charset="-122"/>
+                <a:cs typeface="Calibri" pitchFamily="34" charset="-120"/>
+              </a:rPr>
+              <a:t>Where it helps</a:t>
+            </a:r>
+            <a:endParaRPr lang="en-US" sz="1100" dirty="0"/>
+          </a:p>
+        </p:txBody>
+      </p:sp>
+      <p:sp>
+        <p:nvSpPr>
+          <p:cNvPr id="7" name="Shape 5"/>
+          <p:cNvSpPr/>
+          <p:nvPr/>
+        </p:nvSpPr>
+        <p:spPr>
+          <a:xfrm>
+            <a:off x="182880" y="1316736"/>
+            <a:ext cx="8595360" cy="0"/>
+          </a:xfrm>
+          <a:prstGeom prst="line">
+            <a:avLst/>
+          </a:prstGeom>
+          <a:noFill/>
+          <a:ln w="12700">
+            <a:solidFill>
+              <a:srgbClr val="CCCCCC"/>
+            </a:solidFill>
+            <a:prstDash val="solid"/>
+          </a:ln>
+        </p:spPr>
+      </p:sp>
+      <p:sp>
+        <p:nvSpPr>
+          <p:cNvPr id="8" name="Shape 6"/>
+          <p:cNvSpPr/>
+          <p:nvPr/>
+        </p:nvSpPr>
+        <p:spPr>
+          <a:xfrm>
+            <a:off x="109728" y="1371600"/>
+            <a:ext cx="11826240" cy="676656"/>
           </a:xfrm>
           <a:prstGeom prst="rect">
             <a:avLst/>
@@ -7458,78 +9179,92 @@
       </p:sp>
       <p:sp>
         <p:nvSpPr>
-          <p:cNvPr id="6" name="Shape 4"/>
-          <p:cNvSpPr/>
-          <p:nvPr/>
-        </p:nvSpPr>
-        <p:spPr>
-          <a:xfrm>
-            <a:off x="256032" y="1380744"/>
-            <a:ext cx="128016" cy="128016"/>
-          </a:xfrm>
-          <a:prstGeom prst="ellipse">
-            <a:avLst/>
-          </a:prstGeom>
-          <a:solidFill>
-            <a:srgbClr val="2E75B6"/>
-          </a:solidFill>
-          <a:ln w="12700">
-            <a:solidFill>
-              <a:srgbClr val="2E75B6"/>
-            </a:solidFill>
-            <a:prstDash val="solid"/>
-          </a:ln>
-        </p:spPr>
-      </p:sp>
-      <p:sp>
-        <p:nvSpPr>
-          <p:cNvPr id="7" name="Text 5"/>
-          <p:cNvSpPr/>
-          <p:nvPr/>
-        </p:nvSpPr>
-        <p:spPr>
-          <a:xfrm>
-            <a:off x="475488" y="1143000"/>
-            <a:ext cx="10485120" cy="603504"/>
-          </a:xfrm>
-          <a:prstGeom prst="rect">
-            <a:avLst/>
-          </a:prstGeom>
-          <a:noFill/>
-          <a:ln/>
-        </p:spPr>
-        <p:txBody>
-          <a:bodyPr wrap="square" rtlCol="0" anchor="ctr"/>
-          <a:lstStyle/>
-          <a:p>
-            <a:pPr indent="0" marL="0">
-              <a:buNone/>
-            </a:pPr>
-            <a:r>
-              <a:rPr lang="en-US" sz="1300" dirty="0">
-                <a:solidFill>
-                  <a:srgbClr val="2C2C2C"/>
+          <p:cNvPr id="9" name="Text 7"/>
+          <p:cNvSpPr/>
+          <p:nvPr/>
+        </p:nvSpPr>
+        <p:spPr>
+          <a:xfrm>
+            <a:off x="201168" y="1371600"/>
+            <a:ext cx="1920240" cy="676656"/>
+          </a:xfrm>
+          <a:prstGeom prst="rect">
+            <a:avLst/>
+          </a:prstGeom>
+          <a:noFill/>
+          <a:ln/>
+        </p:spPr>
+        <p:txBody>
+          <a:bodyPr wrap="square" rtlCol="0" anchor="ctr"/>
+          <a:lstStyle/>
+          <a:p>
+            <a:pPr indent="0" marL="0">
+              <a:buNone/>
+            </a:pPr>
+            <a:r>
+              <a:rPr lang="en-US" sz="1200" b="1" dirty="0">
+                <a:solidFill>
+                  <a:srgbClr val="1F3864"/>
                 </a:solidFill>
                 <a:latin typeface="Calibri" pitchFamily="34" charset="0"/>
                 <a:ea typeface="Calibri" pitchFamily="34" charset="-122"/>
                 <a:cs typeface="Calibri" pitchFamily="34" charset="-120"/>
               </a:rPr>
-              <a:t>Intern / New to Copilot Studio          Stage 0 to 3  —  walk every step</a:t>
-            </a:r>
-            <a:endParaRPr lang="en-US" sz="1300" dirty="0"/>
-          </a:p>
-        </p:txBody>
-      </p:sp>
-      <p:sp>
-        <p:nvSpPr>
-          <p:cNvPr id="8" name="Shape 6"/>
-          <p:cNvSpPr/>
-          <p:nvPr/>
-        </p:nvSpPr>
-        <p:spPr>
-          <a:xfrm>
-            <a:off x="109728" y="1783080"/>
-            <a:ext cx="11826240" cy="603504"/>
+              <a:t>recipes/</a:t>
+            </a:r>
+            <a:endParaRPr lang="en-US" sz="1200" dirty="0"/>
+          </a:p>
+        </p:txBody>
+      </p:sp>
+      <p:sp>
+        <p:nvSpPr>
+          <p:cNvPr id="10" name="Text 8"/>
+          <p:cNvSpPr/>
+          <p:nvPr/>
+        </p:nvSpPr>
+        <p:spPr>
+          <a:xfrm>
+            <a:off x="2194560" y="1371600"/>
+            <a:ext cx="6400800" cy="676656"/>
+          </a:xfrm>
+          <a:prstGeom prst="rect">
+            <a:avLst/>
+          </a:prstGeom>
+          <a:noFill/>
+          <a:ln/>
+        </p:spPr>
+        <p:txBody>
+          <a:bodyPr wrap="square" rtlCol="0" anchor="ctr"/>
+          <a:lstStyle/>
+          <a:p>
+            <a:pPr indent="0" marL="0">
+              <a:buNone/>
+            </a:pPr>
+            <a:r>
+              <a:rPr lang="en-US" sz="1200" dirty="0">
+                <a:solidFill>
+                  <a:srgbClr val="2C2C2C"/>
+                </a:solidFill>
+                <a:latin typeface="Calibri" pitchFamily="34" charset="0"/>
+                <a:ea typeface="Calibri" pitchFamily="34" charset="-122"/>
+                <a:cs typeface="Calibri" pitchFamily="34" charset="-120"/>
+              </a:rPr>
+              <a:t>8 step-by-step guides (30 min to 3 hrs). Tells you which base + components to combine for your agent type. Without this, each developer assembles a different set.</a:t>
+            </a:r>
+            <a:endParaRPr lang="en-US" sz="1200" dirty="0"/>
+          </a:p>
+        </p:txBody>
+      </p:sp>
+      <p:sp>
+        <p:nvSpPr>
+          <p:cNvPr id="11" name="Shape 9"/>
+          <p:cNvSpPr/>
+          <p:nvPr/>
+        </p:nvSpPr>
+        <p:spPr>
+          <a:xfrm>
+            <a:off x="109728" y="2084832"/>
+            <a:ext cx="11826240" cy="676656"/>
           </a:xfrm>
           <a:prstGeom prst="rect">
             <a:avLst/>
@@ -7547,78 +9282,109 @@
       </p:sp>
       <p:sp>
         <p:nvSpPr>
-          <p:cNvPr id="9" name="Shape 7"/>
-          <p:cNvSpPr/>
-          <p:nvPr/>
-        </p:nvSpPr>
-        <p:spPr>
-          <a:xfrm>
-            <a:off x="256032" y="2020824"/>
-            <a:ext cx="128016" cy="128016"/>
-          </a:xfrm>
-          <a:prstGeom prst="ellipse">
-            <a:avLst/>
-          </a:prstGeom>
-          <a:solidFill>
-            <a:srgbClr val="2E75B6"/>
-          </a:solidFill>
-          <a:ln w="12700">
-            <a:solidFill>
-              <a:srgbClr val="2E75B6"/>
-            </a:solidFill>
-            <a:prstDash val="solid"/>
-          </a:ln>
-        </p:spPr>
-      </p:sp>
-      <p:sp>
-        <p:nvSpPr>
-          <p:cNvPr id="10" name="Text 8"/>
-          <p:cNvSpPr/>
-          <p:nvPr/>
-        </p:nvSpPr>
-        <p:spPr>
-          <a:xfrm>
-            <a:off x="475488" y="1783080"/>
-            <a:ext cx="10485120" cy="603504"/>
-          </a:xfrm>
-          <a:prstGeom prst="rect">
-            <a:avLst/>
-          </a:prstGeom>
-          <a:noFill/>
-          <a:ln/>
-        </p:spPr>
-        <p:txBody>
-          <a:bodyPr wrap="square" rtlCol="0" anchor="ctr"/>
-          <a:lstStyle/>
-          <a:p>
-            <a:pPr indent="0" marL="0">
-              <a:buNone/>
-            </a:pPr>
-            <a:r>
-              <a:rPr lang="en-US" sz="1300" dirty="0">
-                <a:solidFill>
-                  <a:srgbClr val="2C2C2C"/>
+          <p:cNvPr id="12" name="Text 10"/>
+          <p:cNvSpPr/>
+          <p:nvPr/>
+        </p:nvSpPr>
+        <p:spPr>
+          <a:xfrm>
+            <a:off x="201168" y="2084832"/>
+            <a:ext cx="1920240" cy="676656"/>
+          </a:xfrm>
+          <a:prstGeom prst="rect">
+            <a:avLst/>
+          </a:prstGeom>
+          <a:noFill/>
+          <a:ln/>
+        </p:spPr>
+        <p:txBody>
+          <a:bodyPr wrap="square" rtlCol="0" anchor="ctr"/>
+          <a:lstStyle/>
+          <a:p>
+            <a:pPr indent="0" marL="0">
+              <a:buNone/>
+            </a:pPr>
+            <a:r>
+              <a:rPr lang="en-US" sz="1200" b="1" dirty="0">
+                <a:solidFill>
+                  <a:srgbClr val="1F3864"/>
                 </a:solidFill>
                 <a:latin typeface="Calibri" pitchFamily="34" charset="0"/>
                 <a:ea typeface="Calibri" pitchFamily="34" charset="-122"/>
                 <a:cs typeface="Calibri" pitchFamily="34" charset="-120"/>
               </a:rPr>
-              <a:t>Developer  (1–2 years)                   Stage 0 (decision)  →  Stage 2 (templates)  →  Stage 3 (build)</a:t>
-            </a:r>
-            <a:endParaRPr lang="en-US" sz="1300" dirty="0"/>
-          </a:p>
-        </p:txBody>
-      </p:sp>
-      <p:sp>
-        <p:nvSpPr>
-          <p:cNvPr id="11" name="Shape 9"/>
-          <p:cNvSpPr/>
-          <p:nvPr/>
-        </p:nvSpPr>
-        <p:spPr>
-          <a:xfrm>
-            <a:off x="109728" y="2423160"/>
-            <a:ext cx="11826240" cy="603504"/>
+              <a:t>prompts/</a:t>
+            </a:r>
+            <a:endParaRPr lang="en-US" sz="1200" dirty="0"/>
+          </a:p>
+          <a:p>
+            <a:pPr indent="0" marL="0">
+              <a:buNone/>
+            </a:pPr>
+            <a:r>
+              <a:rPr lang="en-US" sz="1200" b="1" dirty="0">
+                <a:solidFill>
+                  <a:srgbClr val="1F3864"/>
+                </a:solidFill>
+                <a:latin typeface="Calibri" pitchFamily="34" charset="0"/>
+                <a:ea typeface="Calibri" pitchFamily="34" charset="-122"/>
+                <a:cs typeface="Calibri" pitchFamily="34" charset="-120"/>
+              </a:rPr>
+              <a:t>system-prompts/</a:t>
+            </a:r>
+            <a:endParaRPr lang="en-US" sz="1200" dirty="0"/>
+          </a:p>
+        </p:txBody>
+      </p:sp>
+      <p:sp>
+        <p:nvSpPr>
+          <p:cNvPr id="13" name="Text 11"/>
+          <p:cNvSpPr/>
+          <p:nvPr/>
+        </p:nvSpPr>
+        <p:spPr>
+          <a:xfrm>
+            <a:off x="2194560" y="2084832"/>
+            <a:ext cx="6400800" cy="676656"/>
+          </a:xfrm>
+          <a:prstGeom prst="rect">
+            <a:avLst/>
+          </a:prstGeom>
+          <a:noFill/>
+          <a:ln/>
+        </p:spPr>
+        <p:txBody>
+          <a:bodyPr wrap="square" rtlCol="0" anchor="ctr"/>
+          <a:lstStyle/>
+          <a:p>
+            <a:pPr indent="0" marL="0">
+              <a:buNone/>
+            </a:pPr>
+            <a:r>
+              <a:rPr lang="en-US" sz="1200" dirty="0">
+                <a:solidFill>
+                  <a:srgbClr val="2C2C2C"/>
+                </a:solidFill>
+                <a:latin typeface="Calibri" pitchFamily="34" charset="0"/>
+                <a:ea typeface="Calibri" pitchFamily="34" charset="-122"/>
+                <a:cs typeface="Calibri" pitchFamily="34" charset="-120"/>
+              </a:rPr>
+              <a:t>4 ready-made agent personas (HR, IT helpdesk, customer support, knowledge base). Paste directly into agent.mcs.yml — skip writing the system prompt from scratch.</a:t>
+            </a:r>
+            <a:endParaRPr lang="en-US" sz="1200" dirty="0"/>
+          </a:p>
+        </p:txBody>
+      </p:sp>
+      <p:sp>
+        <p:nvSpPr>
+          <p:cNvPr id="14" name="Shape 12"/>
+          <p:cNvSpPr/>
+          <p:nvPr/>
+        </p:nvSpPr>
+        <p:spPr>
+          <a:xfrm>
+            <a:off x="109728" y="2798064"/>
+            <a:ext cx="11826240" cy="676656"/>
           </a:xfrm>
           <a:prstGeom prst="rect">
             <a:avLst/>
@@ -7636,78 +9402,109 @@
       </p:sp>
       <p:sp>
         <p:nvSpPr>
-          <p:cNvPr id="12" name="Shape 10"/>
-          <p:cNvSpPr/>
-          <p:nvPr/>
-        </p:nvSpPr>
-        <p:spPr>
-          <a:xfrm>
-            <a:off x="256032" y="2660904"/>
-            <a:ext cx="128016" cy="128016"/>
-          </a:xfrm>
-          <a:prstGeom prst="ellipse">
-            <a:avLst/>
-          </a:prstGeom>
-          <a:solidFill>
-            <a:srgbClr val="2E75B6"/>
-          </a:solidFill>
-          <a:ln w="12700">
-            <a:solidFill>
-              <a:srgbClr val="2E75B6"/>
-            </a:solidFill>
-            <a:prstDash val="solid"/>
-          </a:ln>
-        </p:spPr>
-      </p:sp>
-      <p:sp>
-        <p:nvSpPr>
-          <p:cNvPr id="13" name="Text 11"/>
-          <p:cNvSpPr/>
-          <p:nvPr/>
-        </p:nvSpPr>
-        <p:spPr>
-          <a:xfrm>
-            <a:off x="475488" y="2423160"/>
-            <a:ext cx="10485120" cy="603504"/>
-          </a:xfrm>
-          <a:prstGeom prst="rect">
-            <a:avLst/>
-          </a:prstGeom>
-          <a:noFill/>
-          <a:ln/>
-        </p:spPr>
-        <p:txBody>
-          <a:bodyPr wrap="square" rtlCol="0" anchor="ctr"/>
-          <a:lstStyle/>
-          <a:p>
-            <a:pPr indent="0" marL="0">
-              <a:buNone/>
-            </a:pPr>
-            <a:r>
-              <a:rPr lang="en-US" sz="1300" dirty="0">
-                <a:solidFill>
-                  <a:srgbClr val="2C2C2C"/>
+          <p:cNvPr id="15" name="Text 13"/>
+          <p:cNvSpPr/>
+          <p:nvPr/>
+        </p:nvSpPr>
+        <p:spPr>
+          <a:xfrm>
+            <a:off x="201168" y="2798064"/>
+            <a:ext cx="1920240" cy="676656"/>
+          </a:xfrm>
+          <a:prstGeom prst="rect">
+            <a:avLst/>
+          </a:prstGeom>
+          <a:noFill/>
+          <a:ln/>
+        </p:spPr>
+        <p:txBody>
+          <a:bodyPr wrap="square" rtlCol="0" anchor="ctr"/>
+          <a:lstStyle/>
+          <a:p>
+            <a:pPr indent="0" marL="0">
+              <a:buNone/>
+            </a:pPr>
+            <a:r>
+              <a:rPr lang="en-US" sz="1200" b="1" dirty="0">
+                <a:solidFill>
+                  <a:srgbClr val="1F3864"/>
                 </a:solidFill>
                 <a:latin typeface="Calibri" pitchFamily="34" charset="0"/>
                 <a:ea typeface="Calibri" pitchFamily="34" charset="-122"/>
                 <a:cs typeface="Calibri" pitchFamily="34" charset="-120"/>
               </a:rPr>
-              <a:t>Senior developer                             Stage 4 (innovation), 4.5 (pro-code), 6 (CI/CD), 9 (telemetry)</a:t>
-            </a:r>
-            <a:endParaRPr lang="en-US" sz="1300" dirty="0"/>
-          </a:p>
-        </p:txBody>
-      </p:sp>
-      <p:sp>
-        <p:nvSpPr>
-          <p:cNvPr id="14" name="Shape 12"/>
-          <p:cNvSpPr/>
-          <p:nvPr/>
-        </p:nvSpPr>
-        <p:spPr>
-          <a:xfrm>
-            <a:off x="109728" y="3063240"/>
-            <a:ext cx="11826240" cy="603504"/>
+              <a:t>prompts/</a:t>
+            </a:r>
+            <a:endParaRPr lang="en-US" sz="1200" dirty="0"/>
+          </a:p>
+          <a:p>
+            <a:pPr indent="0" marL="0">
+              <a:buNone/>
+            </a:pPr>
+            <a:r>
+              <a:rPr lang="en-US" sz="1200" b="1" dirty="0">
+                <a:solidFill>
+                  <a:srgbClr val="1F3864"/>
+                </a:solidFill>
+                <a:latin typeface="Calibri" pitchFamily="34" charset="0"/>
+                <a:ea typeface="Calibri" pitchFamily="34" charset="-122"/>
+                <a:cs typeface="Calibri" pitchFamily="34" charset="-120"/>
+              </a:rPr>
+              <a:t>ai-prompts/</a:t>
+            </a:r>
+            <a:endParaRPr lang="en-US" sz="1200" dirty="0"/>
+          </a:p>
+        </p:txBody>
+      </p:sp>
+      <p:sp>
+        <p:nvSpPr>
+          <p:cNvPr id="16" name="Text 14"/>
+          <p:cNvSpPr/>
+          <p:nvPr/>
+        </p:nvSpPr>
+        <p:spPr>
+          <a:xfrm>
+            <a:off x="2194560" y="2798064"/>
+            <a:ext cx="6400800" cy="676656"/>
+          </a:xfrm>
+          <a:prstGeom prst="rect">
+            <a:avLst/>
+          </a:prstGeom>
+          <a:noFill/>
+          <a:ln/>
+        </p:spPr>
+        <p:txBody>
+          <a:bodyPr wrap="square" rtlCol="0" anchor="ctr"/>
+          <a:lstStyle/>
+          <a:p>
+            <a:pPr indent="0" marL="0">
+              <a:buNone/>
+            </a:pPr>
+            <a:r>
+              <a:rPr lang="en-US" sz="1200" dirty="0">
+                <a:solidFill>
+                  <a:srgbClr val="2C2C2C"/>
+                </a:solidFill>
+                <a:latin typeface="Calibri" pitchFamily="34" charset="0"/>
+                <a:ea typeface="Calibri" pitchFamily="34" charset="-122"/>
+                <a:cs typeface="Calibri" pitchFamily="34" charset="-120"/>
+              </a:rPr>
+              <a:t>6 prompts to run in Claude: generate topic YAML, generate eval cases, review agent quality. Turns a plain-English description into production YAML.</a:t>
+            </a:r>
+            <a:endParaRPr lang="en-US" sz="1200" dirty="0"/>
+          </a:p>
+        </p:txBody>
+      </p:sp>
+      <p:sp>
+        <p:nvSpPr>
+          <p:cNvPr id="17" name="Shape 15"/>
+          <p:cNvSpPr/>
+          <p:nvPr/>
+        </p:nvSpPr>
+        <p:spPr>
+          <a:xfrm>
+            <a:off x="109728" y="3511296"/>
+            <a:ext cx="11826240" cy="676656"/>
           </a:xfrm>
           <a:prstGeom prst="rect">
             <a:avLst/>
@@ -7725,78 +9522,92 @@
       </p:sp>
       <p:sp>
         <p:nvSpPr>
-          <p:cNvPr id="15" name="Shape 13"/>
-          <p:cNvSpPr/>
-          <p:nvPr/>
-        </p:nvSpPr>
-        <p:spPr>
-          <a:xfrm>
-            <a:off x="256032" y="3300984"/>
-            <a:ext cx="128016" cy="128016"/>
-          </a:xfrm>
-          <a:prstGeom prst="ellipse">
-            <a:avLst/>
-          </a:prstGeom>
-          <a:solidFill>
-            <a:srgbClr val="2E75B6"/>
-          </a:solidFill>
-          <a:ln w="12700">
-            <a:solidFill>
-              <a:srgbClr val="2E75B6"/>
-            </a:solidFill>
-            <a:prstDash val="solid"/>
-          </a:ln>
-        </p:spPr>
-      </p:sp>
-      <p:sp>
-        <p:nvSpPr>
-          <p:cNvPr id="16" name="Text 14"/>
-          <p:cNvSpPr/>
-          <p:nvPr/>
-        </p:nvSpPr>
-        <p:spPr>
-          <a:xfrm>
-            <a:off x="475488" y="3063240"/>
-            <a:ext cx="10485120" cy="603504"/>
-          </a:xfrm>
-          <a:prstGeom prst="rect">
-            <a:avLst/>
-          </a:prstGeom>
-          <a:noFill/>
-          <a:ln/>
-        </p:spPr>
-        <p:txBody>
-          <a:bodyPr wrap="square" rtlCol="0" anchor="ctr"/>
-          <a:lstStyle/>
-          <a:p>
-            <a:pPr indent="0" marL="0">
-              <a:buNone/>
-            </a:pPr>
-            <a:r>
-              <a:rPr lang="en-US" sz="1300" dirty="0">
-                <a:solidFill>
-                  <a:srgbClr val="2C2C2C"/>
+          <p:cNvPr id="18" name="Text 16"/>
+          <p:cNvSpPr/>
+          <p:nvPr/>
+        </p:nvSpPr>
+        <p:spPr>
+          <a:xfrm>
+            <a:off x="201168" y="3511296"/>
+            <a:ext cx="1920240" cy="676656"/>
+          </a:xfrm>
+          <a:prstGeom prst="rect">
+            <a:avLst/>
+          </a:prstGeom>
+          <a:noFill/>
+          <a:ln/>
+        </p:spPr>
+        <p:txBody>
+          <a:bodyPr wrap="square" rtlCol="0" anchor="ctr"/>
+          <a:lstStyle/>
+          <a:p>
+            <a:pPr indent="0" marL="0">
+              <a:buNone/>
+            </a:pPr>
+            <a:r>
+              <a:rPr lang="en-US" sz="1200" b="1" dirty="0">
+                <a:solidFill>
+                  <a:srgbClr val="1F3864"/>
                 </a:solidFill>
                 <a:latin typeface="Calibri" pitchFamily="34" charset="0"/>
                 <a:ea typeface="Calibri" pitchFamily="34" charset="-122"/>
                 <a:cs typeface="Calibri" pitchFamily="34" charset="-120"/>
               </a:rPr>
-              <a:t>Tech lead                                       Stage 5 (governance)  →  Stage 6 (CI/CD)  →  Stage 10 (monitoring)</a:t>
-            </a:r>
-            <a:endParaRPr lang="en-US" sz="1300" dirty="0"/>
-          </a:p>
-        </p:txBody>
-      </p:sp>
-      <p:sp>
-        <p:nvSpPr>
-          <p:cNvPr id="17" name="Shape 15"/>
-          <p:cNvSpPr/>
-          <p:nvPr/>
-        </p:nvSpPr>
-        <p:spPr>
-          <a:xfrm>
-            <a:off x="109728" y="3703320"/>
-            <a:ext cx="11826240" cy="603504"/>
+              <a:t>ci-cd/</a:t>
+            </a:r>
+            <a:endParaRPr lang="en-US" sz="1200" dirty="0"/>
+          </a:p>
+        </p:txBody>
+      </p:sp>
+      <p:sp>
+        <p:nvSpPr>
+          <p:cNvPr id="19" name="Text 17"/>
+          <p:cNvSpPr/>
+          <p:nvPr/>
+        </p:nvSpPr>
+        <p:spPr>
+          <a:xfrm>
+            <a:off x="2194560" y="3511296"/>
+            <a:ext cx="6400800" cy="676656"/>
+          </a:xfrm>
+          <a:prstGeom prst="rect">
+            <a:avLst/>
+          </a:prstGeom>
+          <a:noFill/>
+          <a:ln/>
+        </p:spPr>
+        <p:txBody>
+          <a:bodyPr wrap="square" rtlCol="0" anchor="ctr"/>
+          <a:lstStyle/>
+          <a:p>
+            <a:pPr indent="0" marL="0">
+              <a:buNone/>
+            </a:pPr>
+            <a:r>
+              <a:rPr lang="en-US" sz="1200" dirty="0">
+                <a:solidFill>
+                  <a:srgbClr val="2C2C2C"/>
+                </a:solidFill>
+                <a:latin typeface="Calibri" pitchFamily="34" charset="0"/>
+                <a:ea typeface="Calibri" pitchFamily="34" charset="-122"/>
+                <a:cs typeface="Calibri" pitchFamily="34" charset="-120"/>
+              </a:rPr>
+              <a:t>5 GitHub Actions workflows: push to Dev on every PR, promote to UAT, promote to Prod. The UI has no CI/CD at all — this is the biggest operational gap templates close.</a:t>
+            </a:r>
+            <a:endParaRPr lang="en-US" sz="1200" dirty="0"/>
+          </a:p>
+        </p:txBody>
+      </p:sp>
+      <p:sp>
+        <p:nvSpPr>
+          <p:cNvPr id="20" name="Shape 18"/>
+          <p:cNvSpPr/>
+          <p:nvPr/>
+        </p:nvSpPr>
+        <p:spPr>
+          <a:xfrm>
+            <a:off x="109728" y="4224528"/>
+            <a:ext cx="11826240" cy="676656"/>
           </a:xfrm>
           <a:prstGeom prst="rect">
             <a:avLst/>
@@ -7814,154 +9625,96 @@
       </p:sp>
       <p:sp>
         <p:nvSpPr>
-          <p:cNvPr id="18" name="Shape 16"/>
-          <p:cNvSpPr/>
-          <p:nvPr/>
-        </p:nvSpPr>
-        <p:spPr>
-          <a:xfrm>
-            <a:off x="256032" y="3941064"/>
-            <a:ext cx="128016" cy="128016"/>
-          </a:xfrm>
-          <a:prstGeom prst="ellipse">
-            <a:avLst/>
-          </a:prstGeom>
-          <a:solidFill>
-            <a:srgbClr val="2E75B6"/>
-          </a:solidFill>
-          <a:ln w="12700">
-            <a:solidFill>
-              <a:srgbClr val="2E75B6"/>
-            </a:solidFill>
-            <a:prstDash val="solid"/>
-          </a:ln>
-        </p:spPr>
-      </p:sp>
-      <p:sp>
-        <p:nvSpPr>
-          <p:cNvPr id="19" name="Text 17"/>
-          <p:cNvSpPr/>
-          <p:nvPr/>
-        </p:nvSpPr>
-        <p:spPr>
-          <a:xfrm>
-            <a:off x="475488" y="3703320"/>
-            <a:ext cx="10485120" cy="603504"/>
-          </a:xfrm>
-          <a:prstGeom prst="rect">
-            <a:avLst/>
-          </a:prstGeom>
-          <a:noFill/>
-          <a:ln/>
-        </p:spPr>
-        <p:txBody>
-          <a:bodyPr wrap="square" rtlCol="0" anchor="ctr"/>
-          <a:lstStyle/>
-          <a:p>
-            <a:pPr indent="0" marL="0">
-              <a:buNone/>
-            </a:pPr>
-            <a:r>
-              <a:rPr lang="en-US" sz="1300" dirty="0">
-                <a:solidFill>
-                  <a:srgbClr val="2C2C2C"/>
+          <p:cNvPr id="21" name="Text 19"/>
+          <p:cNvSpPr/>
+          <p:nvPr/>
+        </p:nvSpPr>
+        <p:spPr>
+          <a:xfrm>
+            <a:off x="201168" y="4224528"/>
+            <a:ext cx="1920240" cy="676656"/>
+          </a:xfrm>
+          <a:prstGeom prst="rect">
+            <a:avLst/>
+          </a:prstGeom>
+          <a:noFill/>
+          <a:ln/>
+        </p:spPr>
+        <p:txBody>
+          <a:bodyPr wrap="square" rtlCol="0" anchor="ctr"/>
+          <a:lstStyle/>
+          <a:p>
+            <a:pPr indent="0" marL="0">
+              <a:buNone/>
+            </a:pPr>
+            <a:r>
+              <a:rPr lang="en-US" sz="1200" b="1" dirty="0">
+                <a:solidFill>
+                  <a:srgbClr val="1F3864"/>
                 </a:solidFill>
                 <a:latin typeface="Calibri" pitchFamily="34" charset="0"/>
                 <a:ea typeface="Calibri" pitchFamily="34" charset="-122"/>
                 <a:cs typeface="Calibri" pitchFamily="34" charset="-120"/>
               </a:rPr>
-              <a:t>Director / Business owner              Stage 0 (decision matrix) and Stage 5 (governance)</a:t>
-            </a:r>
-            <a:endParaRPr lang="en-US" sz="1300" dirty="0"/>
-          </a:p>
-        </p:txBody>
-      </p:sp>
-      <p:sp>
-        <p:nvSpPr>
-          <p:cNvPr id="20" name="Shape 18"/>
-          <p:cNvSpPr/>
-          <p:nvPr/>
-        </p:nvSpPr>
-        <p:spPr>
-          <a:xfrm>
-            <a:off x="109728" y="4343400"/>
-            <a:ext cx="11826240" cy="603504"/>
-          </a:xfrm>
-          <a:prstGeom prst="rect">
-            <a:avLst/>
-          </a:prstGeom>
-          <a:solidFill>
-            <a:srgbClr val="FFFFFF"/>
-          </a:solidFill>
-          <a:ln w="12700">
-            <a:solidFill>
-              <a:srgbClr val="FFFFFF"/>
-            </a:solidFill>
-            <a:prstDash val="solid"/>
-          </a:ln>
-        </p:spPr>
-      </p:sp>
-      <p:sp>
-        <p:nvSpPr>
-          <p:cNvPr id="21" name="Shape 19"/>
-          <p:cNvSpPr/>
-          <p:nvPr/>
-        </p:nvSpPr>
-        <p:spPr>
-          <a:xfrm>
-            <a:off x="256032" y="4581144"/>
-            <a:ext cx="128016" cy="128016"/>
-          </a:xfrm>
-          <a:prstGeom prst="ellipse">
-            <a:avLst/>
-          </a:prstGeom>
-          <a:solidFill>
-            <a:srgbClr val="2E75B6"/>
-          </a:solidFill>
-          <a:ln w="12700">
-            <a:solidFill>
-              <a:srgbClr val="2E75B6"/>
-            </a:solidFill>
-            <a:prstDash val="solid"/>
-          </a:ln>
-        </p:spPr>
-      </p:sp>
-      <p:sp>
-        <p:nvSpPr>
-          <p:cNvPr id="22" name="Text 20"/>
-          <p:cNvSpPr/>
-          <p:nvPr/>
-        </p:nvSpPr>
-        <p:spPr>
-          <a:xfrm>
-            <a:off x="475488" y="4343400"/>
-            <a:ext cx="10485120" cy="603504"/>
-          </a:xfrm>
-          <a:prstGeom prst="rect">
-            <a:avLst/>
-          </a:prstGeom>
-          <a:noFill/>
-          <a:ln/>
-        </p:spPr>
-        <p:txBody>
-          <a:bodyPr wrap="square" rtlCol="0" anchor="ctr"/>
-          <a:lstStyle/>
-          <a:p>
-            <a:pPr indent="0" marL="0">
-              <a:buNone/>
-            </a:pPr>
-            <a:r>
-              <a:rPr lang="en-US" sz="1300" dirty="0">
-                <a:solidFill>
-                  <a:srgbClr val="2C2C2C"/>
+              <a:t>project-</a:t>
+            </a:r>
+            <a:endParaRPr lang="en-US" sz="1200" dirty="0"/>
+          </a:p>
+          <a:p>
+            <a:pPr indent="0" marL="0">
+              <a:buNone/>
+            </a:pPr>
+            <a:r>
+              <a:rPr lang="en-US" sz="1200" b="1" dirty="0">
+                <a:solidFill>
+                  <a:srgbClr val="1F3864"/>
                 </a:solidFill>
                 <a:latin typeface="Calibri" pitchFamily="34" charset="0"/>
                 <a:ea typeface="Calibri" pitchFamily="34" charset="-122"/>
                 <a:cs typeface="Calibri" pitchFamily="34" charset="-120"/>
               </a:rPr>
-              <a:t>ALL ROLES  —  Stage 5 Governance is a delivery blocker. Read it regardless of your role.</a:t>
-            </a:r>
-            <a:endParaRPr lang="en-US" sz="1300" dirty="0"/>
+              <a:t>delivery/</a:t>
+            </a:r>
+            <a:endParaRPr lang="en-US" sz="1200" dirty="0"/>
+          </a:p>
+        </p:txBody>
+      </p:sp>
+      <p:sp>
+        <p:nvSpPr>
+          <p:cNvPr id="22" name="Text 20"/>
+          <p:cNvSpPr/>
+          <p:nvPr/>
+        </p:nvSpPr>
+        <p:spPr>
+          <a:xfrm>
+            <a:off x="2194560" y="4224528"/>
+            <a:ext cx="6400800" cy="676656"/>
+          </a:xfrm>
+          <a:prstGeom prst="rect">
+            <a:avLst/>
+          </a:prstGeom>
+          <a:noFill/>
+          <a:ln/>
+        </p:spPr>
+        <p:txBody>
+          <a:bodyPr wrap="square" rtlCol="0" anchor="ctr"/>
+          <a:lstStyle/>
+          <a:p>
+            <a:pPr indent="0" marL="0">
+              <a:buNone/>
+            </a:pPr>
+            <a:r>
+              <a:rPr lang="en-US" sz="1200" dirty="0">
+                <a:solidFill>
+                  <a:srgbClr val="2C2C2C"/>
+                </a:solidFill>
+                <a:latin typeface="Calibri" pitchFamily="34" charset="0"/>
+                <a:ea typeface="Calibri" pitchFamily="34" charset="-122"/>
+                <a:cs typeface="Calibri" pitchFamily="34" charset="-120"/>
+              </a:rPr>
+              <a:t>12 delivery artifacts: requirements questionnaire, UAT test plan, enterprise readiness assessment, functional design doc. Every project needs these — templates mean you fill in, not create.</a:t>
+            </a:r>
+            <a:endParaRPr lang="en-US" sz="1200" dirty="0"/>
           </a:p>
         </p:txBody>
       </p:sp>
@@ -7979,7 +9732,7 @@
     <p:bg>
       <p:bgPr>
         <a:solidFill>
-          <a:srgbClr val="2E75B6"/>
+          <a:srgbClr val="FFFFFF"/>
         </a:solidFill>
       </p:bgPr>
     </p:bg>
@@ -7999,120 +9752,614 @@
       </p:grpSpPr>
       <p:sp>
         <p:nvSpPr>
-          <p:cNvPr id="2" name="Text 0"/>
-          <p:cNvSpPr/>
-          <p:nvPr/>
-        </p:nvSpPr>
-        <p:spPr>
-          <a:xfrm>
-            <a:off x="457200" y="914400"/>
-            <a:ext cx="1828800" cy="1371600"/>
-          </a:xfrm>
-          <a:prstGeom prst="rect">
-            <a:avLst/>
-          </a:prstGeom>
-          <a:noFill/>
-          <a:ln/>
-        </p:spPr>
-        <p:txBody>
-          <a:bodyPr wrap="square" rtlCol="0" anchor="ctr"/>
-          <a:lstStyle/>
-          <a:p>
-            <a:pPr algn="ctr" indent="0" marL="0">
-              <a:buNone/>
-            </a:pPr>
-            <a:r>
-              <a:rPr lang="en-US" sz="8000" b="1" dirty="0">
-                <a:solidFill>
-                  <a:srgbClr val="FFFFFF">
-                    <a:alpha val="70000"/>
-                  </a:srgbClr>
+          <p:cNvPr id="2" name="Shape 0"/>
+          <p:cNvSpPr/>
+          <p:nvPr/>
+        </p:nvSpPr>
+        <p:spPr>
+          <a:xfrm>
+            <a:off x="0" y="0"/>
+            <a:ext cx="109728" cy="6858000"/>
+          </a:xfrm>
+          <a:prstGeom prst="rect">
+            <a:avLst/>
+          </a:prstGeom>
+          <a:solidFill>
+            <a:srgbClr val="1F3864"/>
+          </a:solidFill>
+          <a:ln/>
+        </p:spPr>
+      </p:sp>
+      <p:sp>
+        <p:nvSpPr>
+          <p:cNvPr id="3" name="Shape 1"/>
+          <p:cNvSpPr/>
+          <p:nvPr/>
+        </p:nvSpPr>
+        <p:spPr>
+          <a:xfrm>
+            <a:off x="109728" y="0"/>
+            <a:ext cx="11826240" cy="1005840"/>
+          </a:xfrm>
+          <a:prstGeom prst="rect">
+            <a:avLst/>
+          </a:prstGeom>
+          <a:solidFill>
+            <a:srgbClr val="1F3864"/>
+          </a:solidFill>
+          <a:ln/>
+        </p:spPr>
+      </p:sp>
+      <p:sp>
+        <p:nvSpPr>
+          <p:cNvPr id="4" name="Text 2"/>
+          <p:cNvSpPr/>
+          <p:nvPr/>
+        </p:nvSpPr>
+        <p:spPr>
+          <a:xfrm>
+            <a:off x="320040" y="91440"/>
+            <a:ext cx="10728960" cy="822960"/>
+          </a:xfrm>
+          <a:prstGeom prst="rect">
+            <a:avLst/>
+          </a:prstGeom>
+          <a:noFill/>
+          <a:ln/>
+        </p:spPr>
+        <p:txBody>
+          <a:bodyPr wrap="square" rtlCol="0" anchor="ctr"/>
+          <a:lstStyle/>
+          <a:p>
+            <a:pPr indent="0" marL="0">
+              <a:buNone/>
+            </a:pPr>
+            <a:r>
+              <a:rPr lang="en-US" sz="2400" b="1" dirty="0">
+                <a:solidFill>
+                  <a:srgbClr val="FFFFFF"/>
                 </a:solidFill>
                 <a:latin typeface="Calibri Light" pitchFamily="34" charset="0"/>
                 <a:ea typeface="Calibri Light" pitchFamily="34" charset="-122"/>
                 <a:cs typeface="Calibri Light" pitchFamily="34" charset="-120"/>
               </a:rPr>
-              <a:t>03</a:t>
-            </a:r>
-            <a:endParaRPr lang="en-US" sz="8000" dirty="0"/>
-          </a:p>
-        </p:txBody>
-      </p:sp>
-      <p:sp>
-        <p:nvSpPr>
-          <p:cNvPr id="3" name="Text 1"/>
-          <p:cNvSpPr/>
-          <p:nvPr/>
-        </p:nvSpPr>
-        <p:spPr>
-          <a:xfrm>
-            <a:off x="2286000" y="1463040"/>
-            <a:ext cx="6400800" cy="914400"/>
-          </a:xfrm>
-          <a:prstGeom prst="rect">
-            <a:avLst/>
-          </a:prstGeom>
-          <a:noFill/>
-          <a:ln/>
-        </p:spPr>
-        <p:txBody>
-          <a:bodyPr wrap="square" rtlCol="0" anchor="ctr"/>
-          <a:lstStyle/>
-          <a:p>
-            <a:pPr indent="0" marL="0">
-              <a:buNone/>
-            </a:pPr>
-            <a:r>
-              <a:rPr lang="en-US" sz="3200" b="1" dirty="0">
-                <a:solidFill>
-                  <a:srgbClr val="FFFFFF"/>
-                </a:solidFill>
-                <a:latin typeface="Calibri Light" pitchFamily="34" charset="0"/>
-                <a:ea typeface="Calibri Light" pitchFamily="34" charset="-122"/>
-                <a:cs typeface="Calibri Light" pitchFamily="34" charset="-120"/>
-              </a:rPr>
-              <a:t>How</a:t>
-            </a:r>
-            <a:endParaRPr lang="en-US" sz="3200" dirty="0"/>
-          </a:p>
-        </p:txBody>
-      </p:sp>
-      <p:sp>
-        <p:nvSpPr>
-          <p:cNvPr id="4" name="Text 2"/>
-          <p:cNvSpPr/>
-          <p:nvPr/>
-        </p:nvSpPr>
-        <p:spPr>
-          <a:xfrm>
-            <a:off x="2286000" y="2468880"/>
-            <a:ext cx="6400800" cy="457200"/>
-          </a:xfrm>
-          <a:prstGeom prst="rect">
-            <a:avLst/>
-          </a:prstGeom>
-          <a:noFill/>
-          <a:ln/>
-        </p:spPr>
-        <p:txBody>
-          <a:bodyPr wrap="square" rtlCol="0" anchor="ctr"/>
-          <a:lstStyle/>
-          <a:p>
-            <a:pPr indent="0" marL="0">
-              <a:buNone/>
-            </a:pPr>
-            <a:r>
-              <a:rPr lang="en-US" sz="1800" dirty="0">
-                <a:solidFill>
-                  <a:srgbClr val="BDD7EE"/>
+              <a:t>Engineering Playbook  —  Entry Point by Role</a:t>
+            </a:r>
+            <a:endParaRPr lang="en-US" sz="2400" dirty="0"/>
+          </a:p>
+        </p:txBody>
+      </p:sp>
+      <p:sp>
+        <p:nvSpPr>
+          <p:cNvPr id="5" name="Shape 3"/>
+          <p:cNvSpPr/>
+          <p:nvPr/>
+        </p:nvSpPr>
+        <p:spPr>
+          <a:xfrm>
+            <a:off x="109728" y="1143000"/>
+            <a:ext cx="11826240" cy="603504"/>
+          </a:xfrm>
+          <a:prstGeom prst="rect">
+            <a:avLst/>
+          </a:prstGeom>
+          <a:solidFill>
+            <a:srgbClr val="F2F2F2"/>
+          </a:solidFill>
+          <a:ln w="12700">
+            <a:solidFill>
+              <a:srgbClr val="F2F2F2"/>
+            </a:solidFill>
+            <a:prstDash val="solid"/>
+          </a:ln>
+        </p:spPr>
+      </p:sp>
+      <p:sp>
+        <p:nvSpPr>
+          <p:cNvPr id="6" name="Shape 4"/>
+          <p:cNvSpPr/>
+          <p:nvPr/>
+        </p:nvSpPr>
+        <p:spPr>
+          <a:xfrm>
+            <a:off x="256032" y="1380744"/>
+            <a:ext cx="128016" cy="128016"/>
+          </a:xfrm>
+          <a:prstGeom prst="ellipse">
+            <a:avLst/>
+          </a:prstGeom>
+          <a:solidFill>
+            <a:srgbClr val="2E75B6"/>
+          </a:solidFill>
+          <a:ln w="12700">
+            <a:solidFill>
+              <a:srgbClr val="2E75B6"/>
+            </a:solidFill>
+            <a:prstDash val="solid"/>
+          </a:ln>
+        </p:spPr>
+      </p:sp>
+      <p:sp>
+        <p:nvSpPr>
+          <p:cNvPr id="7" name="Text 5"/>
+          <p:cNvSpPr/>
+          <p:nvPr/>
+        </p:nvSpPr>
+        <p:spPr>
+          <a:xfrm>
+            <a:off x="475488" y="1143000"/>
+            <a:ext cx="10485120" cy="603504"/>
+          </a:xfrm>
+          <a:prstGeom prst="rect">
+            <a:avLst/>
+          </a:prstGeom>
+          <a:noFill/>
+          <a:ln/>
+        </p:spPr>
+        <p:txBody>
+          <a:bodyPr wrap="square" rtlCol="0" anchor="ctr"/>
+          <a:lstStyle/>
+          <a:p>
+            <a:pPr indent="0" marL="0">
+              <a:buNone/>
+            </a:pPr>
+            <a:r>
+              <a:rPr lang="en-US" sz="1300" dirty="0">
+                <a:solidFill>
+                  <a:srgbClr val="2C2C2C"/>
                 </a:solidFill>
                 <a:latin typeface="Calibri" pitchFamily="34" charset="0"/>
                 <a:ea typeface="Calibri" pitchFamily="34" charset="-122"/>
                 <a:cs typeface="Calibri" pitchFamily="34" charset="-120"/>
               </a:rPr>
-              <a:t>Live build: Basic FAQ agent  |  12 min</a:t>
-            </a:r>
-            <a:endParaRPr lang="en-US" sz="1800" dirty="0"/>
+              <a:t>Intern / New to Copilot Studio          Stage 0 to 3  —  walk every step</a:t>
+            </a:r>
+            <a:endParaRPr lang="en-US" sz="1300" dirty="0"/>
+          </a:p>
+        </p:txBody>
+      </p:sp>
+      <p:sp>
+        <p:nvSpPr>
+          <p:cNvPr id="8" name="Shape 6"/>
+          <p:cNvSpPr/>
+          <p:nvPr/>
+        </p:nvSpPr>
+        <p:spPr>
+          <a:xfrm>
+            <a:off x="109728" y="1783080"/>
+            <a:ext cx="11826240" cy="603504"/>
+          </a:xfrm>
+          <a:prstGeom prst="rect">
+            <a:avLst/>
+          </a:prstGeom>
+          <a:solidFill>
+            <a:srgbClr val="FFFFFF"/>
+          </a:solidFill>
+          <a:ln w="12700">
+            <a:solidFill>
+              <a:srgbClr val="FFFFFF"/>
+            </a:solidFill>
+            <a:prstDash val="solid"/>
+          </a:ln>
+        </p:spPr>
+      </p:sp>
+      <p:sp>
+        <p:nvSpPr>
+          <p:cNvPr id="9" name="Shape 7"/>
+          <p:cNvSpPr/>
+          <p:nvPr/>
+        </p:nvSpPr>
+        <p:spPr>
+          <a:xfrm>
+            <a:off x="256032" y="2020824"/>
+            <a:ext cx="128016" cy="128016"/>
+          </a:xfrm>
+          <a:prstGeom prst="ellipse">
+            <a:avLst/>
+          </a:prstGeom>
+          <a:solidFill>
+            <a:srgbClr val="2E75B6"/>
+          </a:solidFill>
+          <a:ln w="12700">
+            <a:solidFill>
+              <a:srgbClr val="2E75B6"/>
+            </a:solidFill>
+            <a:prstDash val="solid"/>
+          </a:ln>
+        </p:spPr>
+      </p:sp>
+      <p:sp>
+        <p:nvSpPr>
+          <p:cNvPr id="10" name="Text 8"/>
+          <p:cNvSpPr/>
+          <p:nvPr/>
+        </p:nvSpPr>
+        <p:spPr>
+          <a:xfrm>
+            <a:off x="475488" y="1783080"/>
+            <a:ext cx="10485120" cy="603504"/>
+          </a:xfrm>
+          <a:prstGeom prst="rect">
+            <a:avLst/>
+          </a:prstGeom>
+          <a:noFill/>
+          <a:ln/>
+        </p:spPr>
+        <p:txBody>
+          <a:bodyPr wrap="square" rtlCol="0" anchor="ctr"/>
+          <a:lstStyle/>
+          <a:p>
+            <a:pPr indent="0" marL="0">
+              <a:buNone/>
+            </a:pPr>
+            <a:r>
+              <a:rPr lang="en-US" sz="1300" dirty="0">
+                <a:solidFill>
+                  <a:srgbClr val="2C2C2C"/>
+                </a:solidFill>
+                <a:latin typeface="Calibri" pitchFamily="34" charset="0"/>
+                <a:ea typeface="Calibri" pitchFamily="34" charset="-122"/>
+                <a:cs typeface="Calibri" pitchFamily="34" charset="-120"/>
+              </a:rPr>
+              <a:t>Developer  (1–2 years)                   Stage 0 (decision)  →  Stage 2 (templates)  →  Stage 3 (build)</a:t>
+            </a:r>
+            <a:endParaRPr lang="en-US" sz="1300" dirty="0"/>
+          </a:p>
+        </p:txBody>
+      </p:sp>
+      <p:sp>
+        <p:nvSpPr>
+          <p:cNvPr id="11" name="Shape 9"/>
+          <p:cNvSpPr/>
+          <p:nvPr/>
+        </p:nvSpPr>
+        <p:spPr>
+          <a:xfrm>
+            <a:off x="109728" y="2423160"/>
+            <a:ext cx="11826240" cy="603504"/>
+          </a:xfrm>
+          <a:prstGeom prst="rect">
+            <a:avLst/>
+          </a:prstGeom>
+          <a:solidFill>
+            <a:srgbClr val="F2F2F2"/>
+          </a:solidFill>
+          <a:ln w="12700">
+            <a:solidFill>
+              <a:srgbClr val="F2F2F2"/>
+            </a:solidFill>
+            <a:prstDash val="solid"/>
+          </a:ln>
+        </p:spPr>
+      </p:sp>
+      <p:sp>
+        <p:nvSpPr>
+          <p:cNvPr id="12" name="Shape 10"/>
+          <p:cNvSpPr/>
+          <p:nvPr/>
+        </p:nvSpPr>
+        <p:spPr>
+          <a:xfrm>
+            <a:off x="256032" y="2660904"/>
+            <a:ext cx="128016" cy="128016"/>
+          </a:xfrm>
+          <a:prstGeom prst="ellipse">
+            <a:avLst/>
+          </a:prstGeom>
+          <a:solidFill>
+            <a:srgbClr val="2E75B6"/>
+          </a:solidFill>
+          <a:ln w="12700">
+            <a:solidFill>
+              <a:srgbClr val="2E75B6"/>
+            </a:solidFill>
+            <a:prstDash val="solid"/>
+          </a:ln>
+        </p:spPr>
+      </p:sp>
+      <p:sp>
+        <p:nvSpPr>
+          <p:cNvPr id="13" name="Text 11"/>
+          <p:cNvSpPr/>
+          <p:nvPr/>
+        </p:nvSpPr>
+        <p:spPr>
+          <a:xfrm>
+            <a:off x="475488" y="2423160"/>
+            <a:ext cx="10485120" cy="603504"/>
+          </a:xfrm>
+          <a:prstGeom prst="rect">
+            <a:avLst/>
+          </a:prstGeom>
+          <a:noFill/>
+          <a:ln/>
+        </p:spPr>
+        <p:txBody>
+          <a:bodyPr wrap="square" rtlCol="0" anchor="ctr"/>
+          <a:lstStyle/>
+          <a:p>
+            <a:pPr indent="0" marL="0">
+              <a:buNone/>
+            </a:pPr>
+            <a:r>
+              <a:rPr lang="en-US" sz="1300" dirty="0">
+                <a:solidFill>
+                  <a:srgbClr val="2C2C2C"/>
+                </a:solidFill>
+                <a:latin typeface="Calibri" pitchFamily="34" charset="0"/>
+                <a:ea typeface="Calibri" pitchFamily="34" charset="-122"/>
+                <a:cs typeface="Calibri" pitchFamily="34" charset="-120"/>
+              </a:rPr>
+              <a:t>Senior developer                             Stage 4 (innovation), 4.5 (pro-code), 6 (CI/CD), 9 (telemetry)</a:t>
+            </a:r>
+            <a:endParaRPr lang="en-US" sz="1300" dirty="0"/>
+          </a:p>
+        </p:txBody>
+      </p:sp>
+      <p:sp>
+        <p:nvSpPr>
+          <p:cNvPr id="14" name="Shape 12"/>
+          <p:cNvSpPr/>
+          <p:nvPr/>
+        </p:nvSpPr>
+        <p:spPr>
+          <a:xfrm>
+            <a:off x="109728" y="3063240"/>
+            <a:ext cx="11826240" cy="603504"/>
+          </a:xfrm>
+          <a:prstGeom prst="rect">
+            <a:avLst/>
+          </a:prstGeom>
+          <a:solidFill>
+            <a:srgbClr val="FFFFFF"/>
+          </a:solidFill>
+          <a:ln w="12700">
+            <a:solidFill>
+              <a:srgbClr val="FFFFFF"/>
+            </a:solidFill>
+            <a:prstDash val="solid"/>
+          </a:ln>
+        </p:spPr>
+      </p:sp>
+      <p:sp>
+        <p:nvSpPr>
+          <p:cNvPr id="15" name="Shape 13"/>
+          <p:cNvSpPr/>
+          <p:nvPr/>
+        </p:nvSpPr>
+        <p:spPr>
+          <a:xfrm>
+            <a:off x="256032" y="3300984"/>
+            <a:ext cx="128016" cy="128016"/>
+          </a:xfrm>
+          <a:prstGeom prst="ellipse">
+            <a:avLst/>
+          </a:prstGeom>
+          <a:solidFill>
+            <a:srgbClr val="2E75B6"/>
+          </a:solidFill>
+          <a:ln w="12700">
+            <a:solidFill>
+              <a:srgbClr val="2E75B6"/>
+            </a:solidFill>
+            <a:prstDash val="solid"/>
+          </a:ln>
+        </p:spPr>
+      </p:sp>
+      <p:sp>
+        <p:nvSpPr>
+          <p:cNvPr id="16" name="Text 14"/>
+          <p:cNvSpPr/>
+          <p:nvPr/>
+        </p:nvSpPr>
+        <p:spPr>
+          <a:xfrm>
+            <a:off x="475488" y="3063240"/>
+            <a:ext cx="10485120" cy="603504"/>
+          </a:xfrm>
+          <a:prstGeom prst="rect">
+            <a:avLst/>
+          </a:prstGeom>
+          <a:noFill/>
+          <a:ln/>
+        </p:spPr>
+        <p:txBody>
+          <a:bodyPr wrap="square" rtlCol="0" anchor="ctr"/>
+          <a:lstStyle/>
+          <a:p>
+            <a:pPr indent="0" marL="0">
+              <a:buNone/>
+            </a:pPr>
+            <a:r>
+              <a:rPr lang="en-US" sz="1300" dirty="0">
+                <a:solidFill>
+                  <a:srgbClr val="2C2C2C"/>
+                </a:solidFill>
+                <a:latin typeface="Calibri" pitchFamily="34" charset="0"/>
+                <a:ea typeface="Calibri" pitchFamily="34" charset="-122"/>
+                <a:cs typeface="Calibri" pitchFamily="34" charset="-120"/>
+              </a:rPr>
+              <a:t>Tech lead                                       Stage 5 (governance)  →  Stage 6 (CI/CD)  →  Stage 10 (monitoring)</a:t>
+            </a:r>
+            <a:endParaRPr lang="en-US" sz="1300" dirty="0"/>
+          </a:p>
+        </p:txBody>
+      </p:sp>
+      <p:sp>
+        <p:nvSpPr>
+          <p:cNvPr id="17" name="Shape 15"/>
+          <p:cNvSpPr/>
+          <p:nvPr/>
+        </p:nvSpPr>
+        <p:spPr>
+          <a:xfrm>
+            <a:off x="109728" y="3703320"/>
+            <a:ext cx="11826240" cy="603504"/>
+          </a:xfrm>
+          <a:prstGeom prst="rect">
+            <a:avLst/>
+          </a:prstGeom>
+          <a:solidFill>
+            <a:srgbClr val="F2F2F2"/>
+          </a:solidFill>
+          <a:ln w="12700">
+            <a:solidFill>
+              <a:srgbClr val="F2F2F2"/>
+            </a:solidFill>
+            <a:prstDash val="solid"/>
+          </a:ln>
+        </p:spPr>
+      </p:sp>
+      <p:sp>
+        <p:nvSpPr>
+          <p:cNvPr id="18" name="Shape 16"/>
+          <p:cNvSpPr/>
+          <p:nvPr/>
+        </p:nvSpPr>
+        <p:spPr>
+          <a:xfrm>
+            <a:off x="256032" y="3941064"/>
+            <a:ext cx="128016" cy="128016"/>
+          </a:xfrm>
+          <a:prstGeom prst="ellipse">
+            <a:avLst/>
+          </a:prstGeom>
+          <a:solidFill>
+            <a:srgbClr val="2E75B6"/>
+          </a:solidFill>
+          <a:ln w="12700">
+            <a:solidFill>
+              <a:srgbClr val="2E75B6"/>
+            </a:solidFill>
+            <a:prstDash val="solid"/>
+          </a:ln>
+        </p:spPr>
+      </p:sp>
+      <p:sp>
+        <p:nvSpPr>
+          <p:cNvPr id="19" name="Text 17"/>
+          <p:cNvSpPr/>
+          <p:nvPr/>
+        </p:nvSpPr>
+        <p:spPr>
+          <a:xfrm>
+            <a:off x="475488" y="3703320"/>
+            <a:ext cx="10485120" cy="603504"/>
+          </a:xfrm>
+          <a:prstGeom prst="rect">
+            <a:avLst/>
+          </a:prstGeom>
+          <a:noFill/>
+          <a:ln/>
+        </p:spPr>
+        <p:txBody>
+          <a:bodyPr wrap="square" rtlCol="0" anchor="ctr"/>
+          <a:lstStyle/>
+          <a:p>
+            <a:pPr indent="0" marL="0">
+              <a:buNone/>
+            </a:pPr>
+            <a:r>
+              <a:rPr lang="en-US" sz="1300" dirty="0">
+                <a:solidFill>
+                  <a:srgbClr val="2C2C2C"/>
+                </a:solidFill>
+                <a:latin typeface="Calibri" pitchFamily="34" charset="0"/>
+                <a:ea typeface="Calibri" pitchFamily="34" charset="-122"/>
+                <a:cs typeface="Calibri" pitchFamily="34" charset="-120"/>
+              </a:rPr>
+              <a:t>Director / Business owner              Stage 0 (decision matrix) and Stage 5 (governance)</a:t>
+            </a:r>
+            <a:endParaRPr lang="en-US" sz="1300" dirty="0"/>
+          </a:p>
+        </p:txBody>
+      </p:sp>
+      <p:sp>
+        <p:nvSpPr>
+          <p:cNvPr id="20" name="Shape 18"/>
+          <p:cNvSpPr/>
+          <p:nvPr/>
+        </p:nvSpPr>
+        <p:spPr>
+          <a:xfrm>
+            <a:off x="109728" y="4343400"/>
+            <a:ext cx="11826240" cy="603504"/>
+          </a:xfrm>
+          <a:prstGeom prst="rect">
+            <a:avLst/>
+          </a:prstGeom>
+          <a:solidFill>
+            <a:srgbClr val="FFFFFF"/>
+          </a:solidFill>
+          <a:ln w="12700">
+            <a:solidFill>
+              <a:srgbClr val="FFFFFF"/>
+            </a:solidFill>
+            <a:prstDash val="solid"/>
+          </a:ln>
+        </p:spPr>
+      </p:sp>
+      <p:sp>
+        <p:nvSpPr>
+          <p:cNvPr id="21" name="Shape 19"/>
+          <p:cNvSpPr/>
+          <p:nvPr/>
+        </p:nvSpPr>
+        <p:spPr>
+          <a:xfrm>
+            <a:off x="256032" y="4581144"/>
+            <a:ext cx="128016" cy="128016"/>
+          </a:xfrm>
+          <a:prstGeom prst="ellipse">
+            <a:avLst/>
+          </a:prstGeom>
+          <a:solidFill>
+            <a:srgbClr val="2E75B6"/>
+          </a:solidFill>
+          <a:ln w="12700">
+            <a:solidFill>
+              <a:srgbClr val="2E75B6"/>
+            </a:solidFill>
+            <a:prstDash val="solid"/>
+          </a:ln>
+        </p:spPr>
+      </p:sp>
+      <p:sp>
+        <p:nvSpPr>
+          <p:cNvPr id="22" name="Text 20"/>
+          <p:cNvSpPr/>
+          <p:nvPr/>
+        </p:nvSpPr>
+        <p:spPr>
+          <a:xfrm>
+            <a:off x="475488" y="4343400"/>
+            <a:ext cx="10485120" cy="603504"/>
+          </a:xfrm>
+          <a:prstGeom prst="rect">
+            <a:avLst/>
+          </a:prstGeom>
+          <a:noFill/>
+          <a:ln/>
+        </p:spPr>
+        <p:txBody>
+          <a:bodyPr wrap="square" rtlCol="0" anchor="ctr"/>
+          <a:lstStyle/>
+          <a:p>
+            <a:pPr indent="0" marL="0">
+              <a:buNone/>
+            </a:pPr>
+            <a:r>
+              <a:rPr lang="en-US" sz="1300" dirty="0">
+                <a:solidFill>
+                  <a:srgbClr val="2C2C2C"/>
+                </a:solidFill>
+                <a:latin typeface="Calibri" pitchFamily="34" charset="0"/>
+                <a:ea typeface="Calibri" pitchFamily="34" charset="-122"/>
+                <a:cs typeface="Calibri" pitchFamily="34" charset="-120"/>
+              </a:rPr>
+              <a:t>ALL ROLES  —  Stage 5 Governance is a delivery blocker. Read it before every engagement.</a:t>
+            </a:r>
+            <a:endParaRPr lang="en-US" sz="1300" dirty="0"/>
           </a:p>
         </p:txBody>
       </p:sp>
